--- a/feature-slice/05-impact-risk-analysis/impact-risk-analysis.pptx
+++ b/feature-slice/05-impact-risk-analysis/impact-risk-analysis.pptx
@@ -205,7 +205,7 @@
           <a:p>
             <a:fld id="{1CFE36D4-B224-4D49-A73E-0BF1A210728E}" type="datetimeFigureOut">
               <a:rPr lang="ko-KR" altLang="en-US" smtClean="0"/>
-              <a:t>2026. 4. 10.</a:t>
+              <a:t>2026. 4. 13.</a:t>
             </a:fld>
             <a:endParaRPr lang="ko-KR" altLang="en-US"/>
           </a:p>
@@ -370,7 +370,7 @@
           <a:p>
             <a:fld id="{79F7304B-F283-4E41-A8FA-EB923FFBA2A0}" type="datetimeFigureOut">
               <a:rPr lang="ko-KR" altLang="en-US" smtClean="0"/>
-              <a:t>2026. 4. 10.</a:t>
+              <a:t>2026. 4. 13.</a:t>
             </a:fld>
             <a:endParaRPr lang="ko-KR" altLang="en-US"/>
           </a:p>
@@ -1461,7 +1461,7 @@
             <a:fld id="{A08F8EB2-BEDB-4375-BAD0-E61FA200F7A6}" type="datetimeFigureOut">
               <a:rPr lang="ko-KR" altLang="en-US" smtClean="0"/>
               <a:pPr/>
-              <a:t>2026. 4. 10.</a:t>
+              <a:t>2026. 4. 13.</a:t>
             </a:fld>
             <a:endParaRPr lang="ko-KR" altLang="en-US"/>
           </a:p>
@@ -6043,7 +6043,7 @@
         <p:spPr>
           <a:xfrm>
             <a:off x="3962108" y="1445488"/>
-            <a:ext cx="6137725" cy="3967024"/>
+            <a:ext cx="6274092" cy="3967024"/>
           </a:xfrm>
           <a:prstGeom prst="rect">
             <a:avLst/>
@@ -6194,7 +6194,7 @@
         </p:nvSpPr>
         <p:spPr>
           <a:xfrm>
-            <a:off x="2249679" y="3732784"/>
+            <a:off x="355859" y="3800716"/>
             <a:ext cx="1325880" cy="566928"/>
           </a:xfrm>
           <a:prstGeom prst="roundRect">
@@ -6297,7 +6297,7 @@
         </p:nvSpPr>
         <p:spPr>
           <a:xfrm>
-            <a:off x="2068289" y="2808592"/>
+            <a:off x="2068288" y="2595561"/>
             <a:ext cx="1507270" cy="566928"/>
           </a:xfrm>
           <a:prstGeom prst="rect">
@@ -6527,7 +6527,7 @@
         </p:nvSpPr>
         <p:spPr>
           <a:xfrm>
-            <a:off x="2068289" y="1445488"/>
+            <a:off x="2064133" y="4322889"/>
             <a:ext cx="1507270" cy="1005840"/>
           </a:xfrm>
           <a:prstGeom prst="rect">
@@ -6591,7 +6591,7 @@
         </p:nvSpPr>
         <p:spPr>
           <a:xfrm>
-            <a:off x="2273284" y="1792960"/>
+            <a:off x="2269128" y="4670361"/>
             <a:ext cx="1097280" cy="530352"/>
           </a:xfrm>
           <a:prstGeom prst="rect">
@@ -6767,7 +6767,7 @@
         </p:nvSpPr>
         <p:spPr>
           <a:xfrm>
-            <a:off x="6357424" y="1792960"/>
+            <a:off x="6757943" y="1792960"/>
             <a:ext cx="1679404" cy="566928"/>
           </a:xfrm>
           <a:prstGeom prst="rect">
@@ -6882,7 +6882,7 @@
         </p:nvSpPr>
         <p:spPr>
           <a:xfrm>
-            <a:off x="6357423" y="2486100"/>
+            <a:off x="6757942" y="2486100"/>
             <a:ext cx="1679405" cy="566928"/>
           </a:xfrm>
           <a:prstGeom prst="rect">
@@ -6997,7 +6997,7 @@
         </p:nvSpPr>
         <p:spPr>
           <a:xfrm>
-            <a:off x="6357423" y="3179240"/>
+            <a:off x="6757942" y="3179240"/>
             <a:ext cx="1679405" cy="566928"/>
           </a:xfrm>
           <a:prstGeom prst="rect">
@@ -7124,7 +7124,7 @@
         </p:nvSpPr>
         <p:spPr>
           <a:xfrm>
-            <a:off x="6357423" y="3872380"/>
+            <a:off x="6757942" y="3872380"/>
             <a:ext cx="1679405" cy="566928"/>
           </a:xfrm>
           <a:prstGeom prst="rect">
@@ -7227,7 +7227,7 @@
         </p:nvSpPr>
         <p:spPr>
           <a:xfrm>
-            <a:off x="6357422" y="4565520"/>
+            <a:off x="6364379" y="4565520"/>
             <a:ext cx="1679405" cy="566928"/>
           </a:xfrm>
           <a:prstGeom prst="rect">
@@ -7366,7 +7366,7 @@
         </p:nvSpPr>
         <p:spPr>
           <a:xfrm>
-            <a:off x="8786601" y="4715210"/>
+            <a:off x="9008709" y="4715210"/>
             <a:ext cx="1137540" cy="566928"/>
           </a:xfrm>
           <a:prstGeom prst="rect">
@@ -7694,6 +7694,1598 @@
             <a:endParaRPr dirty="0">
               <a:latin typeface="+mn-ea"/>
             </a:endParaRPr>
+          </a:p>
+        </p:txBody>
+      </p:sp>
+      <p:cxnSp>
+        <p:nvCxnSpPr>
+          <p:cNvPr id="6" name="직선 화살표 연결선 8">
+            <a:extLst>
+              <a:ext uri="{FF2B5EF4-FFF2-40B4-BE49-F238E27FC236}">
+                <a16:creationId xmlns:a16="http://schemas.microsoft.com/office/drawing/2014/main" id="{D5286AD5-3F46-3E43-6D56-44F567C89A06}"/>
+              </a:ext>
+            </a:extLst>
+          </p:cNvPr>
+          <p:cNvCxnSpPr>
+            <a:cxnSpLocks/>
+            <a:stCxn id="5" idx="3"/>
+            <a:endCxn id="11" idx="1"/>
+          </p:cNvCxnSpPr>
+          <p:nvPr/>
+        </p:nvCxnSpPr>
+        <p:spPr>
+          <a:xfrm flipV="1">
+            <a:off x="5626835" y="2076424"/>
+            <a:ext cx="1131108" cy="1299096"/>
+          </a:xfrm>
+          <a:prstGeom prst="bentConnector3">
+            <a:avLst>
+              <a:gd name="adj1" fmla="val 19484"/>
+            </a:avLst>
+          </a:prstGeom>
+          <a:ln w="3175">
+            <a:solidFill>
+              <a:schemeClr val="tx1"/>
+            </a:solidFill>
+            <a:headEnd type="triangle"/>
+            <a:tailEnd type="triangle"/>
+          </a:ln>
+          <a:effectLst/>
+        </p:spPr>
+        <p:style>
+          <a:lnRef idx="2">
+            <a:schemeClr val="accent1"/>
+          </a:lnRef>
+          <a:fillRef idx="0">
+            <a:schemeClr val="accent1"/>
+          </a:fillRef>
+          <a:effectRef idx="1">
+            <a:schemeClr val="accent1"/>
+          </a:effectRef>
+          <a:fontRef idx="minor">
+            <a:schemeClr val="tx1"/>
+          </a:fontRef>
+        </p:style>
+      </p:cxnSp>
+      <p:cxnSp>
+        <p:nvCxnSpPr>
+          <p:cNvPr id="23" name="직선 화살표 연결선 8">
+            <a:extLst>
+              <a:ext uri="{FF2B5EF4-FFF2-40B4-BE49-F238E27FC236}">
+                <a16:creationId xmlns:a16="http://schemas.microsoft.com/office/drawing/2014/main" id="{C5E7A604-C1CB-1290-EFD8-524E70DB1328}"/>
+              </a:ext>
+            </a:extLst>
+          </p:cNvPr>
+          <p:cNvCxnSpPr>
+            <a:cxnSpLocks/>
+            <a:stCxn id="5" idx="3"/>
+            <a:endCxn id="12" idx="1"/>
+          </p:cNvCxnSpPr>
+          <p:nvPr/>
+        </p:nvCxnSpPr>
+        <p:spPr>
+          <a:xfrm flipV="1">
+            <a:off x="5626835" y="2769564"/>
+            <a:ext cx="1131107" cy="605956"/>
+          </a:xfrm>
+          <a:prstGeom prst="bentConnector3">
+            <a:avLst>
+              <a:gd name="adj1" fmla="val 19484"/>
+            </a:avLst>
+          </a:prstGeom>
+          <a:ln w="3175">
+            <a:solidFill>
+              <a:schemeClr val="tx1"/>
+            </a:solidFill>
+            <a:headEnd type="triangle"/>
+            <a:tailEnd type="triangle"/>
+          </a:ln>
+          <a:effectLst/>
+        </p:spPr>
+        <p:style>
+          <a:lnRef idx="2">
+            <a:schemeClr val="accent1"/>
+          </a:lnRef>
+          <a:fillRef idx="0">
+            <a:schemeClr val="accent1"/>
+          </a:fillRef>
+          <a:effectRef idx="1">
+            <a:schemeClr val="accent1"/>
+          </a:effectRef>
+          <a:fontRef idx="minor">
+            <a:schemeClr val="tx1"/>
+          </a:fontRef>
+        </p:style>
+      </p:cxnSp>
+      <p:cxnSp>
+        <p:nvCxnSpPr>
+          <p:cNvPr id="26" name="직선 화살표 연결선 8">
+            <a:extLst>
+              <a:ext uri="{FF2B5EF4-FFF2-40B4-BE49-F238E27FC236}">
+                <a16:creationId xmlns:a16="http://schemas.microsoft.com/office/drawing/2014/main" id="{34D2B510-C50D-F23D-3AB9-7732F414B582}"/>
+              </a:ext>
+            </a:extLst>
+          </p:cNvPr>
+          <p:cNvCxnSpPr>
+            <a:cxnSpLocks/>
+            <a:stCxn id="5" idx="3"/>
+            <a:endCxn id="13" idx="1"/>
+          </p:cNvCxnSpPr>
+          <p:nvPr/>
+        </p:nvCxnSpPr>
+        <p:spPr>
+          <a:xfrm>
+            <a:off x="5626835" y="3375520"/>
+            <a:ext cx="1131107" cy="87184"/>
+          </a:xfrm>
+          <a:prstGeom prst="bentConnector3">
+            <a:avLst>
+              <a:gd name="adj1" fmla="val 19484"/>
+            </a:avLst>
+          </a:prstGeom>
+          <a:ln w="3175">
+            <a:solidFill>
+              <a:schemeClr val="tx1"/>
+            </a:solidFill>
+            <a:headEnd type="triangle"/>
+            <a:tailEnd type="triangle"/>
+          </a:ln>
+          <a:effectLst/>
+        </p:spPr>
+        <p:style>
+          <a:lnRef idx="2">
+            <a:schemeClr val="accent1"/>
+          </a:lnRef>
+          <a:fillRef idx="0">
+            <a:schemeClr val="accent1"/>
+          </a:fillRef>
+          <a:effectRef idx="1">
+            <a:schemeClr val="accent1"/>
+          </a:effectRef>
+          <a:fontRef idx="minor">
+            <a:schemeClr val="tx1"/>
+          </a:fontRef>
+        </p:style>
+      </p:cxnSp>
+      <p:cxnSp>
+        <p:nvCxnSpPr>
+          <p:cNvPr id="29" name="직선 화살표 연결선 8">
+            <a:extLst>
+              <a:ext uri="{FF2B5EF4-FFF2-40B4-BE49-F238E27FC236}">
+                <a16:creationId xmlns:a16="http://schemas.microsoft.com/office/drawing/2014/main" id="{CC3239DD-36A1-2942-1B17-ACC754D98872}"/>
+              </a:ext>
+            </a:extLst>
+          </p:cNvPr>
+          <p:cNvCxnSpPr>
+            <a:cxnSpLocks/>
+            <a:stCxn id="5" idx="3"/>
+            <a:endCxn id="14" idx="1"/>
+          </p:cNvCxnSpPr>
+          <p:nvPr/>
+        </p:nvCxnSpPr>
+        <p:spPr>
+          <a:xfrm>
+            <a:off x="5626835" y="3375520"/>
+            <a:ext cx="1131107" cy="780324"/>
+          </a:xfrm>
+          <a:prstGeom prst="bentConnector3">
+            <a:avLst>
+              <a:gd name="adj1" fmla="val 19484"/>
+            </a:avLst>
+          </a:prstGeom>
+          <a:ln w="3175">
+            <a:solidFill>
+              <a:schemeClr val="tx1"/>
+            </a:solidFill>
+            <a:headEnd type="triangle"/>
+            <a:tailEnd type="triangle"/>
+          </a:ln>
+          <a:effectLst/>
+        </p:spPr>
+        <p:style>
+          <a:lnRef idx="2">
+            <a:schemeClr val="accent1"/>
+          </a:lnRef>
+          <a:fillRef idx="0">
+            <a:schemeClr val="accent1"/>
+          </a:fillRef>
+          <a:effectRef idx="1">
+            <a:schemeClr val="accent1"/>
+          </a:effectRef>
+          <a:fontRef idx="minor">
+            <a:schemeClr val="tx1"/>
+          </a:fontRef>
+        </p:style>
+      </p:cxnSp>
+      <p:cxnSp>
+        <p:nvCxnSpPr>
+          <p:cNvPr id="40" name="직선 화살표 연결선 8">
+            <a:extLst>
+              <a:ext uri="{FF2B5EF4-FFF2-40B4-BE49-F238E27FC236}">
+                <a16:creationId xmlns:a16="http://schemas.microsoft.com/office/drawing/2014/main" id="{FDE6814A-A42A-5785-8F52-9B038C3F10B5}"/>
+              </a:ext>
+            </a:extLst>
+          </p:cNvPr>
+          <p:cNvCxnSpPr>
+            <a:cxnSpLocks/>
+          </p:cNvCxnSpPr>
+          <p:nvPr/>
+        </p:nvCxnSpPr>
+        <p:spPr>
+          <a:xfrm>
+            <a:off x="5030657" y="3656431"/>
+            <a:ext cx="1326764" cy="1038340"/>
+          </a:xfrm>
+          <a:prstGeom prst="bentConnector3">
+            <a:avLst>
+              <a:gd name="adj1" fmla="val 999"/>
+            </a:avLst>
+          </a:prstGeom>
+          <a:ln w="3175">
+            <a:solidFill>
+              <a:schemeClr val="tx1"/>
+            </a:solidFill>
+            <a:headEnd type="none"/>
+            <a:tailEnd type="triangle"/>
+          </a:ln>
+          <a:effectLst/>
+        </p:spPr>
+        <p:style>
+          <a:lnRef idx="2">
+            <a:schemeClr val="accent1"/>
+          </a:lnRef>
+          <a:fillRef idx="0">
+            <a:schemeClr val="accent1"/>
+          </a:fillRef>
+          <a:effectRef idx="1">
+            <a:schemeClr val="accent1"/>
+          </a:effectRef>
+          <a:fontRef idx="minor">
+            <a:schemeClr val="tx1"/>
+          </a:fontRef>
+        </p:style>
+      </p:cxnSp>
+      <p:cxnSp>
+        <p:nvCxnSpPr>
+          <p:cNvPr id="46" name="직선 화살표 연결선 8">
+            <a:extLst>
+              <a:ext uri="{FF2B5EF4-FFF2-40B4-BE49-F238E27FC236}">
+                <a16:creationId xmlns:a16="http://schemas.microsoft.com/office/drawing/2014/main" id="{02853A0E-4F89-83A4-C7A8-EA08B3262A4A}"/>
+              </a:ext>
+            </a:extLst>
+          </p:cNvPr>
+          <p:cNvCxnSpPr>
+            <a:cxnSpLocks/>
+            <a:endCxn id="5" idx="2"/>
+          </p:cNvCxnSpPr>
+          <p:nvPr/>
+        </p:nvCxnSpPr>
+        <p:spPr>
+          <a:xfrm rot="10800000">
+            <a:off x="4873200" y="3658985"/>
+            <a:ext cx="4135508" cy="1540495"/>
+          </a:xfrm>
+          <a:prstGeom prst="bentConnector2">
+            <a:avLst/>
+          </a:prstGeom>
+          <a:ln w="3175">
+            <a:solidFill>
+              <a:schemeClr val="tx1"/>
+            </a:solidFill>
+            <a:headEnd type="none"/>
+            <a:tailEnd type="triangle"/>
+          </a:ln>
+          <a:effectLst/>
+        </p:spPr>
+        <p:style>
+          <a:lnRef idx="2">
+            <a:schemeClr val="accent1"/>
+          </a:lnRef>
+          <a:fillRef idx="0">
+            <a:schemeClr val="accent1"/>
+          </a:fillRef>
+          <a:effectRef idx="1">
+            <a:schemeClr val="accent1"/>
+          </a:effectRef>
+          <a:fontRef idx="minor">
+            <a:schemeClr val="tx1"/>
+          </a:fontRef>
+        </p:style>
+      </p:cxnSp>
+      <p:cxnSp>
+        <p:nvCxnSpPr>
+          <p:cNvPr id="50" name="직선 화살표 연결선 8">
+            <a:extLst>
+              <a:ext uri="{FF2B5EF4-FFF2-40B4-BE49-F238E27FC236}">
+                <a16:creationId xmlns:a16="http://schemas.microsoft.com/office/drawing/2014/main" id="{43F6C8C5-21DA-3F47-52A4-AF44C0D58368}"/>
+              </a:ext>
+            </a:extLst>
+          </p:cNvPr>
+          <p:cNvCxnSpPr>
+            <a:cxnSpLocks/>
+            <a:stCxn id="5" idx="0"/>
+            <a:endCxn id="4" idx="1"/>
+          </p:cNvCxnSpPr>
+          <p:nvPr/>
+        </p:nvCxnSpPr>
+        <p:spPr>
+          <a:xfrm rot="16200000" flipV="1">
+            <a:off x="3364229" y="1583085"/>
+            <a:ext cx="213031" cy="2804912"/>
+          </a:xfrm>
+          <a:prstGeom prst="bentConnector4">
+            <a:avLst>
+              <a:gd name="adj1" fmla="val 352069"/>
+              <a:gd name="adj2" fmla="val 108150"/>
+            </a:avLst>
+          </a:prstGeom>
+          <a:ln w="3175">
+            <a:solidFill>
+              <a:schemeClr val="tx1"/>
+            </a:solidFill>
+            <a:headEnd type="none"/>
+            <a:tailEnd type="triangle"/>
+          </a:ln>
+          <a:effectLst/>
+        </p:spPr>
+        <p:style>
+          <a:lnRef idx="2">
+            <a:schemeClr val="accent1"/>
+          </a:lnRef>
+          <a:fillRef idx="0">
+            <a:schemeClr val="accent1"/>
+          </a:fillRef>
+          <a:effectRef idx="1">
+            <a:schemeClr val="accent1"/>
+          </a:effectRef>
+          <a:fontRef idx="minor">
+            <a:schemeClr val="tx1"/>
+          </a:fontRef>
+        </p:style>
+      </p:cxnSp>
+      <p:cxnSp>
+        <p:nvCxnSpPr>
+          <p:cNvPr id="55" name="직선 화살표 연결선 8">
+            <a:extLst>
+              <a:ext uri="{FF2B5EF4-FFF2-40B4-BE49-F238E27FC236}">
+                <a16:creationId xmlns:a16="http://schemas.microsoft.com/office/drawing/2014/main" id="{8447F4C0-4DF6-39E4-34BB-196F0C33C575}"/>
+              </a:ext>
+            </a:extLst>
+          </p:cNvPr>
+          <p:cNvCxnSpPr>
+            <a:cxnSpLocks/>
+            <a:stCxn id="4" idx="3"/>
+            <a:endCxn id="5" idx="1"/>
+          </p:cNvCxnSpPr>
+          <p:nvPr/>
+        </p:nvCxnSpPr>
+        <p:spPr>
+          <a:xfrm>
+            <a:off x="3575558" y="2879025"/>
+            <a:ext cx="544007" cy="496495"/>
+          </a:xfrm>
+          <a:prstGeom prst="bentConnector3">
+            <a:avLst>
+              <a:gd name="adj1" fmla="val 50000"/>
+            </a:avLst>
+          </a:prstGeom>
+          <a:ln w="3175">
+            <a:solidFill>
+              <a:schemeClr val="tx1"/>
+            </a:solidFill>
+            <a:headEnd type="none"/>
+            <a:tailEnd type="triangle"/>
+          </a:ln>
+          <a:effectLst/>
+        </p:spPr>
+        <p:style>
+          <a:lnRef idx="2">
+            <a:schemeClr val="accent1"/>
+          </a:lnRef>
+          <a:fillRef idx="0">
+            <a:schemeClr val="accent1"/>
+          </a:fillRef>
+          <a:effectRef idx="1">
+            <a:schemeClr val="accent1"/>
+          </a:effectRef>
+          <a:fontRef idx="minor">
+            <a:schemeClr val="tx1"/>
+          </a:fontRef>
+        </p:style>
+      </p:cxnSp>
+      <p:cxnSp>
+        <p:nvCxnSpPr>
+          <p:cNvPr id="58" name="직선 화살표 연결선 8">
+            <a:extLst>
+              <a:ext uri="{FF2B5EF4-FFF2-40B4-BE49-F238E27FC236}">
+                <a16:creationId xmlns:a16="http://schemas.microsoft.com/office/drawing/2014/main" id="{C46F12AD-223E-C9C2-80EF-24D378AB4C61}"/>
+              </a:ext>
+            </a:extLst>
+          </p:cNvPr>
+          <p:cNvCxnSpPr>
+            <a:cxnSpLocks/>
+            <a:stCxn id="3" idx="3"/>
+            <a:endCxn id="5" idx="1"/>
+          </p:cNvCxnSpPr>
+          <p:nvPr/>
+        </p:nvCxnSpPr>
+        <p:spPr>
+          <a:xfrm flipV="1">
+            <a:off x="1681739" y="3375520"/>
+            <a:ext cx="2437826" cy="708660"/>
+          </a:xfrm>
+          <a:prstGeom prst="bentConnector3">
+            <a:avLst>
+              <a:gd name="adj1" fmla="val 88810"/>
+            </a:avLst>
+          </a:prstGeom>
+          <a:ln w="3175">
+            <a:solidFill>
+              <a:schemeClr val="tx1"/>
+            </a:solidFill>
+            <a:headEnd type="none"/>
+            <a:tailEnd type="triangle"/>
+          </a:ln>
+          <a:effectLst/>
+        </p:spPr>
+        <p:style>
+          <a:lnRef idx="2">
+            <a:schemeClr val="accent1"/>
+          </a:lnRef>
+          <a:fillRef idx="0">
+            <a:schemeClr val="accent1"/>
+          </a:fillRef>
+          <a:effectRef idx="1">
+            <a:schemeClr val="accent1"/>
+          </a:effectRef>
+          <a:fontRef idx="minor">
+            <a:schemeClr val="tx1"/>
+          </a:fontRef>
+        </p:style>
+      </p:cxnSp>
+      <p:cxnSp>
+        <p:nvCxnSpPr>
+          <p:cNvPr id="61" name="직선 화살표 연결선 8">
+            <a:extLst>
+              <a:ext uri="{FF2B5EF4-FFF2-40B4-BE49-F238E27FC236}">
+                <a16:creationId xmlns:a16="http://schemas.microsoft.com/office/drawing/2014/main" id="{CC66E4FF-21F8-1637-1CAF-60A3367C2A10}"/>
+              </a:ext>
+            </a:extLst>
+          </p:cNvPr>
+          <p:cNvCxnSpPr>
+            <a:cxnSpLocks/>
+            <a:stCxn id="8" idx="3"/>
+          </p:cNvCxnSpPr>
+          <p:nvPr/>
+        </p:nvCxnSpPr>
+        <p:spPr>
+          <a:xfrm>
+            <a:off x="3366408" y="4935537"/>
+            <a:ext cx="2991014" cy="0"/>
+          </a:xfrm>
+          <a:prstGeom prst="straightConnector1">
+            <a:avLst/>
+          </a:prstGeom>
+          <a:ln w="3175">
+            <a:solidFill>
+              <a:schemeClr val="tx1"/>
+            </a:solidFill>
+            <a:headEnd type="none"/>
+            <a:tailEnd type="triangle"/>
+          </a:ln>
+          <a:effectLst/>
+        </p:spPr>
+        <p:style>
+          <a:lnRef idx="2">
+            <a:schemeClr val="accent1"/>
+          </a:lnRef>
+          <a:fillRef idx="0">
+            <a:schemeClr val="accent1"/>
+          </a:fillRef>
+          <a:effectRef idx="1">
+            <a:schemeClr val="accent1"/>
+          </a:effectRef>
+          <a:fontRef idx="minor">
+            <a:schemeClr val="tx1"/>
+          </a:fontRef>
+        </p:style>
+      </p:cxnSp>
+      <p:cxnSp>
+        <p:nvCxnSpPr>
+          <p:cNvPr id="66" name="직선 화살표 연결선 8">
+            <a:extLst>
+              <a:ext uri="{FF2B5EF4-FFF2-40B4-BE49-F238E27FC236}">
+                <a16:creationId xmlns:a16="http://schemas.microsoft.com/office/drawing/2014/main" id="{28327E26-6EED-BA2D-E90B-303F46F17A1B}"/>
+              </a:ext>
+            </a:extLst>
+          </p:cNvPr>
+          <p:cNvCxnSpPr>
+            <a:cxnSpLocks/>
+            <a:stCxn id="2" idx="3"/>
+            <a:endCxn id="4" idx="1"/>
+          </p:cNvCxnSpPr>
+          <p:nvPr/>
+        </p:nvCxnSpPr>
+        <p:spPr>
+          <a:xfrm flipV="1">
+            <a:off x="1681739" y="2879025"/>
+            <a:ext cx="386549" cy="496495"/>
+          </a:xfrm>
+          <a:prstGeom prst="bentConnector3">
+            <a:avLst>
+              <a:gd name="adj1" fmla="val 40429"/>
+            </a:avLst>
+          </a:prstGeom>
+          <a:ln w="3175">
+            <a:solidFill>
+              <a:schemeClr val="tx1"/>
+            </a:solidFill>
+            <a:headEnd type="none"/>
+            <a:tailEnd type="triangle"/>
+          </a:ln>
+          <a:effectLst/>
+        </p:spPr>
+        <p:style>
+          <a:lnRef idx="2">
+            <a:schemeClr val="accent1"/>
+          </a:lnRef>
+          <a:fillRef idx="0">
+            <a:schemeClr val="accent1"/>
+          </a:fillRef>
+          <a:effectRef idx="1">
+            <a:schemeClr val="accent1"/>
+          </a:effectRef>
+          <a:fontRef idx="minor">
+            <a:schemeClr val="tx1"/>
+          </a:fontRef>
+        </p:style>
+      </p:cxnSp>
+      <p:cxnSp>
+        <p:nvCxnSpPr>
+          <p:cNvPr id="70" name="직선 화살표 연결선 8">
+            <a:extLst>
+              <a:ext uri="{FF2B5EF4-FFF2-40B4-BE49-F238E27FC236}">
+                <a16:creationId xmlns:a16="http://schemas.microsoft.com/office/drawing/2014/main" id="{291DDC75-6D74-64EE-FD70-25A68B52E3DD}"/>
+              </a:ext>
+            </a:extLst>
+          </p:cNvPr>
+          <p:cNvCxnSpPr>
+            <a:cxnSpLocks/>
+            <a:stCxn id="15" idx="2"/>
+            <a:endCxn id="8" idx="1"/>
+          </p:cNvCxnSpPr>
+          <p:nvPr/>
+        </p:nvCxnSpPr>
+        <p:spPr>
+          <a:xfrm rot="5400000" flipH="1">
+            <a:off x="4638149" y="2566516"/>
+            <a:ext cx="196911" cy="4934954"/>
+          </a:xfrm>
+          <a:prstGeom prst="bentConnector4">
+            <a:avLst>
+              <a:gd name="adj1" fmla="val -206117"/>
+              <a:gd name="adj2" fmla="val 106963"/>
+            </a:avLst>
+          </a:prstGeom>
+          <a:ln w="3175">
+            <a:solidFill>
+              <a:schemeClr val="tx1"/>
+            </a:solidFill>
+            <a:headEnd type="none"/>
+            <a:tailEnd type="triangle"/>
+          </a:ln>
+          <a:effectLst/>
+        </p:spPr>
+        <p:style>
+          <a:lnRef idx="2">
+            <a:schemeClr val="accent1"/>
+          </a:lnRef>
+          <a:fillRef idx="0">
+            <a:schemeClr val="accent1"/>
+          </a:fillRef>
+          <a:effectRef idx="1">
+            <a:schemeClr val="accent1"/>
+          </a:effectRef>
+          <a:fontRef idx="minor">
+            <a:schemeClr val="tx1"/>
+          </a:fontRef>
+        </p:style>
+      </p:cxnSp>
+      <p:cxnSp>
+        <p:nvCxnSpPr>
+          <p:cNvPr id="80" name="직선 화살표 연결선 8">
+            <a:extLst>
+              <a:ext uri="{FF2B5EF4-FFF2-40B4-BE49-F238E27FC236}">
+                <a16:creationId xmlns:a16="http://schemas.microsoft.com/office/drawing/2014/main" id="{343995A5-39CC-87E2-DDA7-7EAC6A5EEA00}"/>
+              </a:ext>
+            </a:extLst>
+          </p:cNvPr>
+          <p:cNvCxnSpPr>
+            <a:cxnSpLocks/>
+          </p:cNvCxnSpPr>
+          <p:nvPr/>
+        </p:nvCxnSpPr>
+        <p:spPr>
+          <a:xfrm>
+            <a:off x="8043784" y="5044168"/>
+            <a:ext cx="964924" cy="0"/>
+          </a:xfrm>
+          <a:prstGeom prst="straightConnector1">
+            <a:avLst/>
+          </a:prstGeom>
+          <a:ln w="3175">
+            <a:solidFill>
+              <a:schemeClr val="tx1"/>
+            </a:solidFill>
+            <a:headEnd type="none"/>
+            <a:tailEnd type="triangle"/>
+          </a:ln>
+          <a:effectLst/>
+        </p:spPr>
+        <p:style>
+          <a:lnRef idx="2">
+            <a:schemeClr val="accent1"/>
+          </a:lnRef>
+          <a:fillRef idx="0">
+            <a:schemeClr val="accent1"/>
+          </a:fillRef>
+          <a:effectRef idx="1">
+            <a:schemeClr val="accent1"/>
+          </a:effectRef>
+          <a:fontRef idx="minor">
+            <a:schemeClr val="tx1"/>
+          </a:fontRef>
+        </p:style>
+      </p:cxnSp>
+      <p:cxnSp>
+        <p:nvCxnSpPr>
+          <p:cNvPr id="84" name="직선 화살표 연결선 8">
+            <a:extLst>
+              <a:ext uri="{FF2B5EF4-FFF2-40B4-BE49-F238E27FC236}">
+                <a16:creationId xmlns:a16="http://schemas.microsoft.com/office/drawing/2014/main" id="{41F6C68D-630B-3F35-6BF4-0A0FFD75E5A3}"/>
+              </a:ext>
+            </a:extLst>
+          </p:cNvPr>
+          <p:cNvCxnSpPr>
+            <a:cxnSpLocks/>
+            <a:stCxn id="11" idx="3"/>
+            <a:endCxn id="19" idx="2"/>
+          </p:cNvCxnSpPr>
+          <p:nvPr/>
+        </p:nvCxnSpPr>
+        <p:spPr>
+          <a:xfrm>
+            <a:off x="8437347" y="2076424"/>
+            <a:ext cx="2015254" cy="1043634"/>
+          </a:xfrm>
+          <a:prstGeom prst="bentConnector3">
+            <a:avLst>
+              <a:gd name="adj1" fmla="val 50000"/>
+            </a:avLst>
+          </a:prstGeom>
+          <a:ln w="3175">
+            <a:solidFill>
+              <a:schemeClr val="tx1"/>
+            </a:solidFill>
+            <a:headEnd type="none"/>
+            <a:tailEnd type="triangle"/>
+          </a:ln>
+          <a:effectLst/>
+        </p:spPr>
+        <p:style>
+          <a:lnRef idx="2">
+            <a:schemeClr val="accent1"/>
+          </a:lnRef>
+          <a:fillRef idx="0">
+            <a:schemeClr val="accent1"/>
+          </a:fillRef>
+          <a:effectRef idx="1">
+            <a:schemeClr val="accent1"/>
+          </a:effectRef>
+          <a:fontRef idx="minor">
+            <a:schemeClr val="tx1"/>
+          </a:fontRef>
+        </p:style>
+      </p:cxnSp>
+      <p:cxnSp>
+        <p:nvCxnSpPr>
+          <p:cNvPr id="88" name="직선 화살표 연결선 8">
+            <a:extLst>
+              <a:ext uri="{FF2B5EF4-FFF2-40B4-BE49-F238E27FC236}">
+                <a16:creationId xmlns:a16="http://schemas.microsoft.com/office/drawing/2014/main" id="{478AACFD-8386-D84A-35D2-3A9275EA1736}"/>
+              </a:ext>
+            </a:extLst>
+          </p:cNvPr>
+          <p:cNvCxnSpPr>
+            <a:cxnSpLocks/>
+            <a:stCxn id="12" idx="3"/>
+            <a:endCxn id="19" idx="2"/>
+          </p:cNvCxnSpPr>
+          <p:nvPr/>
+        </p:nvCxnSpPr>
+        <p:spPr>
+          <a:xfrm>
+            <a:off x="8437347" y="2769564"/>
+            <a:ext cx="2015254" cy="350494"/>
+          </a:xfrm>
+          <a:prstGeom prst="bentConnector3">
+            <a:avLst>
+              <a:gd name="adj1" fmla="val 50000"/>
+            </a:avLst>
+          </a:prstGeom>
+          <a:ln w="3175">
+            <a:solidFill>
+              <a:schemeClr val="tx1"/>
+            </a:solidFill>
+            <a:headEnd type="none"/>
+            <a:tailEnd type="triangle"/>
+          </a:ln>
+          <a:effectLst/>
+        </p:spPr>
+        <p:style>
+          <a:lnRef idx="2">
+            <a:schemeClr val="accent1"/>
+          </a:lnRef>
+          <a:fillRef idx="0">
+            <a:schemeClr val="accent1"/>
+          </a:fillRef>
+          <a:effectRef idx="1">
+            <a:schemeClr val="accent1"/>
+          </a:effectRef>
+          <a:fontRef idx="minor">
+            <a:schemeClr val="tx1"/>
+          </a:fontRef>
+        </p:style>
+      </p:cxnSp>
+      <p:cxnSp>
+        <p:nvCxnSpPr>
+          <p:cNvPr id="91" name="직선 화살표 연결선 8">
+            <a:extLst>
+              <a:ext uri="{FF2B5EF4-FFF2-40B4-BE49-F238E27FC236}">
+                <a16:creationId xmlns:a16="http://schemas.microsoft.com/office/drawing/2014/main" id="{77C05BD0-FEA6-1184-6848-8282523727FF}"/>
+              </a:ext>
+            </a:extLst>
+          </p:cNvPr>
+          <p:cNvCxnSpPr>
+            <a:cxnSpLocks/>
+            <a:endCxn id="19" idx="2"/>
+          </p:cNvCxnSpPr>
+          <p:nvPr/>
+        </p:nvCxnSpPr>
+        <p:spPr>
+          <a:xfrm flipV="1">
+            <a:off x="8428938" y="3120058"/>
+            <a:ext cx="2023663" cy="905357"/>
+          </a:xfrm>
+          <a:prstGeom prst="bentConnector3">
+            <a:avLst>
+              <a:gd name="adj1" fmla="val 50209"/>
+            </a:avLst>
+          </a:prstGeom>
+          <a:ln w="3175">
+            <a:solidFill>
+              <a:schemeClr val="tx1"/>
+            </a:solidFill>
+            <a:headEnd type="none"/>
+            <a:tailEnd type="triangle"/>
+          </a:ln>
+          <a:effectLst/>
+        </p:spPr>
+        <p:style>
+          <a:lnRef idx="2">
+            <a:schemeClr val="accent1"/>
+          </a:lnRef>
+          <a:fillRef idx="0">
+            <a:schemeClr val="accent1"/>
+          </a:fillRef>
+          <a:effectRef idx="1">
+            <a:schemeClr val="accent1"/>
+          </a:effectRef>
+          <a:fontRef idx="minor">
+            <a:schemeClr val="tx1"/>
+          </a:fontRef>
+        </p:style>
+      </p:cxnSp>
+      <p:cxnSp>
+        <p:nvCxnSpPr>
+          <p:cNvPr id="95" name="직선 화살표 연결선 8">
+            <a:extLst>
+              <a:ext uri="{FF2B5EF4-FFF2-40B4-BE49-F238E27FC236}">
+                <a16:creationId xmlns:a16="http://schemas.microsoft.com/office/drawing/2014/main" id="{195AC619-644F-3470-4AF7-440D27C27D81}"/>
+              </a:ext>
+            </a:extLst>
+          </p:cNvPr>
+          <p:cNvCxnSpPr>
+            <a:cxnSpLocks/>
+            <a:endCxn id="20" idx="2"/>
+          </p:cNvCxnSpPr>
+          <p:nvPr/>
+        </p:nvCxnSpPr>
+        <p:spPr>
+          <a:xfrm flipV="1">
+            <a:off x="8428938" y="3911507"/>
+            <a:ext cx="2023663" cy="396398"/>
+          </a:xfrm>
+          <a:prstGeom prst="bentConnector3">
+            <a:avLst>
+              <a:gd name="adj1" fmla="val 67057"/>
+            </a:avLst>
+          </a:prstGeom>
+          <a:ln w="3175">
+            <a:solidFill>
+              <a:schemeClr val="tx1"/>
+            </a:solidFill>
+            <a:headEnd type="none"/>
+            <a:tailEnd type="triangle"/>
+          </a:ln>
+          <a:effectLst/>
+        </p:spPr>
+        <p:style>
+          <a:lnRef idx="2">
+            <a:schemeClr val="accent1"/>
+          </a:lnRef>
+          <a:fillRef idx="0">
+            <a:schemeClr val="accent1"/>
+          </a:fillRef>
+          <a:effectRef idx="1">
+            <a:schemeClr val="accent1"/>
+          </a:effectRef>
+          <a:fontRef idx="minor">
+            <a:schemeClr val="tx1"/>
+          </a:fontRef>
+        </p:style>
+      </p:cxnSp>
+      <p:cxnSp>
+        <p:nvCxnSpPr>
+          <p:cNvPr id="101" name="직선 화살표 연결선 8">
+            <a:extLst>
+              <a:ext uri="{FF2B5EF4-FFF2-40B4-BE49-F238E27FC236}">
+                <a16:creationId xmlns:a16="http://schemas.microsoft.com/office/drawing/2014/main" id="{65145FAE-50B2-033C-F596-F1E2FBE65A47}"/>
+              </a:ext>
+            </a:extLst>
+          </p:cNvPr>
+          <p:cNvCxnSpPr>
+            <a:cxnSpLocks/>
+            <a:endCxn id="20" idx="2"/>
+          </p:cNvCxnSpPr>
+          <p:nvPr/>
+        </p:nvCxnSpPr>
+        <p:spPr>
+          <a:xfrm flipV="1">
+            <a:off x="8043784" y="3911507"/>
+            <a:ext cx="2408817" cy="748815"/>
+          </a:xfrm>
+          <a:prstGeom prst="bentConnector3">
+            <a:avLst>
+              <a:gd name="adj1" fmla="val 72374"/>
+            </a:avLst>
+          </a:prstGeom>
+          <a:ln w="3175">
+            <a:solidFill>
+              <a:schemeClr val="tx1"/>
+            </a:solidFill>
+            <a:headEnd type="none"/>
+            <a:tailEnd type="triangle"/>
+          </a:ln>
+          <a:effectLst/>
+        </p:spPr>
+        <p:style>
+          <a:lnRef idx="2">
+            <a:schemeClr val="accent1"/>
+          </a:lnRef>
+          <a:fillRef idx="0">
+            <a:schemeClr val="accent1"/>
+          </a:fillRef>
+          <a:effectRef idx="1">
+            <a:schemeClr val="accent1"/>
+          </a:effectRef>
+          <a:fontRef idx="minor">
+            <a:schemeClr val="tx1"/>
+          </a:fontRef>
+        </p:style>
+      </p:cxnSp>
+      <p:sp>
+        <p:nvSpPr>
+          <p:cNvPr id="124" name="TextBox 123">
+            <a:extLst>
+              <a:ext uri="{FF2B5EF4-FFF2-40B4-BE49-F238E27FC236}">
+                <a16:creationId xmlns:a16="http://schemas.microsoft.com/office/drawing/2014/main" id="{7B2A2B63-78B3-AC58-B205-482AF551BAE0}"/>
+              </a:ext>
+            </a:extLst>
+          </p:cNvPr>
+          <p:cNvSpPr txBox="1"/>
+          <p:nvPr/>
+        </p:nvSpPr>
+        <p:spPr>
+          <a:xfrm>
+            <a:off x="8420602" y="1870562"/>
+            <a:ext cx="1015665" cy="215444"/>
+          </a:xfrm>
+          <a:prstGeom prst="rect">
+            <a:avLst/>
+          </a:prstGeom>
+          <a:noFill/>
+        </p:spPr>
+        <p:txBody>
+          <a:bodyPr wrap="square" rtlCol="0">
+            <a:spAutoFit/>
+          </a:bodyPr>
+          <a:lstStyle/>
+          <a:p>
+            <a:r>
+              <a:rPr kumimoji="1" lang="ko-KR" altLang="en-US" sz="800" dirty="0"/>
+              <a:t>의존 그래프 조회</a:t>
+            </a:r>
+          </a:p>
+        </p:txBody>
+      </p:sp>
+      <p:sp>
+        <p:nvSpPr>
+          <p:cNvPr id="125" name="TextBox 124">
+            <a:extLst>
+              <a:ext uri="{FF2B5EF4-FFF2-40B4-BE49-F238E27FC236}">
+                <a16:creationId xmlns:a16="http://schemas.microsoft.com/office/drawing/2014/main" id="{CC3E4BB4-7685-C69D-2BB5-16BDABF1D530}"/>
+              </a:ext>
+            </a:extLst>
+          </p:cNvPr>
+          <p:cNvSpPr txBox="1"/>
+          <p:nvPr/>
+        </p:nvSpPr>
+        <p:spPr>
+          <a:xfrm>
+            <a:off x="8437346" y="2436980"/>
+            <a:ext cx="946310" cy="338554"/>
+          </a:xfrm>
+          <a:prstGeom prst="rect">
+            <a:avLst/>
+          </a:prstGeom>
+          <a:noFill/>
+        </p:spPr>
+        <p:txBody>
+          <a:bodyPr wrap="square" rtlCol="0">
+            <a:spAutoFit/>
+          </a:bodyPr>
+          <a:lstStyle/>
+          <a:p>
+            <a:r>
+              <a:rPr kumimoji="1" lang="ko-KR" altLang="en-US" sz="800" dirty="0"/>
+              <a:t>경계</a:t>
+            </a:r>
+            <a:r>
+              <a:rPr kumimoji="1" lang="en-US" altLang="ko-KR" sz="800" dirty="0"/>
+              <a:t>,</a:t>
+            </a:r>
+            <a:r>
+              <a:rPr kumimoji="1" lang="ko-KR" altLang="en-US" sz="800" dirty="0"/>
+              <a:t> 테스트</a:t>
+            </a:r>
+            <a:r>
+              <a:rPr kumimoji="1" lang="en-US" altLang="ko-KR" sz="800" dirty="0"/>
+              <a:t>,</a:t>
+            </a:r>
+            <a:r>
+              <a:rPr kumimoji="1" lang="ko-KR" altLang="en-US" sz="800" dirty="0"/>
+              <a:t> </a:t>
+            </a:r>
+            <a:br>
+              <a:rPr kumimoji="1" lang="en-US" altLang="ko-KR" sz="800" dirty="0"/>
+            </a:br>
+            <a:r>
+              <a:rPr kumimoji="1" lang="ko-KR" altLang="en-US" sz="800" dirty="0"/>
+              <a:t>코드 매핑 조회</a:t>
+            </a:r>
+          </a:p>
+        </p:txBody>
+      </p:sp>
+      <p:sp>
+        <p:nvSpPr>
+          <p:cNvPr id="126" name="TextBox 125">
+            <a:extLst>
+              <a:ext uri="{FF2B5EF4-FFF2-40B4-BE49-F238E27FC236}">
+                <a16:creationId xmlns:a16="http://schemas.microsoft.com/office/drawing/2014/main" id="{5DD3B80B-AB92-8A6F-D1AF-8AB6E1808890}"/>
+              </a:ext>
+            </a:extLst>
+          </p:cNvPr>
+          <p:cNvSpPr txBox="1"/>
+          <p:nvPr/>
+        </p:nvSpPr>
+        <p:spPr>
+          <a:xfrm>
+            <a:off x="8428938" y="3798987"/>
+            <a:ext cx="980291" cy="215444"/>
+          </a:xfrm>
+          <a:prstGeom prst="rect">
+            <a:avLst/>
+          </a:prstGeom>
+          <a:noFill/>
+        </p:spPr>
+        <p:txBody>
+          <a:bodyPr wrap="square" rtlCol="0">
+            <a:spAutoFit/>
+          </a:bodyPr>
+          <a:lstStyle/>
+          <a:p>
+            <a:r>
+              <a:rPr kumimoji="1" lang="ko-KR" altLang="en-US" sz="800" dirty="0"/>
+              <a:t>데이터 흐름 조회</a:t>
+            </a:r>
+          </a:p>
+        </p:txBody>
+      </p:sp>
+      <p:sp>
+        <p:nvSpPr>
+          <p:cNvPr id="129" name="TextBox 128">
+            <a:extLst>
+              <a:ext uri="{FF2B5EF4-FFF2-40B4-BE49-F238E27FC236}">
+                <a16:creationId xmlns:a16="http://schemas.microsoft.com/office/drawing/2014/main" id="{127AFD05-6282-78C1-9B40-C64B2B995D00}"/>
+              </a:ext>
+            </a:extLst>
+          </p:cNvPr>
+          <p:cNvSpPr txBox="1"/>
+          <p:nvPr/>
+        </p:nvSpPr>
+        <p:spPr>
+          <a:xfrm>
+            <a:off x="8413966" y="4084936"/>
+            <a:ext cx="1384220" cy="215444"/>
+          </a:xfrm>
+          <a:prstGeom prst="rect">
+            <a:avLst/>
+          </a:prstGeom>
+          <a:noFill/>
+        </p:spPr>
+        <p:txBody>
+          <a:bodyPr wrap="square" rtlCol="0">
+            <a:spAutoFit/>
+          </a:bodyPr>
+          <a:lstStyle/>
+          <a:p>
+            <a:r>
+              <a:rPr kumimoji="1" lang="ko-KR" altLang="en-US" sz="800" dirty="0"/>
+              <a:t>규칙</a:t>
+            </a:r>
+            <a:r>
+              <a:rPr kumimoji="1" lang="en-US" altLang="ko-KR" sz="800" dirty="0"/>
+              <a:t>,</a:t>
+            </a:r>
+            <a:r>
+              <a:rPr kumimoji="1" lang="ko-KR" altLang="en-US" sz="800" dirty="0"/>
+              <a:t> 코드 매핑 조회</a:t>
+            </a:r>
+          </a:p>
+        </p:txBody>
+      </p:sp>
+      <p:sp>
+        <p:nvSpPr>
+          <p:cNvPr id="130" name="TextBox 129">
+            <a:extLst>
+              <a:ext uri="{FF2B5EF4-FFF2-40B4-BE49-F238E27FC236}">
+                <a16:creationId xmlns:a16="http://schemas.microsoft.com/office/drawing/2014/main" id="{8BD2C091-EAEB-A890-596A-1C04FA5662D5}"/>
+              </a:ext>
+            </a:extLst>
+          </p:cNvPr>
+          <p:cNvSpPr txBox="1"/>
+          <p:nvPr/>
+        </p:nvSpPr>
+        <p:spPr>
+          <a:xfrm>
+            <a:off x="8413966" y="4427665"/>
+            <a:ext cx="1605694" cy="215444"/>
+          </a:xfrm>
+          <a:prstGeom prst="rect">
+            <a:avLst/>
+          </a:prstGeom>
+          <a:noFill/>
+        </p:spPr>
+        <p:txBody>
+          <a:bodyPr wrap="square" rtlCol="0">
+            <a:spAutoFit/>
+          </a:bodyPr>
+          <a:lstStyle/>
+          <a:p>
+            <a:r>
+              <a:rPr kumimoji="1" lang="ko-KR" altLang="en-US" sz="800" dirty="0"/>
+              <a:t>카탈로그 컨텍스트 조회</a:t>
+            </a:r>
+          </a:p>
+        </p:txBody>
+      </p:sp>
+      <p:sp>
+        <p:nvSpPr>
+          <p:cNvPr id="138" name="TextBox 137">
+            <a:extLst>
+              <a:ext uri="{FF2B5EF4-FFF2-40B4-BE49-F238E27FC236}">
+                <a16:creationId xmlns:a16="http://schemas.microsoft.com/office/drawing/2014/main" id="{DFF06A46-3954-F59A-9F26-1DFD3A4F5D37}"/>
+              </a:ext>
+            </a:extLst>
+          </p:cNvPr>
+          <p:cNvSpPr txBox="1"/>
+          <p:nvPr/>
+        </p:nvSpPr>
+        <p:spPr>
+          <a:xfrm>
+            <a:off x="8082918" y="4705614"/>
+            <a:ext cx="1070172" cy="338554"/>
+          </a:xfrm>
+          <a:prstGeom prst="rect">
+            <a:avLst/>
+          </a:prstGeom>
+          <a:noFill/>
+        </p:spPr>
+        <p:txBody>
+          <a:bodyPr wrap="square" rtlCol="0">
+            <a:spAutoFit/>
+          </a:bodyPr>
+          <a:lstStyle/>
+          <a:p>
+            <a:r>
+              <a:rPr kumimoji="1" lang="ko-KR" altLang="en-US" sz="800" dirty="0"/>
+              <a:t>분석</a:t>
+            </a:r>
+            <a:r>
+              <a:rPr kumimoji="1" lang="en-US" altLang="ko-KR" sz="800" dirty="0"/>
+              <a:t>,</a:t>
+            </a:r>
+            <a:r>
+              <a:rPr kumimoji="1" lang="ko-KR" altLang="en-US" sz="800" dirty="0"/>
+              <a:t> 서사 결합 </a:t>
+            </a:r>
+            <a:br>
+              <a:rPr kumimoji="1" lang="en-US" altLang="ko-KR" sz="800" dirty="0"/>
+            </a:br>
+            <a:r>
+              <a:rPr kumimoji="1" lang="ko-KR" altLang="en-US" sz="800" dirty="0"/>
+              <a:t>결과 전달</a:t>
+            </a:r>
+          </a:p>
+        </p:txBody>
+      </p:sp>
+      <p:sp>
+        <p:nvSpPr>
+          <p:cNvPr id="141" name="TextBox 140">
+            <a:extLst>
+              <a:ext uri="{FF2B5EF4-FFF2-40B4-BE49-F238E27FC236}">
+                <a16:creationId xmlns:a16="http://schemas.microsoft.com/office/drawing/2014/main" id="{349A7803-CF88-0791-3141-7637F0F9EC54}"/>
+              </a:ext>
+            </a:extLst>
+          </p:cNvPr>
+          <p:cNvSpPr txBox="1"/>
+          <p:nvPr/>
+        </p:nvSpPr>
+        <p:spPr>
+          <a:xfrm>
+            <a:off x="4941408" y="5210812"/>
+            <a:ext cx="2209533" cy="215444"/>
+          </a:xfrm>
+          <a:prstGeom prst="rect">
+            <a:avLst/>
+          </a:prstGeom>
+          <a:noFill/>
+        </p:spPr>
+        <p:txBody>
+          <a:bodyPr wrap="square" rtlCol="0">
+            <a:spAutoFit/>
+          </a:bodyPr>
+          <a:lstStyle/>
+          <a:p>
+            <a:r>
+              <a:rPr kumimoji="1" lang="ko-KR" altLang="en-US" sz="800" dirty="0"/>
+              <a:t>완성된 </a:t>
+            </a:r>
+            <a:r>
+              <a:rPr kumimoji="1" lang="ko-KR" altLang="en-US" sz="800" dirty="0" err="1"/>
+              <a:t>영항</a:t>
+            </a:r>
+            <a:r>
+              <a:rPr kumimoji="1" lang="en-US" altLang="ko-KR" sz="800" dirty="0"/>
+              <a:t>,</a:t>
+            </a:r>
+            <a:r>
+              <a:rPr kumimoji="1" lang="ko-KR" altLang="en-US" sz="800" dirty="0"/>
+              <a:t> 리스크 패키지 반환</a:t>
+            </a:r>
+          </a:p>
+        </p:txBody>
+      </p:sp>
+      <p:sp>
+        <p:nvSpPr>
+          <p:cNvPr id="142" name="TextBox 141">
+            <a:extLst>
+              <a:ext uri="{FF2B5EF4-FFF2-40B4-BE49-F238E27FC236}">
+                <a16:creationId xmlns:a16="http://schemas.microsoft.com/office/drawing/2014/main" id="{B5D4327E-1E88-AF6A-C9C1-C7E52892BA71}"/>
+              </a:ext>
+            </a:extLst>
+          </p:cNvPr>
+          <p:cNvSpPr txBox="1"/>
+          <p:nvPr/>
+        </p:nvSpPr>
+        <p:spPr>
+          <a:xfrm>
+            <a:off x="2605878" y="5545408"/>
+            <a:ext cx="1183862" cy="215444"/>
+          </a:xfrm>
+          <a:prstGeom prst="rect">
+            <a:avLst/>
+          </a:prstGeom>
+          <a:noFill/>
+        </p:spPr>
+        <p:txBody>
+          <a:bodyPr wrap="square" rtlCol="0">
+            <a:spAutoFit/>
+          </a:bodyPr>
+          <a:lstStyle/>
+          <a:p>
+            <a:r>
+              <a:rPr kumimoji="1" lang="ko-KR" altLang="en-US" sz="800" dirty="0"/>
+              <a:t>자연어 합성 요청</a:t>
+            </a:r>
+          </a:p>
+        </p:txBody>
+      </p:sp>
+      <p:sp>
+        <p:nvSpPr>
+          <p:cNvPr id="145" name="TextBox 144">
+            <a:extLst>
+              <a:ext uri="{FF2B5EF4-FFF2-40B4-BE49-F238E27FC236}">
+                <a16:creationId xmlns:a16="http://schemas.microsoft.com/office/drawing/2014/main" id="{EEFB6FCD-8F47-7768-57A6-2EA8C52380AE}"/>
+              </a:ext>
+            </a:extLst>
+          </p:cNvPr>
+          <p:cNvSpPr txBox="1"/>
+          <p:nvPr/>
+        </p:nvSpPr>
+        <p:spPr>
+          <a:xfrm>
+            <a:off x="1969331" y="3872093"/>
+            <a:ext cx="1391810" cy="215444"/>
+          </a:xfrm>
+          <a:prstGeom prst="rect">
+            <a:avLst/>
+          </a:prstGeom>
+          <a:noFill/>
+        </p:spPr>
+        <p:txBody>
+          <a:bodyPr wrap="square" rtlCol="0">
+            <a:spAutoFit/>
+          </a:bodyPr>
+          <a:lstStyle/>
+          <a:p>
+            <a:r>
+              <a:rPr kumimoji="1" lang="ko-KR" altLang="en-US" sz="800" dirty="0"/>
+              <a:t>로컬 변경 내역 전달</a:t>
+            </a:r>
+          </a:p>
+        </p:txBody>
+      </p:sp>
+      <p:sp>
+        <p:nvSpPr>
+          <p:cNvPr id="148" name="TextBox 147">
+            <a:extLst>
+              <a:ext uri="{FF2B5EF4-FFF2-40B4-BE49-F238E27FC236}">
+                <a16:creationId xmlns:a16="http://schemas.microsoft.com/office/drawing/2014/main" id="{55D1E2BF-88F8-2D6A-F5FC-233B011F7359}"/>
+              </a:ext>
+            </a:extLst>
+          </p:cNvPr>
+          <p:cNvSpPr txBox="1"/>
+          <p:nvPr/>
+        </p:nvSpPr>
+        <p:spPr>
+          <a:xfrm>
+            <a:off x="2304388" y="2116858"/>
+            <a:ext cx="1619087" cy="215444"/>
+          </a:xfrm>
+          <a:prstGeom prst="rect">
+            <a:avLst/>
+          </a:prstGeom>
+          <a:noFill/>
+        </p:spPr>
+        <p:txBody>
+          <a:bodyPr wrap="square" rtlCol="0">
+            <a:spAutoFit/>
+          </a:bodyPr>
+          <a:lstStyle/>
+          <a:p>
+            <a:r>
+              <a:rPr kumimoji="1" lang="ko-KR" altLang="en-US" sz="800" dirty="0"/>
+              <a:t>영향</a:t>
+            </a:r>
+            <a:r>
+              <a:rPr kumimoji="1" lang="en-US" altLang="ko-KR" sz="800" dirty="0"/>
+              <a:t>,</a:t>
+            </a:r>
+            <a:r>
+              <a:rPr kumimoji="1" lang="ko-KR" altLang="en-US" sz="800" dirty="0"/>
+              <a:t> 리스크 패키지 반환</a:t>
+            </a:r>
+          </a:p>
+        </p:txBody>
+      </p:sp>
+      <p:sp>
+        <p:nvSpPr>
+          <p:cNvPr id="164" name="TextBox 163">
+            <a:extLst>
+              <a:ext uri="{FF2B5EF4-FFF2-40B4-BE49-F238E27FC236}">
+                <a16:creationId xmlns:a16="http://schemas.microsoft.com/office/drawing/2014/main" id="{6160F702-C7E2-C904-7E37-27C1DF642644}"/>
+              </a:ext>
+            </a:extLst>
+          </p:cNvPr>
+          <p:cNvSpPr txBox="1"/>
+          <p:nvPr/>
+        </p:nvSpPr>
+        <p:spPr>
+          <a:xfrm>
+            <a:off x="3937491" y="4738625"/>
+            <a:ext cx="1022948" cy="215444"/>
+          </a:xfrm>
+          <a:prstGeom prst="rect">
+            <a:avLst/>
+          </a:prstGeom>
+          <a:noFill/>
+        </p:spPr>
+        <p:txBody>
+          <a:bodyPr wrap="square" rtlCol="0">
+            <a:spAutoFit/>
+          </a:bodyPr>
+          <a:lstStyle/>
+          <a:p>
+            <a:r>
+              <a:rPr kumimoji="1" lang="ko-KR" altLang="en-US" sz="800" dirty="0"/>
+              <a:t>인사이트 응답</a:t>
+            </a:r>
+          </a:p>
+        </p:txBody>
+      </p:sp>
+      <p:sp>
+        <p:nvSpPr>
+          <p:cNvPr id="180" name="TextBox 179">
+            <a:extLst>
+              <a:ext uri="{FF2B5EF4-FFF2-40B4-BE49-F238E27FC236}">
+                <a16:creationId xmlns:a16="http://schemas.microsoft.com/office/drawing/2014/main" id="{0FFFE8CA-981F-5FE4-838C-BBB1B76D4AA2}"/>
+              </a:ext>
+            </a:extLst>
+          </p:cNvPr>
+          <p:cNvSpPr txBox="1"/>
+          <p:nvPr/>
+        </p:nvSpPr>
+        <p:spPr>
+          <a:xfrm>
+            <a:off x="5055625" y="4361287"/>
+            <a:ext cx="1633689" cy="338554"/>
+          </a:xfrm>
+          <a:prstGeom prst="rect">
+            <a:avLst/>
+          </a:prstGeom>
+          <a:noFill/>
+        </p:spPr>
+        <p:txBody>
+          <a:bodyPr wrap="square" rtlCol="0">
+            <a:spAutoFit/>
+          </a:bodyPr>
+          <a:lstStyle/>
+          <a:p>
+            <a:r>
+              <a:rPr kumimoji="1" lang="ko-KR" altLang="en-US" sz="800" dirty="0"/>
+              <a:t>분석 결과 </a:t>
+            </a:r>
+            <a:r>
+              <a:rPr kumimoji="1" lang="en-US" altLang="ko-KR" sz="800" dirty="0"/>
+              <a:t>+</a:t>
+            </a:r>
+            <a:r>
+              <a:rPr kumimoji="1" lang="ko-KR" altLang="en-US" sz="800" dirty="0"/>
+              <a:t> 카탈로그 컨텍스트</a:t>
+            </a:r>
+            <a:br>
+              <a:rPr kumimoji="1" lang="en-US" altLang="ko-KR" sz="800" dirty="0"/>
+            </a:br>
+            <a:r>
+              <a:rPr kumimoji="1" lang="ko-KR" altLang="en-US" sz="800" dirty="0"/>
+              <a:t>인사이트 합성 요청</a:t>
+            </a:r>
+          </a:p>
+        </p:txBody>
+      </p:sp>
+      <p:sp>
+        <p:nvSpPr>
+          <p:cNvPr id="210" name="TextBox 209">
+            <a:extLst>
+              <a:ext uri="{FF2B5EF4-FFF2-40B4-BE49-F238E27FC236}">
+                <a16:creationId xmlns:a16="http://schemas.microsoft.com/office/drawing/2014/main" id="{F5507CC1-F520-1DD9-A661-3570140C3927}"/>
+              </a:ext>
+            </a:extLst>
+          </p:cNvPr>
+          <p:cNvSpPr txBox="1"/>
+          <p:nvPr/>
+        </p:nvSpPr>
+        <p:spPr>
+          <a:xfrm>
+            <a:off x="5922990" y="1758271"/>
+            <a:ext cx="705967" cy="338554"/>
+          </a:xfrm>
+          <a:prstGeom prst="rect">
+            <a:avLst/>
+          </a:prstGeom>
+          <a:noFill/>
+        </p:spPr>
+        <p:txBody>
+          <a:bodyPr wrap="square" rtlCol="0">
+            <a:spAutoFit/>
+          </a:bodyPr>
+          <a:lstStyle/>
+          <a:p>
+            <a:pPr algn="ctr"/>
+            <a:r>
+              <a:rPr kumimoji="1" lang="ko-KR" altLang="en-US" sz="800" dirty="0"/>
+              <a:t>영향 경로 </a:t>
+            </a:r>
+            <a:br>
+              <a:rPr kumimoji="1" lang="en-US" altLang="ko-KR" sz="800" dirty="0"/>
+            </a:br>
+            <a:r>
+              <a:rPr kumimoji="1" lang="ko-KR" altLang="en-US" sz="800" dirty="0"/>
+              <a:t>탐색</a:t>
+            </a:r>
+            <a:r>
+              <a:rPr kumimoji="1" lang="en-US" altLang="ko-KR" sz="800" dirty="0"/>
+              <a:t>/</a:t>
+            </a:r>
+            <a:r>
+              <a:rPr kumimoji="1" lang="ko-KR" altLang="en-US" sz="800" dirty="0"/>
+              <a:t>결과</a:t>
+            </a:r>
+          </a:p>
+        </p:txBody>
+      </p:sp>
+      <p:sp>
+        <p:nvSpPr>
+          <p:cNvPr id="211" name="TextBox 210">
+            <a:extLst>
+              <a:ext uri="{FF2B5EF4-FFF2-40B4-BE49-F238E27FC236}">
+                <a16:creationId xmlns:a16="http://schemas.microsoft.com/office/drawing/2014/main" id="{46453BFD-BB43-4D94-941E-2DC0F90C74B9}"/>
+              </a:ext>
+            </a:extLst>
+          </p:cNvPr>
+          <p:cNvSpPr txBox="1"/>
+          <p:nvPr/>
+        </p:nvSpPr>
+        <p:spPr>
+          <a:xfrm>
+            <a:off x="5905398" y="2443395"/>
+            <a:ext cx="741153" cy="338554"/>
+          </a:xfrm>
+          <a:prstGeom prst="rect">
+            <a:avLst/>
+          </a:prstGeom>
+          <a:noFill/>
+        </p:spPr>
+        <p:txBody>
+          <a:bodyPr wrap="square" rtlCol="0">
+            <a:spAutoFit/>
+          </a:bodyPr>
+          <a:lstStyle/>
+          <a:p>
+            <a:pPr algn="ctr"/>
+            <a:r>
+              <a:rPr kumimoji="1" lang="ko-KR" altLang="en-US" sz="800" dirty="0"/>
+              <a:t>경계 테스트 </a:t>
+            </a:r>
+            <a:br>
+              <a:rPr kumimoji="1" lang="en-US" altLang="ko-KR" sz="800" dirty="0"/>
+            </a:br>
+            <a:r>
+              <a:rPr kumimoji="1" lang="ko-KR" altLang="en-US" sz="800" dirty="0"/>
+              <a:t>영향</a:t>
+            </a:r>
+            <a:r>
+              <a:rPr kumimoji="1" lang="en-US" altLang="ko-KR" sz="800" dirty="0"/>
+              <a:t>/</a:t>
+            </a:r>
+            <a:r>
+              <a:rPr kumimoji="1" lang="ko-KR" altLang="en-US" sz="800" dirty="0"/>
+              <a:t>결과</a:t>
+            </a:r>
+          </a:p>
+        </p:txBody>
+      </p:sp>
+      <p:sp>
+        <p:nvSpPr>
+          <p:cNvPr id="212" name="TextBox 211">
+            <a:extLst>
+              <a:ext uri="{FF2B5EF4-FFF2-40B4-BE49-F238E27FC236}">
+                <a16:creationId xmlns:a16="http://schemas.microsoft.com/office/drawing/2014/main" id="{ED85DE83-8BB7-916A-ECC1-38FB63D00AEC}"/>
+              </a:ext>
+            </a:extLst>
+          </p:cNvPr>
+          <p:cNvSpPr txBox="1"/>
+          <p:nvPr/>
+        </p:nvSpPr>
+        <p:spPr>
+          <a:xfrm>
+            <a:off x="5905398" y="3114992"/>
+            <a:ext cx="741153" cy="338554"/>
+          </a:xfrm>
+          <a:prstGeom prst="rect">
+            <a:avLst/>
+          </a:prstGeom>
+          <a:noFill/>
+        </p:spPr>
+        <p:txBody>
+          <a:bodyPr wrap="square" rtlCol="0">
+            <a:spAutoFit/>
+          </a:bodyPr>
+          <a:lstStyle/>
+          <a:p>
+            <a:pPr algn="ctr"/>
+            <a:r>
+              <a:rPr kumimoji="1" lang="ko-KR" altLang="en-US" sz="800" dirty="0"/>
+              <a:t>리스크 계산</a:t>
+            </a:r>
+            <a:br>
+              <a:rPr kumimoji="1" lang="en-US" altLang="ko-KR" sz="800" dirty="0"/>
+            </a:br>
+            <a:r>
+              <a:rPr kumimoji="1" lang="ko-KR" altLang="en-US" sz="800" dirty="0"/>
+              <a:t>요청</a:t>
+            </a:r>
+            <a:r>
+              <a:rPr kumimoji="1" lang="en-US" altLang="ko-KR" sz="800" dirty="0"/>
+              <a:t>/</a:t>
+            </a:r>
+            <a:r>
+              <a:rPr kumimoji="1" lang="ko-KR" altLang="en-US" sz="800" dirty="0"/>
+              <a:t>결과</a:t>
+            </a:r>
+          </a:p>
+        </p:txBody>
+      </p:sp>
+      <p:sp>
+        <p:nvSpPr>
+          <p:cNvPr id="213" name="TextBox 212">
+            <a:extLst>
+              <a:ext uri="{FF2B5EF4-FFF2-40B4-BE49-F238E27FC236}">
+                <a16:creationId xmlns:a16="http://schemas.microsoft.com/office/drawing/2014/main" id="{28DE90F6-6399-EBEE-421D-F3E9E5313F7E}"/>
+              </a:ext>
+            </a:extLst>
+          </p:cNvPr>
+          <p:cNvSpPr txBox="1"/>
+          <p:nvPr/>
+        </p:nvSpPr>
+        <p:spPr>
+          <a:xfrm>
+            <a:off x="5901948" y="3807150"/>
+            <a:ext cx="741153" cy="338554"/>
+          </a:xfrm>
+          <a:prstGeom prst="rect">
+            <a:avLst/>
+          </a:prstGeom>
+          <a:noFill/>
+        </p:spPr>
+        <p:txBody>
+          <a:bodyPr wrap="square" rtlCol="0">
+            <a:spAutoFit/>
+          </a:bodyPr>
+          <a:lstStyle/>
+          <a:p>
+            <a:pPr algn="ctr"/>
+            <a:r>
+              <a:rPr kumimoji="1" lang="ko-KR" altLang="en-US" sz="800" dirty="0"/>
+              <a:t>규칙 영향 </a:t>
+            </a:r>
+            <a:br>
+              <a:rPr kumimoji="1" lang="en-US" altLang="ko-KR" sz="800" dirty="0"/>
+            </a:br>
+            <a:r>
+              <a:rPr kumimoji="1" lang="ko-KR" altLang="en-US" sz="800" dirty="0"/>
+              <a:t>분석</a:t>
+            </a:r>
+            <a:r>
+              <a:rPr kumimoji="1" lang="en-US" altLang="ko-KR" sz="800" dirty="0"/>
+              <a:t>/</a:t>
+            </a:r>
+            <a:r>
+              <a:rPr kumimoji="1" lang="ko-KR" altLang="en-US" sz="800" dirty="0"/>
+              <a:t>결과</a:t>
+            </a:r>
           </a:p>
         </p:txBody>
       </p:sp>

--- a/feature-slice/05-impact-risk-analysis/impact-risk-analysis.pptx
+++ b/feature-slice/05-impact-risk-analysis/impact-risk-analysis.pptx
@@ -5,15 +5,13 @@
     <p:sldMasterId id="2147483648" r:id="rId1"/>
   </p:sldMasterIdLst>
   <p:notesMasterIdLst>
-    <p:notesMasterId r:id="rId5"/>
+    <p:notesMasterId r:id="rId3"/>
   </p:notesMasterIdLst>
   <p:handoutMasterIdLst>
-    <p:handoutMasterId r:id="rId6"/>
+    <p:handoutMasterId r:id="rId4"/>
   </p:handoutMasterIdLst>
   <p:sldIdLst>
-    <p:sldId id="313" r:id="rId2"/>
-    <p:sldId id="314" r:id="rId3"/>
-    <p:sldId id="315" r:id="rId4"/>
+    <p:sldId id="315" r:id="rId2"/>
   </p:sldIdLst>
   <p:sldSz cx="12192000" cy="6858000"/>
   <p:notesSz cx="6858000" cy="9144000"/>
@@ -1783,4186 +1781,6 @@
       </p:grpSpPr>
       <p:sp>
         <p:nvSpPr>
-          <p:cNvPr id="4" name="CICD"/>
-          <p:cNvSpPr/>
-          <p:nvPr/>
-        </p:nvSpPr>
-        <p:spPr>
-          <a:xfrm>
-            <a:off x="2406650" y="5462356"/>
-            <a:ext cx="7378700" cy="666750"/>
-          </a:xfrm>
-          <a:prstGeom prst="rect">
-            <a:avLst/>
-          </a:prstGeom>
-          <a:noFill/>
-          <a:ln/>
-        </p:spPr>
-        <p:txBody>
-          <a:bodyPr wrap="square" lIns="0" tIns="0" rIns="0" bIns="0" rtlCol="0" anchor="t"/>
-          <a:lstStyle/>
-          <a:p>
-            <a:pPr algn="ctr">
-              <a:lnSpc>
-                <a:spcPct val="133333"/>
-              </a:lnSpc>
-            </a:pPr>
-            <a:endParaRPr lang="en-US" sz="1100" dirty="0">
-              <a:latin typeface="Pretendard SemiBold" panose="02000703000000020004" pitchFamily="50" charset="-127"/>
-              <a:ea typeface="Pretendard SemiBold" panose="02000703000000020004" pitchFamily="50" charset="-127"/>
-              <a:cs typeface="Pretendard SemiBold" panose="02000703000000020004" pitchFamily="50" charset="-127"/>
-            </a:endParaRPr>
-          </a:p>
-        </p:txBody>
-      </p:sp>
-      <p:sp>
-        <p:nvSpPr>
-          <p:cNvPr id="5" name="CICD"/>
-          <p:cNvSpPr/>
-          <p:nvPr/>
-        </p:nvSpPr>
-        <p:spPr>
-          <a:xfrm>
-            <a:off x="2406650" y="5427865"/>
-            <a:ext cx="7378700" cy="885129"/>
-          </a:xfrm>
-          <a:prstGeom prst="rect">
-            <a:avLst/>
-          </a:prstGeom>
-          <a:noFill/>
-          <a:ln/>
-        </p:spPr>
-        <p:txBody>
-          <a:bodyPr wrap="square" lIns="0" tIns="0" rIns="0" bIns="0" rtlCol="0" anchor="ctr"/>
-          <a:lstStyle/>
-          <a:p>
-            <a:pPr algn="ctr">
-              <a:lnSpc>
-                <a:spcPct val="150000"/>
-              </a:lnSpc>
-            </a:pPr>
-            <a:endParaRPr lang="en-US" altLang="ko-KR" sz="1100" dirty="0">
-              <a:latin typeface="Pretendard SemiBold" panose="02000703000000020004" pitchFamily="50" charset="-127"/>
-              <a:ea typeface="Pretendard SemiBold" panose="02000703000000020004" pitchFamily="50" charset="-127"/>
-              <a:cs typeface="Pretendard SemiBold" panose="02000703000000020004" pitchFamily="50" charset="-127"/>
-            </a:endParaRPr>
-          </a:p>
-        </p:txBody>
-      </p:sp>
-      <p:grpSp>
-        <p:nvGrpSpPr>
-          <p:cNvPr id="6" name="그룹 5">
-            <a:extLst>
-              <a:ext uri="{FF2B5EF4-FFF2-40B4-BE49-F238E27FC236}">
-                <a16:creationId xmlns:a16="http://schemas.microsoft.com/office/drawing/2014/main" id="{1773C09A-468D-E7AE-9696-83405B30E197}"/>
-              </a:ext>
-            </a:extLst>
-          </p:cNvPr>
-          <p:cNvGrpSpPr/>
-          <p:nvPr/>
-        </p:nvGrpSpPr>
-        <p:grpSpPr>
-          <a:xfrm>
-            <a:off x="2680643" y="913922"/>
-            <a:ext cx="6830715" cy="4230599"/>
-            <a:chOff x="2686508" y="976066"/>
-            <a:chExt cx="6830715" cy="4230599"/>
-          </a:xfrm>
-        </p:grpSpPr>
-        <p:sp>
-          <p:nvSpPr>
-            <p:cNvPr id="7" name="직사각형 6">
-              <a:extLst>
-                <a:ext uri="{FF2B5EF4-FFF2-40B4-BE49-F238E27FC236}">
-                  <a16:creationId xmlns:a16="http://schemas.microsoft.com/office/drawing/2014/main" id="{AD99BA65-5DAF-7FC6-3F27-EB805F92AC1E}"/>
-                </a:ext>
-              </a:extLst>
-            </p:cNvPr>
-            <p:cNvSpPr/>
-            <p:nvPr/>
-          </p:nvSpPr>
-          <p:spPr>
-            <a:xfrm>
-              <a:off x="2686508" y="976066"/>
-              <a:ext cx="6830715" cy="4230599"/>
-            </a:xfrm>
-            <a:prstGeom prst="rect">
-              <a:avLst/>
-            </a:prstGeom>
-            <a:solidFill>
-              <a:schemeClr val="accent1">
-                <a:lumMod val="20000"/>
-                <a:lumOff val="80000"/>
-                <a:alpha val="35000"/>
-              </a:schemeClr>
-            </a:solidFill>
-            <a:ln>
-              <a:noFill/>
-            </a:ln>
-            <a:effectLst>
-              <a:softEdge rad="12700"/>
-            </a:effectLst>
-          </p:spPr>
-          <p:style>
-            <a:lnRef idx="2">
-              <a:schemeClr val="accent1">
-                <a:shade val="50000"/>
-              </a:schemeClr>
-            </a:lnRef>
-            <a:fillRef idx="1">
-              <a:schemeClr val="accent1"/>
-            </a:fillRef>
-            <a:effectRef idx="0">
-              <a:schemeClr val="accent1"/>
-            </a:effectRef>
-            <a:fontRef idx="minor">
-              <a:schemeClr val="lt1"/>
-            </a:fontRef>
-          </p:style>
-          <p:txBody>
-            <a:bodyPr rtlCol="0" anchor="t"/>
-            <a:lstStyle/>
-            <a:p>
-              <a:pPr algn="ctr"/>
-              <a:r>
-                <a:rPr lang="en-US" altLang="ko-KR" sz="1200" dirty="0">
-                  <a:solidFill>
-                    <a:schemeClr val="tx1">
-                      <a:lumMod val="85000"/>
-                      <a:lumOff val="15000"/>
-                    </a:schemeClr>
-                  </a:solidFill>
-                  <a:latin typeface="Pretendard SemiBold" panose="02000703000000020004" pitchFamily="50" charset="-127"/>
-                  <a:ea typeface="Pretendard SemiBold" panose="02000703000000020004" pitchFamily="50" charset="-127"/>
-                  <a:cs typeface="Pretendard SemiBold" panose="02000703000000020004" pitchFamily="50" charset="-127"/>
-                </a:rPr>
-                <a:t>CORE</a:t>
-              </a:r>
-              <a:endParaRPr lang="ko-KR" altLang="en-US" sz="1200" dirty="0">
-                <a:solidFill>
-                  <a:schemeClr val="tx1">
-                    <a:lumMod val="85000"/>
-                    <a:lumOff val="15000"/>
-                  </a:schemeClr>
-                </a:solidFill>
-                <a:latin typeface="Pretendard SemiBold" panose="02000703000000020004" pitchFamily="50" charset="-127"/>
-                <a:ea typeface="Pretendard SemiBold" panose="02000703000000020004" pitchFamily="50" charset="-127"/>
-                <a:cs typeface="Pretendard SemiBold" panose="02000703000000020004" pitchFamily="50" charset="-127"/>
-              </a:endParaRPr>
-            </a:p>
-          </p:txBody>
-        </p:sp>
-        <p:sp>
-          <p:nvSpPr>
-            <p:cNvPr id="8" name="직사각형 7">
-              <a:extLst>
-                <a:ext uri="{FF2B5EF4-FFF2-40B4-BE49-F238E27FC236}">
-                  <a16:creationId xmlns:a16="http://schemas.microsoft.com/office/drawing/2014/main" id="{15F07289-013A-FA33-EBF9-2BC0DFED4F65}"/>
-                </a:ext>
-              </a:extLst>
-            </p:cNvPr>
-            <p:cNvSpPr/>
-            <p:nvPr/>
-          </p:nvSpPr>
-          <p:spPr>
-            <a:xfrm>
-              <a:off x="5308307" y="3587630"/>
-              <a:ext cx="3139749" cy="1470580"/>
-            </a:xfrm>
-            <a:prstGeom prst="rect">
-              <a:avLst/>
-            </a:prstGeom>
-            <a:solidFill>
-              <a:schemeClr val="bg2">
-                <a:lumMod val="90000"/>
-                <a:alpha val="40000"/>
-              </a:schemeClr>
-            </a:solidFill>
-            <a:ln w="12700">
-              <a:noFill/>
-            </a:ln>
-            <a:effectLst>
-              <a:softEdge rad="12700"/>
-            </a:effectLst>
-          </p:spPr>
-          <p:style>
-            <a:lnRef idx="2">
-              <a:schemeClr val="accent1">
-                <a:shade val="50000"/>
-              </a:schemeClr>
-            </a:lnRef>
-            <a:fillRef idx="1">
-              <a:schemeClr val="accent1"/>
-            </a:fillRef>
-            <a:effectRef idx="0">
-              <a:schemeClr val="accent1"/>
-            </a:effectRef>
-            <a:fontRef idx="minor">
-              <a:schemeClr val="lt1"/>
-            </a:fontRef>
-          </p:style>
-          <p:txBody>
-            <a:bodyPr rtlCol="0" anchor="t"/>
-            <a:lstStyle/>
-            <a:p>
-              <a:pPr algn="ctr"/>
-              <a:r>
-                <a:rPr lang="en-US" altLang="ko-KR" sz="1100" b="1" dirty="0">
-                  <a:solidFill>
-                    <a:schemeClr val="tx1">
-                      <a:lumMod val="85000"/>
-                      <a:lumOff val="15000"/>
-                    </a:schemeClr>
-                  </a:solidFill>
-                  <a:latin typeface="Pretendard SemiBold" panose="02000703000000020004" pitchFamily="50" charset="-127"/>
-                  <a:ea typeface="Pretendard SemiBold" panose="02000703000000020004" pitchFamily="50" charset="-127"/>
-                  <a:cs typeface="Pretendard SemiBold" panose="02000703000000020004" pitchFamily="50" charset="-127"/>
-                </a:rPr>
-                <a:t>System Meta</a:t>
-              </a:r>
-            </a:p>
-          </p:txBody>
-        </p:sp>
-        <p:sp>
-          <p:nvSpPr>
-            <p:cNvPr id="9" name="직사각형 8">
-              <a:extLst>
-                <a:ext uri="{FF2B5EF4-FFF2-40B4-BE49-F238E27FC236}">
-                  <a16:creationId xmlns:a16="http://schemas.microsoft.com/office/drawing/2014/main" id="{15F07289-013A-FA33-EBF9-2BC0DFED4F65}"/>
-                </a:ext>
-              </a:extLst>
-            </p:cNvPr>
-            <p:cNvSpPr/>
-            <p:nvPr/>
-          </p:nvSpPr>
-          <p:spPr>
-            <a:xfrm>
-              <a:off x="5308307" y="1358914"/>
-              <a:ext cx="3139749" cy="2086255"/>
-            </a:xfrm>
-            <a:prstGeom prst="rect">
-              <a:avLst/>
-            </a:prstGeom>
-            <a:solidFill>
-              <a:schemeClr val="accent1">
-                <a:lumMod val="40000"/>
-                <a:lumOff val="60000"/>
-                <a:alpha val="40000"/>
-              </a:schemeClr>
-            </a:solidFill>
-            <a:ln w="12700">
-              <a:noFill/>
-            </a:ln>
-            <a:effectLst>
-              <a:softEdge rad="12700"/>
-            </a:effectLst>
-          </p:spPr>
-          <p:style>
-            <a:lnRef idx="2">
-              <a:schemeClr val="accent1">
-                <a:shade val="50000"/>
-              </a:schemeClr>
-            </a:lnRef>
-            <a:fillRef idx="1">
-              <a:schemeClr val="accent1"/>
-            </a:fillRef>
-            <a:effectRef idx="0">
-              <a:schemeClr val="accent1"/>
-            </a:effectRef>
-            <a:fontRef idx="minor">
-              <a:schemeClr val="lt1"/>
-            </a:fontRef>
-          </p:style>
-          <p:txBody>
-            <a:bodyPr rtlCol="0" anchor="t"/>
-            <a:lstStyle/>
-            <a:p>
-              <a:pPr algn="ctr"/>
-              <a:r>
-                <a:rPr lang="en-US" altLang="ko-KR" sz="1100" b="1" dirty="0">
-                  <a:solidFill>
-                    <a:schemeClr val="tx1">
-                      <a:lumMod val="85000"/>
-                      <a:lumOff val="15000"/>
-                    </a:schemeClr>
-                  </a:solidFill>
-                  <a:latin typeface="Pretendard SemiBold" panose="02000703000000020004" pitchFamily="50" charset="-127"/>
-                  <a:ea typeface="Pretendard SemiBold" panose="02000703000000020004" pitchFamily="50" charset="-127"/>
-                  <a:cs typeface="Pretendard SemiBold" panose="02000703000000020004" pitchFamily="50" charset="-127"/>
-                </a:rPr>
-                <a:t>Patch Manager</a:t>
-              </a:r>
-            </a:p>
-          </p:txBody>
-        </p:sp>
-        <p:sp>
-          <p:nvSpPr>
-            <p:cNvPr id="10" name="직사각형 9">
-              <a:extLst>
-                <a:ext uri="{FF2B5EF4-FFF2-40B4-BE49-F238E27FC236}">
-                  <a16:creationId xmlns:a16="http://schemas.microsoft.com/office/drawing/2014/main" id="{5808C6C3-9339-FB27-D784-3BDF80F90D2D}"/>
-                </a:ext>
-              </a:extLst>
-            </p:cNvPr>
-            <p:cNvSpPr/>
-            <p:nvPr/>
-          </p:nvSpPr>
-          <p:spPr>
-            <a:xfrm>
-              <a:off x="3427082" y="1379126"/>
-              <a:ext cx="1331225" cy="2054908"/>
-            </a:xfrm>
-            <a:prstGeom prst="rect">
-              <a:avLst/>
-            </a:prstGeom>
-            <a:solidFill>
-              <a:schemeClr val="accent4">
-                <a:lumMod val="20000"/>
-                <a:lumOff val="80000"/>
-                <a:alpha val="35000"/>
-              </a:schemeClr>
-            </a:solidFill>
-            <a:ln>
-              <a:noFill/>
-            </a:ln>
-            <a:effectLst>
-              <a:softEdge rad="31750"/>
-            </a:effectLst>
-          </p:spPr>
-          <p:style>
-            <a:lnRef idx="2">
-              <a:schemeClr val="accent1">
-                <a:shade val="50000"/>
-              </a:schemeClr>
-            </a:lnRef>
-            <a:fillRef idx="1">
-              <a:schemeClr val="accent1"/>
-            </a:fillRef>
-            <a:effectRef idx="0">
-              <a:schemeClr val="accent1"/>
-            </a:effectRef>
-            <a:fontRef idx="minor">
-              <a:schemeClr val="lt1"/>
-            </a:fontRef>
-          </p:style>
-          <p:txBody>
-            <a:bodyPr rtlCol="0" anchor="t"/>
-            <a:lstStyle/>
-            <a:p>
-              <a:pPr algn="ctr"/>
-              <a:r>
-                <a:rPr lang="en-US" altLang="ko-KR" sz="1100" b="1" dirty="0">
-                  <a:solidFill>
-                    <a:schemeClr val="tx1">
-                      <a:lumMod val="85000"/>
-                      <a:lumOff val="15000"/>
-                    </a:schemeClr>
-                  </a:solidFill>
-                  <a:latin typeface="Pretendard SemiBold" panose="02000703000000020004" pitchFamily="50" charset="-127"/>
-                  <a:ea typeface="Pretendard SemiBold" panose="02000703000000020004" pitchFamily="50" charset="-127"/>
-                  <a:cs typeface="Pretendard SemiBold" panose="02000703000000020004" pitchFamily="50" charset="-127"/>
-                </a:rPr>
-                <a:t>Client</a:t>
-              </a:r>
-              <a:endParaRPr lang="ko-KR" altLang="en-US" sz="1100" b="1" dirty="0">
-                <a:solidFill>
-                  <a:schemeClr val="tx1">
-                    <a:lumMod val="85000"/>
-                    <a:lumOff val="15000"/>
-                  </a:schemeClr>
-                </a:solidFill>
-                <a:latin typeface="Pretendard SemiBold" panose="02000703000000020004" pitchFamily="50" charset="-127"/>
-                <a:ea typeface="Pretendard SemiBold" panose="02000703000000020004" pitchFamily="50" charset="-127"/>
-                <a:cs typeface="Pretendard SemiBold" panose="02000703000000020004" pitchFamily="50" charset="-127"/>
-              </a:endParaRPr>
-            </a:p>
-          </p:txBody>
-        </p:sp>
-        <p:sp>
-          <p:nvSpPr>
-            <p:cNvPr id="11" name="직사각형 10">
-              <a:extLst>
-                <a:ext uri="{FF2B5EF4-FFF2-40B4-BE49-F238E27FC236}">
-                  <a16:creationId xmlns:a16="http://schemas.microsoft.com/office/drawing/2014/main" id="{C8A7CCDD-3C0C-5A56-9F28-C6D98BE1145B}"/>
-                </a:ext>
-              </a:extLst>
-            </p:cNvPr>
-            <p:cNvSpPr/>
-            <p:nvPr/>
-          </p:nvSpPr>
-          <p:spPr>
-            <a:xfrm>
-              <a:off x="3602246" y="2230488"/>
-              <a:ext cx="992468" cy="471409"/>
-            </a:xfrm>
-            <a:prstGeom prst="rect">
-              <a:avLst/>
-            </a:prstGeom>
-            <a:solidFill>
-              <a:schemeClr val="accent4">
-                <a:lumMod val="40000"/>
-                <a:lumOff val="60000"/>
-                <a:alpha val="40000"/>
-              </a:schemeClr>
-            </a:solidFill>
-            <a:ln>
-              <a:solidFill>
-                <a:schemeClr val="tx1"/>
-              </a:solidFill>
-            </a:ln>
-            <a:effectLst>
-              <a:softEdge rad="0"/>
-            </a:effectLst>
-          </p:spPr>
-          <p:style>
-            <a:lnRef idx="2">
-              <a:schemeClr val="accent1">
-                <a:shade val="50000"/>
-              </a:schemeClr>
-            </a:lnRef>
-            <a:fillRef idx="1">
-              <a:schemeClr val="accent1"/>
-            </a:fillRef>
-            <a:effectRef idx="0">
-              <a:schemeClr val="accent1"/>
-            </a:effectRef>
-            <a:fontRef idx="minor">
-              <a:schemeClr val="lt1"/>
-            </a:fontRef>
-          </p:style>
-          <p:txBody>
-            <a:bodyPr rtlCol="0" anchor="ctr"/>
-            <a:lstStyle/>
-            <a:p>
-              <a:pPr algn="ctr"/>
-              <a:r>
-                <a:rPr lang="en-US" altLang="ko-KR" sz="1050" dirty="0">
-                  <a:solidFill>
-                    <a:schemeClr val="tx1"/>
-                  </a:solidFill>
-                  <a:latin typeface="Pretendard SemiBold" panose="02000703000000020004" pitchFamily="50" charset="-127"/>
-                  <a:ea typeface="Pretendard SemiBold" panose="02000703000000020004" pitchFamily="50" charset="-127"/>
-                  <a:cs typeface="Pretendard SemiBold" panose="02000703000000020004" pitchFamily="50" charset="-127"/>
-                </a:rPr>
-                <a:t>Web Console</a:t>
-              </a:r>
-              <a:endParaRPr lang="ko-KR" altLang="en-US" sz="1050" dirty="0">
-                <a:solidFill>
-                  <a:schemeClr val="tx1"/>
-                </a:solidFill>
-                <a:latin typeface="Pretendard SemiBold" panose="02000703000000020004" pitchFamily="50" charset="-127"/>
-                <a:ea typeface="Pretendard SemiBold" panose="02000703000000020004" pitchFamily="50" charset="-127"/>
-                <a:cs typeface="Pretendard SemiBold" panose="02000703000000020004" pitchFamily="50" charset="-127"/>
-              </a:endParaRPr>
-            </a:p>
-          </p:txBody>
-        </p:sp>
-        <p:sp>
-          <p:nvSpPr>
-            <p:cNvPr id="12" name="원통 11">
-              <a:extLst>
-                <a:ext uri="{FF2B5EF4-FFF2-40B4-BE49-F238E27FC236}">
-                  <a16:creationId xmlns:a16="http://schemas.microsoft.com/office/drawing/2014/main" id="{F705EAAC-2F42-A97F-290D-E026A423D1FD}"/>
-                </a:ext>
-              </a:extLst>
-            </p:cNvPr>
-            <p:cNvSpPr/>
-            <p:nvPr/>
-          </p:nvSpPr>
-          <p:spPr>
-            <a:xfrm>
-              <a:off x="6030713" y="4041269"/>
-              <a:ext cx="709127" cy="670700"/>
-            </a:xfrm>
-            <a:prstGeom prst="can">
-              <a:avLst/>
-            </a:prstGeom>
-            <a:solidFill>
-              <a:schemeClr val="bg2">
-                <a:lumMod val="90000"/>
-              </a:schemeClr>
-            </a:solidFill>
-            <a:ln>
-              <a:solidFill>
-                <a:schemeClr val="tx1"/>
-              </a:solidFill>
-            </a:ln>
-          </p:spPr>
-          <p:style>
-            <a:lnRef idx="2">
-              <a:schemeClr val="accent1">
-                <a:shade val="50000"/>
-              </a:schemeClr>
-            </a:lnRef>
-            <a:fillRef idx="1">
-              <a:schemeClr val="accent1"/>
-            </a:fillRef>
-            <a:effectRef idx="0">
-              <a:schemeClr val="accent1"/>
-            </a:effectRef>
-            <a:fontRef idx="minor">
-              <a:schemeClr val="lt1"/>
-            </a:fontRef>
-          </p:style>
-          <p:txBody>
-            <a:bodyPr rtlCol="0" anchor="ctr"/>
-            <a:lstStyle/>
-            <a:p>
-              <a:pPr algn="ctr"/>
-              <a:r>
-                <a:rPr lang="en-US" altLang="ko-KR" sz="1050" dirty="0">
-                  <a:solidFill>
-                    <a:schemeClr val="tx1"/>
-                  </a:solidFill>
-                  <a:latin typeface="Pretendard SemiBold" panose="02000703000000020004" pitchFamily="50" charset="-127"/>
-                  <a:ea typeface="Pretendard SemiBold" panose="02000703000000020004" pitchFamily="50" charset="-127"/>
-                  <a:cs typeface="Pretendard SemiBold" panose="02000703000000020004" pitchFamily="50" charset="-127"/>
-                </a:rPr>
-                <a:t>Task Meta</a:t>
-              </a:r>
-              <a:endParaRPr lang="ko-KR" altLang="en-US" sz="1050" dirty="0">
-                <a:solidFill>
-                  <a:schemeClr val="tx1"/>
-                </a:solidFill>
-                <a:latin typeface="Pretendard SemiBold" panose="02000703000000020004" pitchFamily="50" charset="-127"/>
-                <a:ea typeface="Pretendard SemiBold" panose="02000703000000020004" pitchFamily="50" charset="-127"/>
-                <a:cs typeface="Pretendard SemiBold" panose="02000703000000020004" pitchFamily="50" charset="-127"/>
-              </a:endParaRPr>
-            </a:p>
-          </p:txBody>
-        </p:sp>
-        <p:sp>
-          <p:nvSpPr>
-            <p:cNvPr id="13" name="직사각형 12"/>
-            <p:cNvSpPr/>
-            <p:nvPr/>
-          </p:nvSpPr>
-          <p:spPr>
-            <a:xfrm>
-              <a:off x="5576670" y="2221643"/>
-              <a:ext cx="2590027" cy="471409"/>
-            </a:xfrm>
-            <a:prstGeom prst="rect">
-              <a:avLst/>
-            </a:prstGeom>
-            <a:solidFill>
-              <a:schemeClr val="accent1">
-                <a:lumMod val="40000"/>
-                <a:lumOff val="60000"/>
-              </a:schemeClr>
-            </a:solidFill>
-            <a:ln>
-              <a:solidFill>
-                <a:schemeClr val="tx1"/>
-              </a:solidFill>
-            </a:ln>
-          </p:spPr>
-          <p:style>
-            <a:lnRef idx="2">
-              <a:schemeClr val="accent1">
-                <a:shade val="50000"/>
-              </a:schemeClr>
-            </a:lnRef>
-            <a:fillRef idx="1">
-              <a:schemeClr val="accent1"/>
-            </a:fillRef>
-            <a:effectRef idx="0">
-              <a:schemeClr val="accent1"/>
-            </a:effectRef>
-            <a:fontRef idx="minor">
-              <a:schemeClr val="lt1"/>
-            </a:fontRef>
-          </p:style>
-          <p:txBody>
-            <a:bodyPr rtlCol="0" anchor="ctr"/>
-            <a:lstStyle/>
-            <a:p>
-              <a:pPr algn="ctr"/>
-              <a:r>
-                <a:rPr lang="en-US" altLang="ko-KR" sz="1050" dirty="0">
-                  <a:solidFill>
-                    <a:schemeClr val="tx1"/>
-                  </a:solidFill>
-                  <a:latin typeface="Pretendard SemiBold" panose="02000703000000020004" pitchFamily="50" charset="-127"/>
-                  <a:ea typeface="Pretendard SemiBold" panose="02000703000000020004" pitchFamily="50" charset="-127"/>
-                  <a:cs typeface="Pretendard SemiBold" panose="02000703000000020004" pitchFamily="50" charset="-127"/>
-                </a:rPr>
-                <a:t>Task Service</a:t>
-              </a:r>
-              <a:endParaRPr lang="ko-KR" altLang="en-US" sz="1050" dirty="0">
-                <a:solidFill>
-                  <a:schemeClr val="tx1"/>
-                </a:solidFill>
-                <a:latin typeface="Pretendard SemiBold" panose="02000703000000020004" pitchFamily="50" charset="-127"/>
-                <a:ea typeface="Pretendard SemiBold" panose="02000703000000020004" pitchFamily="50" charset="-127"/>
-                <a:cs typeface="Pretendard SemiBold" panose="02000703000000020004" pitchFamily="50" charset="-127"/>
-              </a:endParaRPr>
-            </a:p>
-          </p:txBody>
-        </p:sp>
-        <p:sp>
-          <p:nvSpPr>
-            <p:cNvPr id="14" name="원통 13">
-              <a:extLst>
-                <a:ext uri="{FF2B5EF4-FFF2-40B4-BE49-F238E27FC236}">
-                  <a16:creationId xmlns:a16="http://schemas.microsoft.com/office/drawing/2014/main" id="{F705EAAC-2F42-A97F-290D-E026A423D1FD}"/>
-                </a:ext>
-              </a:extLst>
-            </p:cNvPr>
-            <p:cNvSpPr/>
-            <p:nvPr/>
-          </p:nvSpPr>
-          <p:spPr>
-            <a:xfrm>
-              <a:off x="6995224" y="4048769"/>
-              <a:ext cx="709127" cy="674277"/>
-            </a:xfrm>
-            <a:prstGeom prst="can">
-              <a:avLst/>
-            </a:prstGeom>
-            <a:solidFill>
-              <a:schemeClr val="bg2">
-                <a:lumMod val="90000"/>
-              </a:schemeClr>
-            </a:solidFill>
-            <a:ln>
-              <a:solidFill>
-                <a:schemeClr val="tx1"/>
-              </a:solidFill>
-            </a:ln>
-          </p:spPr>
-          <p:style>
-            <a:lnRef idx="2">
-              <a:schemeClr val="accent1">
-                <a:shade val="50000"/>
-              </a:schemeClr>
-            </a:lnRef>
-            <a:fillRef idx="1">
-              <a:schemeClr val="accent1"/>
-            </a:fillRef>
-            <a:effectRef idx="0">
-              <a:schemeClr val="accent1"/>
-            </a:effectRef>
-            <a:fontRef idx="minor">
-              <a:schemeClr val="lt1"/>
-            </a:fontRef>
-          </p:style>
-          <p:txBody>
-            <a:bodyPr rtlCol="0" anchor="ctr"/>
-            <a:lstStyle/>
-            <a:p>
-              <a:pPr algn="ctr"/>
-              <a:r>
-                <a:rPr lang="en-US" altLang="ko-KR" sz="1050" dirty="0">
-                  <a:solidFill>
-                    <a:schemeClr val="tx1"/>
-                  </a:solidFill>
-                  <a:latin typeface="Pretendard SemiBold" panose="02000703000000020004" pitchFamily="50" charset="-127"/>
-                  <a:ea typeface="Pretendard SemiBold" panose="02000703000000020004" pitchFamily="50" charset="-127"/>
-                  <a:cs typeface="Pretendard SemiBold" panose="02000703000000020004" pitchFamily="50" charset="-127"/>
-                </a:rPr>
-                <a:t>Task Status</a:t>
-              </a:r>
-              <a:endParaRPr lang="ko-KR" altLang="en-US" sz="1050" dirty="0">
-                <a:solidFill>
-                  <a:schemeClr val="tx1"/>
-                </a:solidFill>
-                <a:latin typeface="Pretendard SemiBold" panose="02000703000000020004" pitchFamily="50" charset="-127"/>
-                <a:ea typeface="Pretendard SemiBold" panose="02000703000000020004" pitchFamily="50" charset="-127"/>
-                <a:cs typeface="Pretendard SemiBold" panose="02000703000000020004" pitchFamily="50" charset="-127"/>
-              </a:endParaRPr>
-            </a:p>
-          </p:txBody>
-        </p:sp>
-        <p:cxnSp>
-          <p:nvCxnSpPr>
-            <p:cNvPr id="15" name="직선 화살표 연결선 14"/>
-            <p:cNvCxnSpPr/>
-            <p:nvPr/>
-          </p:nvCxnSpPr>
-          <p:spPr>
-            <a:xfrm>
-              <a:off x="4594714" y="2415076"/>
-              <a:ext cx="1008627" cy="0"/>
-            </a:xfrm>
-            <a:prstGeom prst="straightConnector1">
-              <a:avLst/>
-            </a:prstGeom>
-            <a:ln w="50800">
-              <a:tailEnd type="triangle"/>
-            </a:ln>
-          </p:spPr>
-          <p:style>
-            <a:lnRef idx="1">
-              <a:schemeClr val="dk1"/>
-            </a:lnRef>
-            <a:fillRef idx="0">
-              <a:schemeClr val="dk1"/>
-            </a:fillRef>
-            <a:effectRef idx="0">
-              <a:schemeClr val="dk1"/>
-            </a:effectRef>
-            <a:fontRef idx="minor">
-              <a:schemeClr val="tx1"/>
-            </a:fontRef>
-          </p:style>
-        </p:cxnSp>
-        <p:cxnSp>
-          <p:nvCxnSpPr>
-            <p:cNvPr id="16" name="직선 화살표 연결선 15"/>
-            <p:cNvCxnSpPr/>
-            <p:nvPr/>
-          </p:nvCxnSpPr>
-          <p:spPr>
-            <a:xfrm>
-              <a:off x="4594714" y="2535404"/>
-              <a:ext cx="1008627" cy="0"/>
-            </a:xfrm>
-            <a:prstGeom prst="straightConnector1">
-              <a:avLst/>
-            </a:prstGeom>
-            <a:ln w="50800">
-              <a:headEnd type="triangle"/>
-              <a:tailEnd type="none"/>
-            </a:ln>
-          </p:spPr>
-          <p:style>
-            <a:lnRef idx="1">
-              <a:schemeClr val="dk1"/>
-            </a:lnRef>
-            <a:fillRef idx="0">
-              <a:schemeClr val="dk1"/>
-            </a:fillRef>
-            <a:effectRef idx="0">
-              <a:schemeClr val="dk1"/>
-            </a:effectRef>
-            <a:fontRef idx="minor">
-              <a:schemeClr val="tx1"/>
-            </a:fontRef>
-          </p:style>
-        </p:cxnSp>
-        <p:cxnSp>
-          <p:nvCxnSpPr>
-            <p:cNvPr id="17" name="직선 화살표 연결선 16"/>
-            <p:cNvCxnSpPr/>
-            <p:nvPr/>
-          </p:nvCxnSpPr>
-          <p:spPr>
-            <a:xfrm flipH="1">
-              <a:off x="6331783" y="2688862"/>
-              <a:ext cx="2" cy="1339372"/>
-            </a:xfrm>
-            <a:prstGeom prst="straightConnector1">
-              <a:avLst/>
-            </a:prstGeom>
-            <a:ln w="50800">
-              <a:headEnd type="triangle" w="med" len="sm"/>
-              <a:tailEnd type="none"/>
-            </a:ln>
-          </p:spPr>
-          <p:style>
-            <a:lnRef idx="1">
-              <a:schemeClr val="dk1"/>
-            </a:lnRef>
-            <a:fillRef idx="0">
-              <a:schemeClr val="dk1"/>
-            </a:fillRef>
-            <a:effectRef idx="0">
-              <a:schemeClr val="dk1"/>
-            </a:effectRef>
-            <a:fontRef idx="minor">
-              <a:schemeClr val="tx1"/>
-            </a:fontRef>
-          </p:style>
-        </p:cxnSp>
-        <p:cxnSp>
-          <p:nvCxnSpPr>
-            <p:cNvPr id="18" name="직선 화살표 연결선 17"/>
-            <p:cNvCxnSpPr/>
-            <p:nvPr/>
-          </p:nvCxnSpPr>
-          <p:spPr>
-            <a:xfrm flipH="1">
-              <a:off x="7389919" y="2701897"/>
-              <a:ext cx="36" cy="1346872"/>
-            </a:xfrm>
-            <a:prstGeom prst="straightConnector1">
-              <a:avLst/>
-            </a:prstGeom>
-            <a:ln w="50800">
-              <a:headEnd type="triangle" w="med" len="sm"/>
-              <a:tailEnd type="none"/>
-            </a:ln>
-          </p:spPr>
-          <p:style>
-            <a:lnRef idx="1">
-              <a:schemeClr val="dk1"/>
-            </a:lnRef>
-            <a:fillRef idx="0">
-              <a:schemeClr val="dk1"/>
-            </a:fillRef>
-            <a:effectRef idx="0">
-              <a:schemeClr val="dk1"/>
-            </a:effectRef>
-            <a:fontRef idx="minor">
-              <a:schemeClr val="tx1"/>
-            </a:fontRef>
-          </p:style>
-        </p:cxnSp>
-        <p:sp>
-          <p:nvSpPr>
-            <p:cNvPr id="19" name="TextBox 18"/>
-            <p:cNvSpPr txBox="1"/>
-            <p:nvPr/>
-          </p:nvSpPr>
-          <p:spPr>
-            <a:xfrm>
-              <a:off x="4743713" y="2133033"/>
-              <a:ext cx="1098356" cy="253916"/>
-            </a:xfrm>
-            <a:prstGeom prst="rect">
-              <a:avLst/>
-            </a:prstGeom>
-            <a:noFill/>
-            <a:ln>
-              <a:noFill/>
-            </a:ln>
-          </p:spPr>
-          <p:txBody>
-            <a:bodyPr wrap="square" rtlCol="0">
-              <a:spAutoFit/>
-            </a:bodyPr>
-            <a:lstStyle/>
-            <a:p>
-              <a:r>
-                <a:rPr lang="ko-KR" altLang="en-US" sz="1050" dirty="0">
-                  <a:latin typeface="Pretendard SemiBold" panose="02000703000000020004" pitchFamily="50" charset="-127"/>
-                  <a:ea typeface="Pretendard SemiBold" panose="02000703000000020004" pitchFamily="50" charset="-127"/>
-                  <a:cs typeface="Pretendard SemiBold" panose="02000703000000020004" pitchFamily="50" charset="-127"/>
-                </a:rPr>
-                <a:t>조회 요청</a:t>
-              </a:r>
-            </a:p>
-          </p:txBody>
-        </p:sp>
-        <p:sp>
-          <p:nvSpPr>
-            <p:cNvPr id="20" name="TextBox 19"/>
-            <p:cNvSpPr txBox="1"/>
-            <p:nvPr/>
-          </p:nvSpPr>
-          <p:spPr>
-            <a:xfrm>
-              <a:off x="5306478" y="2963361"/>
-              <a:ext cx="1098356" cy="415498"/>
-            </a:xfrm>
-            <a:prstGeom prst="rect">
-              <a:avLst/>
-            </a:prstGeom>
-            <a:noFill/>
-            <a:ln>
-              <a:noFill/>
-            </a:ln>
-          </p:spPr>
-          <p:txBody>
-            <a:bodyPr wrap="square" rtlCol="0">
-              <a:spAutoFit/>
-            </a:bodyPr>
-            <a:lstStyle/>
-            <a:p>
-              <a:r>
-                <a:rPr lang="ko-KR" altLang="en-US" sz="1050" dirty="0">
-                  <a:latin typeface="Pretendard SemiBold" panose="02000703000000020004" pitchFamily="50" charset="-127"/>
-                  <a:ea typeface="Pretendard SemiBold" panose="02000703000000020004" pitchFamily="50" charset="-127"/>
-                  <a:cs typeface="Pretendard SemiBold" panose="02000703000000020004" pitchFamily="50" charset="-127"/>
-                </a:rPr>
-                <a:t>메타 정보와 상태 정보 조합</a:t>
-              </a:r>
-            </a:p>
-          </p:txBody>
-        </p:sp>
-      </p:grpSp>
-      <p:sp>
-        <p:nvSpPr>
-          <p:cNvPr id="21" name="CICD">
-            <a:extLst>
-              <a:ext uri="{FF2B5EF4-FFF2-40B4-BE49-F238E27FC236}">
-                <a16:creationId xmlns:a16="http://schemas.microsoft.com/office/drawing/2014/main" id="{762B2A58-EB2E-992F-01DA-15C50B338CB6}"/>
-              </a:ext>
-            </a:extLst>
-          </p:cNvPr>
-          <p:cNvSpPr/>
-          <p:nvPr/>
-        </p:nvSpPr>
-        <p:spPr>
-          <a:xfrm>
-            <a:off x="2406650" y="5476377"/>
-            <a:ext cx="7378700" cy="666750"/>
-          </a:xfrm>
-          <a:prstGeom prst="rect">
-            <a:avLst/>
-          </a:prstGeom>
-          <a:noFill/>
-          <a:ln/>
-        </p:spPr>
-        <p:txBody>
-          <a:bodyPr wrap="square" lIns="0" tIns="0" rIns="0" bIns="0" rtlCol="0" anchor="t"/>
-          <a:lstStyle/>
-          <a:p>
-            <a:pPr algn="ctr">
-              <a:lnSpc>
-                <a:spcPct val="150000"/>
-              </a:lnSpc>
-            </a:pPr>
-            <a:r>
-              <a:rPr lang="ko-KR" altLang="en-US" sz="1100" dirty="0">
-                <a:latin typeface="Pretendard SemiBold" panose="02000703000000020004" pitchFamily="50" charset="-127"/>
-                <a:ea typeface="Pretendard SemiBold" panose="02000703000000020004" pitchFamily="50" charset="-127"/>
-                <a:cs typeface="Pretendard SemiBold" panose="02000703000000020004" pitchFamily="50" charset="-127"/>
-              </a:rPr>
-              <a:t>패치 작업의 계획과 현재 패치 진행 상황을 별도의 대조 작업 없이 조회 가능</a:t>
-            </a:r>
-            <a:endParaRPr lang="en-US" sz="1100" dirty="0">
-              <a:latin typeface="Pretendard SemiBold" panose="02000703000000020004" pitchFamily="50" charset="-127"/>
-              <a:ea typeface="Pretendard SemiBold" panose="02000703000000020004" pitchFamily="50" charset="-127"/>
-              <a:cs typeface="Pretendard SemiBold" panose="02000703000000020004" pitchFamily="50" charset="-127"/>
-            </a:endParaRPr>
-          </a:p>
-        </p:txBody>
-      </p:sp>
-      <p:sp>
-        <p:nvSpPr>
-          <p:cNvPr id="24" name="Key Feature">
-            <a:extLst>
-              <a:ext uri="{FF2B5EF4-FFF2-40B4-BE49-F238E27FC236}">
-                <a16:creationId xmlns:a16="http://schemas.microsoft.com/office/drawing/2014/main" id="{047F6C8F-C776-7F0F-DAFE-29B85ACC1B0A}"/>
-              </a:ext>
-            </a:extLst>
-          </p:cNvPr>
-          <p:cNvSpPr/>
-          <p:nvPr/>
-        </p:nvSpPr>
-        <p:spPr>
-          <a:xfrm>
-            <a:off x="444499" y="285750"/>
-            <a:ext cx="4112163" cy="311150"/>
-          </a:xfrm>
-          <a:prstGeom prst="rect">
-            <a:avLst/>
-          </a:prstGeom>
-          <a:noFill/>
-          <a:ln/>
-        </p:spPr>
-        <p:txBody>
-          <a:bodyPr wrap="square" lIns="0" tIns="0" rIns="0" bIns="0" rtlCol="0" anchor="t"/>
-          <a:lstStyle/>
-          <a:p>
-            <a:pPr>
-              <a:lnSpc>
-                <a:spcPct val="108333"/>
-              </a:lnSpc>
-            </a:pPr>
-            <a:r>
-              <a:rPr lang="ko-KR" altLang="en-US" sz="1900" dirty="0">
-                <a:latin typeface="Pretendard SemiBold" panose="02000703000000020004" pitchFamily="50" charset="-127"/>
-                <a:ea typeface="Pretendard SemiBold" panose="02000703000000020004" pitchFamily="50" charset="-127"/>
-                <a:cs typeface="Pretendard SemiBold" panose="02000703000000020004" pitchFamily="50" charset="-127"/>
-              </a:rPr>
-              <a:t>패치 작업 조회</a:t>
-            </a:r>
-            <a:endParaRPr lang="en-US" altLang="ko-Kore-KR" sz="1900" dirty="0">
-              <a:latin typeface="Pretendard SemiBold" panose="02000703000000020004" pitchFamily="50" charset="-127"/>
-              <a:ea typeface="Pretendard SemiBold" panose="02000703000000020004" pitchFamily="50" charset="-127"/>
-              <a:cs typeface="Pretendard SemiBold" panose="02000703000000020004" pitchFamily="50" charset="-127"/>
-            </a:endParaRPr>
-          </a:p>
-        </p:txBody>
-      </p:sp>
-    </p:spTree>
-    <p:extLst>
-      <p:ext uri="{BB962C8B-B14F-4D97-AF65-F5344CB8AC3E}">
-        <p14:creationId xmlns:p14="http://schemas.microsoft.com/office/powerpoint/2010/main" val="3589141187"/>
-      </p:ext>
-    </p:extLst>
-  </p:cSld>
-  <p:clrMapOvr>
-    <a:masterClrMapping/>
-  </p:clrMapOvr>
-</p:sld>
-</file>
-
-<file path=ppt/slides/slide2.xml><?xml version="1.0" encoding="utf-8"?>
-<p:sld xmlns:a="http://schemas.openxmlformats.org/drawingml/2006/main" xmlns:r="http://schemas.openxmlformats.org/officeDocument/2006/relationships" xmlns:p="http://schemas.openxmlformats.org/presentationml/2006/main">
-  <p:cSld>
-    <p:spTree>
-      <p:nvGrpSpPr>
-        <p:cNvPr id="1" name=""/>
-        <p:cNvGrpSpPr/>
-        <p:nvPr/>
-      </p:nvGrpSpPr>
-      <p:grpSpPr>
-        <a:xfrm>
-          <a:off x="0" y="0"/>
-          <a:ext cx="0" cy="0"/>
-          <a:chOff x="0" y="0"/>
-          <a:chExt cx="0" cy="0"/>
-        </a:xfrm>
-      </p:grpSpPr>
-      <p:sp>
-        <p:nvSpPr>
-          <p:cNvPr id="2" name="Rectangle 3">
-            <a:extLst>
-              <a:ext uri="{FF2B5EF4-FFF2-40B4-BE49-F238E27FC236}">
-                <a16:creationId xmlns:a16="http://schemas.microsoft.com/office/drawing/2014/main" id="{7CCED3B5-6117-6C7E-273C-62C411C3E563}"/>
-              </a:ext>
-            </a:extLst>
-          </p:cNvPr>
-          <p:cNvSpPr/>
-          <p:nvPr/>
-        </p:nvSpPr>
-        <p:spPr>
-          <a:xfrm>
-            <a:off x="1120209" y="2095390"/>
-            <a:ext cx="3153259" cy="2100034"/>
-          </a:xfrm>
-          <a:prstGeom prst="rect">
-            <a:avLst/>
-          </a:prstGeom>
-          <a:solidFill>
-            <a:srgbClr val="E8F4FD"/>
-          </a:solidFill>
-          <a:ln w="12700">
-            <a:solidFill>
-              <a:srgbClr val="438DD5"/>
-            </a:solidFill>
-          </a:ln>
-          <a:effectLst/>
-        </p:spPr>
-        <p:style>
-          <a:lnRef idx="1">
-            <a:schemeClr val="accent1"/>
-          </a:lnRef>
-          <a:fillRef idx="3">
-            <a:schemeClr val="accent1"/>
-          </a:fillRef>
-          <a:effectRef idx="2">
-            <a:schemeClr val="accent1"/>
-          </a:effectRef>
-          <a:fontRef idx="minor">
-            <a:schemeClr val="lt1"/>
-          </a:fontRef>
-        </p:style>
-        <p:txBody>
-          <a:bodyPr tIns="27432" rtlCol="0" anchor="t"/>
-          <a:lstStyle/>
-          <a:p>
-            <a:pPr algn="ctr">
-              <a:defRPr sz="900" b="1">
-                <a:solidFill>
-                  <a:srgbClr val="2D2D2D"/>
-                </a:solidFill>
-              </a:defRPr>
-            </a:pPr>
-            <a:r>
-              <a:rPr>
-                <a:latin typeface="+mn-ea"/>
-              </a:rPr>
-              <a:t>Web Application</a:t>
-            </a:r>
-          </a:p>
-        </p:txBody>
-      </p:sp>
-      <p:sp>
-        <p:nvSpPr>
-          <p:cNvPr id="3" name="Rounded Rectangle 8">
-            <a:extLst>
-              <a:ext uri="{FF2B5EF4-FFF2-40B4-BE49-F238E27FC236}">
-                <a16:creationId xmlns:a16="http://schemas.microsoft.com/office/drawing/2014/main" id="{02F4D657-C665-DD75-8F39-1C645DCA0328}"/>
-              </a:ext>
-            </a:extLst>
-          </p:cNvPr>
-          <p:cNvSpPr/>
-          <p:nvPr/>
-        </p:nvSpPr>
-        <p:spPr>
-          <a:xfrm>
-            <a:off x="2115011" y="1165602"/>
-            <a:ext cx="1325880" cy="566928"/>
-          </a:xfrm>
-          <a:prstGeom prst="roundRect">
-            <a:avLst/>
-          </a:prstGeom>
-          <a:solidFill>
-            <a:srgbClr val="08427B"/>
-          </a:solidFill>
-          <a:ln w="12700">
-            <a:solidFill>
-              <a:srgbClr val="08427B"/>
-            </a:solidFill>
-          </a:ln>
-          <a:effectLst/>
-        </p:spPr>
-        <p:style>
-          <a:lnRef idx="1">
-            <a:schemeClr val="accent1"/>
-          </a:lnRef>
-          <a:fillRef idx="3">
-            <a:schemeClr val="accent1"/>
-          </a:fillRef>
-          <a:effectRef idx="2">
-            <a:schemeClr val="accent1"/>
-          </a:effectRef>
-          <a:fontRef idx="minor">
-            <a:schemeClr val="lt1"/>
-          </a:fontRef>
-        </p:style>
-        <p:txBody>
-          <a:bodyPr wrap="square" lIns="45720" tIns="18288" rIns="45720" bIns="18288" rtlCol="0" anchor="ctr"/>
-          <a:lstStyle/>
-          <a:p>
-            <a:pPr algn="ctr">
-              <a:defRPr sz="780" b="1">
-                <a:solidFill>
-                  <a:srgbClr val="FFFFFF"/>
-                </a:solidFill>
-              </a:defRPr>
-            </a:pPr>
-            <a:r>
-              <a:rPr dirty="0" err="1">
-                <a:latin typeface="+mn-ea"/>
-              </a:rPr>
-              <a:t>박피엠</a:t>
-            </a:r>
-            <a:r>
-              <a:rPr dirty="0">
-                <a:latin typeface="+mn-ea"/>
-              </a:rPr>
-              <a:t> (PM/PO)</a:t>
-            </a:r>
-          </a:p>
-          <a:p>
-            <a:pPr algn="ctr">
-              <a:defRPr sz="780" b="0">
-                <a:solidFill>
-                  <a:srgbClr val="FFFFFF"/>
-                </a:solidFill>
-              </a:defRPr>
-            </a:pPr>
-            <a:r>
-              <a:rPr dirty="0" err="1">
-                <a:latin typeface="+mn-ea"/>
-              </a:rPr>
-              <a:t>자연어</a:t>
-            </a:r>
-            <a:r>
-              <a:rPr dirty="0">
-                <a:latin typeface="+mn-ea"/>
-              </a:rPr>
-              <a:t> </a:t>
-            </a:r>
-            <a:r>
-              <a:rPr dirty="0" err="1">
-                <a:latin typeface="+mn-ea"/>
-              </a:rPr>
-              <a:t>질의·후속</a:t>
-            </a:r>
-            <a:r>
-              <a:rPr dirty="0">
-                <a:latin typeface="+mn-ea"/>
-              </a:rPr>
-              <a:t> </a:t>
-            </a:r>
-            <a:r>
-              <a:rPr dirty="0" err="1">
-                <a:latin typeface="+mn-ea"/>
-              </a:rPr>
-              <a:t>질문</a:t>
-            </a:r>
-            <a:endParaRPr dirty="0">
-              <a:latin typeface="+mn-ea"/>
-            </a:endParaRPr>
-          </a:p>
-          <a:p>
-            <a:pPr algn="ctr">
-              <a:defRPr sz="780" b="0">
-                <a:solidFill>
-                  <a:srgbClr val="FFFFFF"/>
-                </a:solidFill>
-              </a:defRPr>
-            </a:pPr>
-            <a:r>
-              <a:rPr dirty="0" err="1">
-                <a:latin typeface="+mn-ea"/>
-              </a:rPr>
-              <a:t>답변</a:t>
-            </a:r>
-            <a:r>
-              <a:rPr dirty="0">
-                <a:latin typeface="+mn-ea"/>
-              </a:rPr>
-              <a:t> </a:t>
-            </a:r>
-            <a:r>
-              <a:rPr dirty="0" err="1">
-                <a:latin typeface="+mn-ea"/>
-              </a:rPr>
-              <a:t>평가·큐레이션</a:t>
-            </a:r>
-            <a:endParaRPr dirty="0">
-              <a:latin typeface="+mn-ea"/>
-            </a:endParaRPr>
-          </a:p>
-        </p:txBody>
-      </p:sp>
-      <p:sp>
-        <p:nvSpPr>
-          <p:cNvPr id="4" name="Rectangle 9">
-            <a:extLst>
-              <a:ext uri="{FF2B5EF4-FFF2-40B4-BE49-F238E27FC236}">
-                <a16:creationId xmlns:a16="http://schemas.microsoft.com/office/drawing/2014/main" id="{F8209DAC-151A-89B1-DE48-1FEAAEABF2B6}"/>
-              </a:ext>
-            </a:extLst>
-          </p:cNvPr>
-          <p:cNvSpPr/>
-          <p:nvPr/>
-        </p:nvSpPr>
-        <p:spPr>
-          <a:xfrm>
-            <a:off x="2115011" y="2566565"/>
-            <a:ext cx="1166417" cy="566928"/>
-          </a:xfrm>
-          <a:prstGeom prst="rect">
-            <a:avLst/>
-          </a:prstGeom>
-          <a:solidFill>
-            <a:srgbClr val="438DD5"/>
-          </a:solidFill>
-          <a:ln w="12700">
-            <a:solidFill>
-              <a:srgbClr val="438DD5"/>
-            </a:solidFill>
-          </a:ln>
-          <a:effectLst/>
-        </p:spPr>
-        <p:style>
-          <a:lnRef idx="1">
-            <a:schemeClr val="accent1"/>
-          </a:lnRef>
-          <a:fillRef idx="3">
-            <a:schemeClr val="accent1"/>
-          </a:fillRef>
-          <a:effectRef idx="2">
-            <a:schemeClr val="accent1"/>
-          </a:effectRef>
-          <a:fontRef idx="minor">
-            <a:schemeClr val="lt1"/>
-          </a:fontRef>
-        </p:style>
-        <p:txBody>
-          <a:bodyPr wrap="square" lIns="45720" tIns="18288" rIns="45720" bIns="18288" rtlCol="0" anchor="ctr"/>
-          <a:lstStyle/>
-          <a:p>
-            <a:pPr algn="ctr">
-              <a:defRPr sz="750" b="1">
-                <a:solidFill>
-                  <a:srgbClr val="FFFFFF"/>
-                </a:solidFill>
-              </a:defRPr>
-            </a:pPr>
-            <a:r>
-              <a:rPr dirty="0">
-                <a:latin typeface="+mn-ea"/>
-              </a:rPr>
-              <a:t>Conversation Gateway</a:t>
-            </a:r>
-          </a:p>
-          <a:p>
-            <a:pPr algn="ctr">
-              <a:defRPr sz="750" b="0">
-                <a:solidFill>
-                  <a:srgbClr val="FFFFFF"/>
-                </a:solidFill>
-              </a:defRPr>
-            </a:pPr>
-            <a:r>
-              <a:rPr dirty="0" err="1">
-                <a:latin typeface="+mn-ea"/>
-              </a:rPr>
-              <a:t>대화</a:t>
-            </a:r>
-            <a:r>
-              <a:rPr dirty="0">
-                <a:latin typeface="+mn-ea"/>
-              </a:rPr>
-              <a:t> UI </a:t>
-            </a:r>
-            <a:r>
-              <a:rPr dirty="0" err="1">
-                <a:latin typeface="+mn-ea"/>
-              </a:rPr>
-              <a:t>진입점</a:t>
-            </a:r>
-            <a:endParaRPr dirty="0">
-              <a:latin typeface="+mn-ea"/>
-            </a:endParaRPr>
-          </a:p>
-          <a:p>
-            <a:pPr algn="ctr">
-              <a:defRPr sz="750" b="0">
-                <a:solidFill>
-                  <a:srgbClr val="FFFFFF"/>
-                </a:solidFill>
-              </a:defRPr>
-            </a:pPr>
-            <a:r>
-              <a:rPr dirty="0" err="1">
-                <a:latin typeface="+mn-ea"/>
-              </a:rPr>
-              <a:t>세션</a:t>
-            </a:r>
-            <a:r>
-              <a:rPr dirty="0">
-                <a:latin typeface="+mn-ea"/>
-              </a:rPr>
-              <a:t> </a:t>
-            </a:r>
-            <a:r>
-              <a:rPr dirty="0" err="1">
-                <a:latin typeface="+mn-ea"/>
-              </a:rPr>
-              <a:t>메시지</a:t>
-            </a:r>
-            <a:r>
-              <a:rPr dirty="0">
-                <a:latin typeface="+mn-ea"/>
-              </a:rPr>
-              <a:t> </a:t>
-            </a:r>
-            <a:r>
-              <a:rPr dirty="0" err="1">
-                <a:latin typeface="+mn-ea"/>
-              </a:rPr>
-              <a:t>중계</a:t>
-            </a:r>
-            <a:endParaRPr dirty="0">
-              <a:latin typeface="+mn-ea"/>
-            </a:endParaRPr>
-          </a:p>
-        </p:txBody>
-      </p:sp>
-      <p:sp>
-        <p:nvSpPr>
-          <p:cNvPr id="5" name="Rectangle 9">
-            <a:extLst>
-              <a:ext uri="{FF2B5EF4-FFF2-40B4-BE49-F238E27FC236}">
-                <a16:creationId xmlns:a16="http://schemas.microsoft.com/office/drawing/2014/main" id="{87584A3E-974D-D31B-CE31-11AF40310C0D}"/>
-              </a:ext>
-            </a:extLst>
-          </p:cNvPr>
-          <p:cNvSpPr/>
-          <p:nvPr/>
-        </p:nvSpPr>
-        <p:spPr>
-          <a:xfrm>
-            <a:off x="3199894" y="3455470"/>
-            <a:ext cx="903808" cy="566928"/>
-          </a:xfrm>
-          <a:prstGeom prst="rect">
-            <a:avLst/>
-          </a:prstGeom>
-          <a:solidFill>
-            <a:srgbClr val="438DD5"/>
-          </a:solidFill>
-          <a:ln w="12700">
-            <a:solidFill>
-              <a:srgbClr val="438DD5"/>
-            </a:solidFill>
-          </a:ln>
-          <a:effectLst/>
-        </p:spPr>
-        <p:style>
-          <a:lnRef idx="1">
-            <a:schemeClr val="accent1"/>
-          </a:lnRef>
-          <a:fillRef idx="3">
-            <a:schemeClr val="accent1"/>
-          </a:fillRef>
-          <a:effectRef idx="2">
-            <a:schemeClr val="accent1"/>
-          </a:effectRef>
-          <a:fontRef idx="minor">
-            <a:schemeClr val="lt1"/>
-          </a:fontRef>
-        </p:style>
-        <p:txBody>
-          <a:bodyPr wrap="square" lIns="45720" tIns="18288" rIns="45720" bIns="18288" rtlCol="0" anchor="ctr"/>
-          <a:lstStyle/>
-          <a:p>
-            <a:pPr algn="ctr">
-              <a:defRPr sz="750" b="1">
-                <a:solidFill>
-                  <a:srgbClr val="FFFFFF"/>
-                </a:solidFill>
-              </a:defRPr>
-            </a:pPr>
-            <a:r>
-              <a:rPr lang="en-US" dirty="0">
-                <a:latin typeface="+mn-ea"/>
-              </a:rPr>
-              <a:t>Auth Gateway</a:t>
-            </a:r>
-            <a:endParaRPr dirty="0">
-              <a:latin typeface="+mn-ea"/>
-            </a:endParaRPr>
-          </a:p>
-          <a:p>
-            <a:pPr algn="ctr">
-              <a:defRPr sz="750" b="0">
-                <a:solidFill>
-                  <a:srgbClr val="FFFFFF"/>
-                </a:solidFill>
-              </a:defRPr>
-            </a:pPr>
-            <a:r>
-              <a:rPr lang="ko-KR" altLang="en-US" dirty="0">
-                <a:latin typeface="+mn-ea"/>
-              </a:rPr>
-              <a:t>권한 확인</a:t>
-            </a:r>
-            <a:endParaRPr dirty="0">
-              <a:latin typeface="+mn-ea"/>
-            </a:endParaRPr>
-          </a:p>
-          <a:p>
-            <a:pPr algn="ctr">
-              <a:defRPr sz="750" b="0">
-                <a:solidFill>
-                  <a:srgbClr val="FFFFFF"/>
-                </a:solidFill>
-              </a:defRPr>
-            </a:pPr>
-            <a:r>
-              <a:rPr lang="ko-KR" altLang="en-US" dirty="0">
-                <a:latin typeface="+mn-ea"/>
-              </a:rPr>
-              <a:t>접근 제어</a:t>
-            </a:r>
-            <a:endParaRPr dirty="0">
-              <a:latin typeface="+mn-ea"/>
-            </a:endParaRPr>
-          </a:p>
-        </p:txBody>
-      </p:sp>
-      <p:sp>
-        <p:nvSpPr>
-          <p:cNvPr id="6" name="Rectangle 9">
-            <a:extLst>
-              <a:ext uri="{FF2B5EF4-FFF2-40B4-BE49-F238E27FC236}">
-                <a16:creationId xmlns:a16="http://schemas.microsoft.com/office/drawing/2014/main" id="{9CD5BE9C-2ECC-F3E1-3CA1-6858CBFC975D}"/>
-              </a:ext>
-            </a:extLst>
-          </p:cNvPr>
-          <p:cNvSpPr/>
-          <p:nvPr/>
-        </p:nvSpPr>
-        <p:spPr>
-          <a:xfrm>
-            <a:off x="4432686" y="1486117"/>
-            <a:ext cx="1596763" cy="566928"/>
-          </a:xfrm>
-          <a:prstGeom prst="rect">
-            <a:avLst/>
-          </a:prstGeom>
-          <a:solidFill>
-            <a:srgbClr val="438DD5"/>
-          </a:solidFill>
-          <a:ln w="12700">
-            <a:solidFill>
-              <a:srgbClr val="438DD5"/>
-            </a:solidFill>
-          </a:ln>
-          <a:effectLst/>
-        </p:spPr>
-        <p:style>
-          <a:lnRef idx="1">
-            <a:schemeClr val="accent1"/>
-          </a:lnRef>
-          <a:fillRef idx="3">
-            <a:schemeClr val="accent1"/>
-          </a:fillRef>
-          <a:effectRef idx="2">
-            <a:schemeClr val="accent1"/>
-          </a:effectRef>
-          <a:fontRef idx="minor">
-            <a:schemeClr val="lt1"/>
-          </a:fontRef>
-        </p:style>
-        <p:txBody>
-          <a:bodyPr wrap="square" lIns="45720" tIns="18288" rIns="45720" bIns="18288" rtlCol="0" anchor="ctr"/>
-          <a:lstStyle/>
-          <a:p>
-            <a:pPr algn="ctr">
-              <a:defRPr sz="750" b="1">
-                <a:solidFill>
-                  <a:srgbClr val="FFFFFF"/>
-                </a:solidFill>
-              </a:defRPr>
-            </a:pPr>
-            <a:r>
-              <a:rPr lang="en-US" dirty="0">
-                <a:latin typeface="+mn-ea"/>
-              </a:rPr>
-              <a:t>Feedback Gateway</a:t>
-            </a:r>
-            <a:endParaRPr dirty="0">
-              <a:latin typeface="+mn-ea"/>
-            </a:endParaRPr>
-          </a:p>
-          <a:p>
-            <a:pPr algn="ctr">
-              <a:defRPr sz="750" b="0">
-                <a:solidFill>
-                  <a:srgbClr val="FFFFFF"/>
-                </a:solidFill>
-              </a:defRPr>
-            </a:pPr>
-            <a:r>
-              <a:rPr lang="ko-KR" altLang="en-US" dirty="0">
-                <a:latin typeface="+mn-ea"/>
-              </a:rPr>
-              <a:t>답변 평가</a:t>
-            </a:r>
-            <a:r>
-              <a:rPr lang="en-US" altLang="ko-KR" dirty="0">
-                <a:latin typeface="+mn-ea"/>
-              </a:rPr>
-              <a:t>·</a:t>
-            </a:r>
-            <a:r>
-              <a:rPr lang="ko-KR" altLang="en-US" dirty="0">
-                <a:latin typeface="+mn-ea"/>
-              </a:rPr>
-              <a:t>자산화 요청 중계</a:t>
-            </a:r>
-            <a:endParaRPr dirty="0">
-              <a:latin typeface="+mn-ea"/>
-            </a:endParaRPr>
-          </a:p>
-        </p:txBody>
-      </p:sp>
-      <p:cxnSp>
-        <p:nvCxnSpPr>
-          <p:cNvPr id="7" name="직선 화살표 연결선 10">
-            <a:extLst>
-              <a:ext uri="{FF2B5EF4-FFF2-40B4-BE49-F238E27FC236}">
-                <a16:creationId xmlns:a16="http://schemas.microsoft.com/office/drawing/2014/main" id="{B99E80E7-3FB0-9985-2B3B-8D0D7AA3A16E}"/>
-              </a:ext>
-            </a:extLst>
-          </p:cNvPr>
-          <p:cNvCxnSpPr>
-            <a:cxnSpLocks/>
-            <a:stCxn id="4" idx="2"/>
-            <a:endCxn id="5" idx="0"/>
-          </p:cNvCxnSpPr>
-          <p:nvPr/>
-        </p:nvCxnSpPr>
-        <p:spPr>
-          <a:xfrm rot="16200000" flipH="1">
-            <a:off x="3014021" y="2817692"/>
-            <a:ext cx="321977" cy="953578"/>
-          </a:xfrm>
-          <a:prstGeom prst="curvedConnector3">
-            <a:avLst>
-              <a:gd name="adj1" fmla="val 50000"/>
-            </a:avLst>
-          </a:prstGeom>
-          <a:ln w="3175">
-            <a:solidFill>
-              <a:schemeClr val="tx1"/>
-            </a:solidFill>
-            <a:headEnd type="triangle"/>
-            <a:tailEnd type="triangle"/>
-          </a:ln>
-          <a:effectLst/>
-        </p:spPr>
-        <p:style>
-          <a:lnRef idx="2">
-            <a:schemeClr val="accent1"/>
-          </a:lnRef>
-          <a:fillRef idx="0">
-            <a:schemeClr val="accent1"/>
-          </a:fillRef>
-          <a:effectRef idx="1">
-            <a:schemeClr val="accent1"/>
-          </a:effectRef>
-          <a:fontRef idx="minor">
-            <a:schemeClr val="tx1"/>
-          </a:fontRef>
-        </p:style>
-      </p:cxnSp>
-      <p:sp>
-        <p:nvSpPr>
-          <p:cNvPr id="8" name="Rectangle 4">
-            <a:extLst>
-              <a:ext uri="{FF2B5EF4-FFF2-40B4-BE49-F238E27FC236}">
-                <a16:creationId xmlns:a16="http://schemas.microsoft.com/office/drawing/2014/main" id="{5008727C-5419-BD62-5539-926649818CF9}"/>
-              </a:ext>
-            </a:extLst>
-          </p:cNvPr>
-          <p:cNvSpPr/>
-          <p:nvPr/>
-        </p:nvSpPr>
-        <p:spPr>
-          <a:xfrm>
-            <a:off x="4366165" y="1193799"/>
-            <a:ext cx="5974033" cy="3001625"/>
-          </a:xfrm>
-          <a:prstGeom prst="rect">
-            <a:avLst/>
-          </a:prstGeom>
-          <a:solidFill>
-            <a:srgbClr val="FFFFFF"/>
-          </a:solidFill>
-          <a:ln w="12700">
-            <a:solidFill>
-              <a:srgbClr val="438DD5"/>
-            </a:solidFill>
-          </a:ln>
-          <a:effectLst/>
-        </p:spPr>
-        <p:style>
-          <a:lnRef idx="1">
-            <a:schemeClr val="accent1"/>
-          </a:lnRef>
-          <a:fillRef idx="3">
-            <a:schemeClr val="accent1"/>
-          </a:fillRef>
-          <a:effectRef idx="2">
-            <a:schemeClr val="accent1"/>
-          </a:effectRef>
-          <a:fontRef idx="minor">
-            <a:schemeClr val="lt1"/>
-          </a:fontRef>
-        </p:style>
-        <p:txBody>
-          <a:bodyPr tIns="27432" rtlCol="0" anchor="t"/>
-          <a:lstStyle/>
-          <a:p>
-            <a:pPr algn="ctr">
-              <a:defRPr sz="900" b="1">
-                <a:solidFill>
-                  <a:srgbClr val="2D2D2D"/>
-                </a:solidFill>
-              </a:defRPr>
-            </a:pPr>
-            <a:r>
-              <a:rPr>
-                <a:latin typeface="+mn-ea"/>
-              </a:rPr>
-              <a:t>Interactive Assistant</a:t>
-            </a:r>
-          </a:p>
-        </p:txBody>
-      </p:sp>
-      <p:sp>
-        <p:nvSpPr>
-          <p:cNvPr id="9" name="Rectangle 9">
-            <a:extLst>
-              <a:ext uri="{FF2B5EF4-FFF2-40B4-BE49-F238E27FC236}">
-                <a16:creationId xmlns:a16="http://schemas.microsoft.com/office/drawing/2014/main" id="{1FF0CDB3-147F-B04F-581E-CD59B2D7072E}"/>
-              </a:ext>
-            </a:extLst>
-          </p:cNvPr>
-          <p:cNvSpPr/>
-          <p:nvPr/>
-        </p:nvSpPr>
-        <p:spPr>
-          <a:xfrm>
-            <a:off x="6740029" y="1470340"/>
-            <a:ext cx="1166417" cy="566928"/>
-          </a:xfrm>
-          <a:prstGeom prst="rect">
-            <a:avLst/>
-          </a:prstGeom>
-          <a:solidFill>
-            <a:srgbClr val="438DD5"/>
-          </a:solidFill>
-          <a:ln w="12700">
-            <a:solidFill>
-              <a:srgbClr val="438DD5"/>
-            </a:solidFill>
-          </a:ln>
-          <a:effectLst/>
-        </p:spPr>
-        <p:style>
-          <a:lnRef idx="1">
-            <a:schemeClr val="accent1"/>
-          </a:lnRef>
-          <a:fillRef idx="3">
-            <a:schemeClr val="accent1"/>
-          </a:fillRef>
-          <a:effectRef idx="2">
-            <a:schemeClr val="accent1"/>
-          </a:effectRef>
-          <a:fontRef idx="minor">
-            <a:schemeClr val="lt1"/>
-          </a:fontRef>
-        </p:style>
-        <p:txBody>
-          <a:bodyPr wrap="square" lIns="45720" tIns="18288" rIns="45720" bIns="18288" rtlCol="0" anchor="ctr"/>
-          <a:lstStyle/>
-          <a:p>
-            <a:pPr algn="ctr">
-              <a:defRPr sz="750" b="1">
-                <a:solidFill>
-                  <a:srgbClr val="FFFFFF"/>
-                </a:solidFill>
-              </a:defRPr>
-            </a:pPr>
-            <a:r>
-              <a:rPr lang="en-US" dirty="0">
-                <a:latin typeface="+mn-ea"/>
-              </a:rPr>
-              <a:t>Session Manager</a:t>
-            </a:r>
-            <a:endParaRPr dirty="0">
-              <a:latin typeface="+mn-ea"/>
-            </a:endParaRPr>
-          </a:p>
-          <a:p>
-            <a:pPr algn="ctr">
-              <a:defRPr sz="750" b="0">
-                <a:solidFill>
-                  <a:srgbClr val="FFFFFF"/>
-                </a:solidFill>
-              </a:defRPr>
-            </a:pPr>
-            <a:r>
-              <a:rPr lang="ko-KR" altLang="en-US" dirty="0">
-                <a:latin typeface="+mn-ea"/>
-              </a:rPr>
-              <a:t>세션</a:t>
-            </a:r>
-            <a:r>
-              <a:rPr lang="en-US" altLang="ko-KR" dirty="0">
-                <a:latin typeface="+mn-ea"/>
-              </a:rPr>
-              <a:t>·</a:t>
-            </a:r>
-            <a:r>
-              <a:rPr lang="ko-KR" altLang="en-US" dirty="0">
-                <a:latin typeface="+mn-ea"/>
-              </a:rPr>
-              <a:t>대화 이력 유지</a:t>
-            </a:r>
-            <a:endParaRPr dirty="0">
-              <a:latin typeface="+mn-ea"/>
-            </a:endParaRPr>
-          </a:p>
-          <a:p>
-            <a:pPr algn="ctr">
-              <a:defRPr sz="750" b="0">
-                <a:solidFill>
-                  <a:srgbClr val="FFFFFF"/>
-                </a:solidFill>
-              </a:defRPr>
-            </a:pPr>
-            <a:r>
-              <a:rPr lang="ko-KR" altLang="en-US" dirty="0">
-                <a:latin typeface="+mn-ea"/>
-              </a:rPr>
-              <a:t>후속 질문 컨텍스트 관리</a:t>
-            </a:r>
-            <a:endParaRPr dirty="0">
-              <a:latin typeface="+mn-ea"/>
-            </a:endParaRPr>
-          </a:p>
-        </p:txBody>
-      </p:sp>
-      <p:sp>
-        <p:nvSpPr>
-          <p:cNvPr id="10" name="Rectangle 9">
-            <a:extLst>
-              <a:ext uri="{FF2B5EF4-FFF2-40B4-BE49-F238E27FC236}">
-                <a16:creationId xmlns:a16="http://schemas.microsoft.com/office/drawing/2014/main" id="{A9C77B56-DBB6-4544-B681-B8E9D9546596}"/>
-              </a:ext>
-            </a:extLst>
-          </p:cNvPr>
-          <p:cNvSpPr/>
-          <p:nvPr/>
-        </p:nvSpPr>
-        <p:spPr>
-          <a:xfrm>
-            <a:off x="8341474" y="1964509"/>
-            <a:ext cx="1425244" cy="566928"/>
-          </a:xfrm>
-          <a:prstGeom prst="rect">
-            <a:avLst/>
-          </a:prstGeom>
-          <a:solidFill>
-            <a:srgbClr val="438DD5"/>
-          </a:solidFill>
-          <a:ln w="12700">
-            <a:solidFill>
-              <a:srgbClr val="438DD5"/>
-            </a:solidFill>
-          </a:ln>
-          <a:effectLst/>
-        </p:spPr>
-        <p:style>
-          <a:lnRef idx="1">
-            <a:schemeClr val="accent1"/>
-          </a:lnRef>
-          <a:fillRef idx="3">
-            <a:schemeClr val="accent1"/>
-          </a:fillRef>
-          <a:effectRef idx="2">
-            <a:schemeClr val="accent1"/>
-          </a:effectRef>
-          <a:fontRef idx="minor">
-            <a:schemeClr val="lt1"/>
-          </a:fontRef>
-        </p:style>
-        <p:txBody>
-          <a:bodyPr wrap="square" lIns="45720" tIns="18288" rIns="45720" bIns="18288" rtlCol="0" anchor="ctr"/>
-          <a:lstStyle/>
-          <a:p>
-            <a:pPr algn="ctr">
-              <a:defRPr sz="750" b="1">
-                <a:solidFill>
-                  <a:srgbClr val="FFFFFF"/>
-                </a:solidFill>
-              </a:defRPr>
-            </a:pPr>
-            <a:r>
-              <a:rPr lang="en-US" dirty="0">
-                <a:latin typeface="+mn-ea"/>
-              </a:rPr>
-              <a:t>Query Router</a:t>
-            </a:r>
-            <a:endParaRPr dirty="0">
-              <a:latin typeface="+mn-ea"/>
-            </a:endParaRPr>
-          </a:p>
-          <a:p>
-            <a:pPr algn="ctr">
-              <a:defRPr sz="750" b="0">
-                <a:solidFill>
-                  <a:srgbClr val="FFFFFF"/>
-                </a:solidFill>
-              </a:defRPr>
-            </a:pPr>
-            <a:r>
-              <a:rPr lang="ko-KR" altLang="en-US" dirty="0">
-                <a:latin typeface="+mn-ea"/>
-              </a:rPr>
-              <a:t>질의 의도 분류</a:t>
-            </a:r>
-            <a:r>
-              <a:rPr lang="en-US" altLang="ko-KR" dirty="0">
-                <a:latin typeface="+mn-ea"/>
-              </a:rPr>
-              <a:t>·</a:t>
-            </a:r>
-            <a:r>
-              <a:rPr lang="ko-KR" altLang="en-US" dirty="0" err="1">
-                <a:latin typeface="+mn-ea"/>
-              </a:rPr>
-              <a:t>핸들러</a:t>
-            </a:r>
-            <a:r>
-              <a:rPr lang="ko-KR" altLang="en-US" dirty="0">
-                <a:latin typeface="+mn-ea"/>
-              </a:rPr>
-              <a:t> 라우팅</a:t>
-            </a:r>
-            <a:endParaRPr dirty="0">
-              <a:latin typeface="+mn-ea"/>
-            </a:endParaRPr>
-          </a:p>
-          <a:p>
-            <a:pPr algn="ctr">
-              <a:defRPr sz="750" b="0">
-                <a:solidFill>
-                  <a:srgbClr val="FFFFFF"/>
-                </a:solidFill>
-              </a:defRPr>
-            </a:pPr>
-            <a:r>
-              <a:rPr lang="ko-KR" altLang="en-US" dirty="0">
-                <a:latin typeface="+mn-ea"/>
-              </a:rPr>
-              <a:t>컨텍스트 범위 적용</a:t>
-            </a:r>
-            <a:endParaRPr dirty="0">
-              <a:latin typeface="+mn-ea"/>
-            </a:endParaRPr>
-          </a:p>
-        </p:txBody>
-      </p:sp>
-      <p:sp>
-        <p:nvSpPr>
-          <p:cNvPr id="11" name="Rectangle 9">
-            <a:extLst>
-              <a:ext uri="{FF2B5EF4-FFF2-40B4-BE49-F238E27FC236}">
-                <a16:creationId xmlns:a16="http://schemas.microsoft.com/office/drawing/2014/main" id="{03C6FC1C-CC66-4201-10A4-E4125343D1AD}"/>
-              </a:ext>
-            </a:extLst>
-          </p:cNvPr>
-          <p:cNvSpPr/>
-          <p:nvPr/>
-        </p:nvSpPr>
-        <p:spPr>
-          <a:xfrm>
-            <a:off x="8341474" y="2891143"/>
-            <a:ext cx="1425244" cy="566928"/>
-          </a:xfrm>
-          <a:prstGeom prst="rect">
-            <a:avLst/>
-          </a:prstGeom>
-          <a:solidFill>
-            <a:srgbClr val="438DD5"/>
-          </a:solidFill>
-          <a:ln w="12700">
-            <a:solidFill>
-              <a:srgbClr val="438DD5"/>
-            </a:solidFill>
-          </a:ln>
-          <a:effectLst/>
-        </p:spPr>
-        <p:style>
-          <a:lnRef idx="1">
-            <a:schemeClr val="accent1"/>
-          </a:lnRef>
-          <a:fillRef idx="3">
-            <a:schemeClr val="accent1"/>
-          </a:fillRef>
-          <a:effectRef idx="2">
-            <a:schemeClr val="accent1"/>
-          </a:effectRef>
-          <a:fontRef idx="minor">
-            <a:schemeClr val="lt1"/>
-          </a:fontRef>
-        </p:style>
-        <p:txBody>
-          <a:bodyPr wrap="square" lIns="45720" tIns="18288" rIns="45720" bIns="18288" rtlCol="0" anchor="ctr"/>
-          <a:lstStyle/>
-          <a:p>
-            <a:pPr algn="ctr">
-              <a:defRPr sz="750" b="1">
-                <a:solidFill>
-                  <a:srgbClr val="FFFFFF"/>
-                </a:solidFill>
-              </a:defRPr>
-            </a:pPr>
-            <a:r>
-              <a:rPr lang="en-US" dirty="0">
-                <a:latin typeface="+mn-ea"/>
-              </a:rPr>
-              <a:t>QA Handler</a:t>
-            </a:r>
-            <a:endParaRPr dirty="0">
-              <a:latin typeface="+mn-ea"/>
-            </a:endParaRPr>
-          </a:p>
-          <a:p>
-            <a:pPr algn="ctr">
-              <a:defRPr sz="750" b="0">
-                <a:solidFill>
-                  <a:srgbClr val="FFFFFF"/>
-                </a:solidFill>
-              </a:defRPr>
-            </a:pPr>
-            <a:r>
-              <a:rPr lang="ko-KR" altLang="en-US" dirty="0">
-                <a:latin typeface="+mn-ea"/>
-              </a:rPr>
-              <a:t>근거 포함 답변 생성</a:t>
-            </a:r>
-            <a:endParaRPr dirty="0">
-              <a:latin typeface="+mn-ea"/>
-            </a:endParaRPr>
-          </a:p>
-          <a:p>
-            <a:pPr algn="ctr">
-              <a:defRPr sz="750" b="0">
-                <a:solidFill>
-                  <a:srgbClr val="FFFFFF"/>
-                </a:solidFill>
-              </a:defRPr>
-            </a:pPr>
-            <a:r>
-              <a:rPr lang="en-US" altLang="ko-KR" dirty="0">
-                <a:latin typeface="+mn-ea"/>
-              </a:rPr>
-              <a:t>LLM </a:t>
-            </a:r>
-            <a:r>
-              <a:rPr lang="ko-KR" altLang="en-US" dirty="0">
-                <a:latin typeface="+mn-ea"/>
-              </a:rPr>
-              <a:t>호출 근거 정합성 검증</a:t>
-            </a:r>
-            <a:endParaRPr dirty="0">
-              <a:latin typeface="+mn-ea"/>
-            </a:endParaRPr>
-          </a:p>
-        </p:txBody>
-      </p:sp>
-      <p:sp>
-        <p:nvSpPr>
-          <p:cNvPr id="12" name="Rectangle 9">
-            <a:extLst>
-              <a:ext uri="{FF2B5EF4-FFF2-40B4-BE49-F238E27FC236}">
-                <a16:creationId xmlns:a16="http://schemas.microsoft.com/office/drawing/2014/main" id="{49F51361-9ED6-8769-1DF8-AB5B0CB33B1C}"/>
-              </a:ext>
-            </a:extLst>
-          </p:cNvPr>
-          <p:cNvSpPr/>
-          <p:nvPr/>
-        </p:nvSpPr>
-        <p:spPr>
-          <a:xfrm>
-            <a:off x="6640558" y="3497264"/>
-            <a:ext cx="1425244" cy="566928"/>
-          </a:xfrm>
-          <a:prstGeom prst="rect">
-            <a:avLst/>
-          </a:prstGeom>
-          <a:solidFill>
-            <a:srgbClr val="438DD5"/>
-          </a:solidFill>
-          <a:ln w="12700">
-            <a:solidFill>
-              <a:srgbClr val="438DD5"/>
-            </a:solidFill>
-          </a:ln>
-          <a:effectLst/>
-        </p:spPr>
-        <p:style>
-          <a:lnRef idx="1">
-            <a:schemeClr val="accent1"/>
-          </a:lnRef>
-          <a:fillRef idx="3">
-            <a:schemeClr val="accent1"/>
-          </a:fillRef>
-          <a:effectRef idx="2">
-            <a:schemeClr val="accent1"/>
-          </a:effectRef>
-          <a:fontRef idx="minor">
-            <a:schemeClr val="lt1"/>
-          </a:fontRef>
-        </p:style>
-        <p:txBody>
-          <a:bodyPr wrap="square" lIns="45720" tIns="18288" rIns="45720" bIns="18288" rtlCol="0" anchor="ctr"/>
-          <a:lstStyle/>
-          <a:p>
-            <a:pPr algn="ctr">
-              <a:defRPr sz="750" b="1">
-                <a:solidFill>
-                  <a:srgbClr val="FFFFFF"/>
-                </a:solidFill>
-              </a:defRPr>
-            </a:pPr>
-            <a:r>
-              <a:rPr lang="en-US" dirty="0">
-                <a:latin typeface="+mn-ea"/>
-              </a:rPr>
-              <a:t>Context Assembler</a:t>
-            </a:r>
-            <a:endParaRPr dirty="0">
-              <a:latin typeface="+mn-ea"/>
-            </a:endParaRPr>
-          </a:p>
-          <a:p>
-            <a:pPr algn="ctr">
-              <a:defRPr sz="750" b="0">
-                <a:solidFill>
-                  <a:srgbClr val="FFFFFF"/>
-                </a:solidFill>
-              </a:defRPr>
-            </a:pPr>
-            <a:r>
-              <a:rPr lang="ko-KR" altLang="en-US" dirty="0">
-                <a:latin typeface="+mn-ea"/>
-              </a:rPr>
-              <a:t>하이브리드 컨텍스트 조립</a:t>
-            </a:r>
-            <a:endParaRPr dirty="0">
-              <a:latin typeface="+mn-ea"/>
-            </a:endParaRPr>
-          </a:p>
-          <a:p>
-            <a:pPr algn="ctr">
-              <a:defRPr sz="750" b="0">
-                <a:solidFill>
-                  <a:srgbClr val="FFFFFF"/>
-                </a:solidFill>
-              </a:defRPr>
-            </a:pPr>
-            <a:r>
-              <a:rPr lang="ko-KR" altLang="en-US" dirty="0">
-                <a:latin typeface="+mn-ea"/>
-              </a:rPr>
-              <a:t>근거 후보 수집</a:t>
-            </a:r>
-            <a:endParaRPr dirty="0">
-              <a:latin typeface="+mn-ea"/>
-            </a:endParaRPr>
-          </a:p>
-        </p:txBody>
-      </p:sp>
-      <p:sp>
-        <p:nvSpPr>
-          <p:cNvPr id="13" name="Rectangle 9">
-            <a:extLst>
-              <a:ext uri="{FF2B5EF4-FFF2-40B4-BE49-F238E27FC236}">
-                <a16:creationId xmlns:a16="http://schemas.microsoft.com/office/drawing/2014/main" id="{051CDEC0-3EDE-B8BA-D0C1-A56DA388812B}"/>
-              </a:ext>
-            </a:extLst>
-          </p:cNvPr>
-          <p:cNvSpPr/>
-          <p:nvPr/>
-        </p:nvSpPr>
-        <p:spPr>
-          <a:xfrm>
-            <a:off x="4790740" y="3485246"/>
-            <a:ext cx="1425244" cy="566928"/>
-          </a:xfrm>
-          <a:prstGeom prst="rect">
-            <a:avLst/>
-          </a:prstGeom>
-          <a:solidFill>
-            <a:srgbClr val="438DD5"/>
-          </a:solidFill>
-          <a:ln w="12700">
-            <a:solidFill>
-              <a:srgbClr val="438DD5"/>
-            </a:solidFill>
-          </a:ln>
-          <a:effectLst/>
-        </p:spPr>
-        <p:style>
-          <a:lnRef idx="1">
-            <a:schemeClr val="accent1"/>
-          </a:lnRef>
-          <a:fillRef idx="3">
-            <a:schemeClr val="accent1"/>
-          </a:fillRef>
-          <a:effectRef idx="2">
-            <a:schemeClr val="accent1"/>
-          </a:effectRef>
-          <a:fontRef idx="minor">
-            <a:schemeClr val="lt1"/>
-          </a:fontRef>
-        </p:style>
-        <p:txBody>
-          <a:bodyPr wrap="square" lIns="45720" tIns="18288" rIns="45720" bIns="18288" rtlCol="0" anchor="ctr"/>
-          <a:lstStyle/>
-          <a:p>
-            <a:pPr algn="ctr">
-              <a:defRPr sz="750" b="1">
-                <a:solidFill>
-                  <a:srgbClr val="FFFFFF"/>
-                </a:solidFill>
-              </a:defRPr>
-            </a:pPr>
-            <a:r>
-              <a:rPr lang="en-US" dirty="0">
-                <a:latin typeface="+mn-ea"/>
-              </a:rPr>
-              <a:t>Response Renderer</a:t>
-            </a:r>
-            <a:endParaRPr dirty="0">
-              <a:latin typeface="+mn-ea"/>
-            </a:endParaRPr>
-          </a:p>
-          <a:p>
-            <a:pPr algn="ctr">
-              <a:defRPr sz="750" b="0">
-                <a:solidFill>
-                  <a:srgbClr val="FFFFFF"/>
-                </a:solidFill>
-              </a:defRPr>
-            </a:pPr>
-            <a:r>
-              <a:rPr lang="ko-KR" altLang="en-US" dirty="0">
-                <a:latin typeface="+mn-ea"/>
-              </a:rPr>
-              <a:t>응답 포맷 변환</a:t>
-            </a:r>
-            <a:r>
-              <a:rPr lang="en-US" altLang="ko-KR" dirty="0">
-                <a:latin typeface="+mn-ea"/>
-              </a:rPr>
-              <a:t>,</a:t>
-            </a:r>
-            <a:r>
-              <a:rPr lang="ko-KR" altLang="en-US" dirty="0">
-                <a:latin typeface="+mn-ea"/>
-              </a:rPr>
-              <a:t> 근거 링크 부착</a:t>
-            </a:r>
-            <a:endParaRPr dirty="0">
-              <a:latin typeface="+mn-ea"/>
-            </a:endParaRPr>
-          </a:p>
-          <a:p>
-            <a:pPr algn="ctr">
-              <a:defRPr sz="750" b="0">
-                <a:solidFill>
-                  <a:srgbClr val="FFFFFF"/>
-                </a:solidFill>
-              </a:defRPr>
-            </a:pPr>
-            <a:r>
-              <a:rPr lang="ko-KR" altLang="en-US" dirty="0">
-                <a:latin typeface="+mn-ea"/>
-              </a:rPr>
-              <a:t>평가 수집</a:t>
-            </a:r>
-            <a:r>
-              <a:rPr lang="en-US" altLang="ko-KR" dirty="0">
-                <a:latin typeface="+mn-ea"/>
-              </a:rPr>
-              <a:t>,</a:t>
-            </a:r>
-            <a:r>
-              <a:rPr lang="ko-KR" altLang="en-US" dirty="0">
-                <a:latin typeface="+mn-ea"/>
-              </a:rPr>
-              <a:t> 자산 적재</a:t>
-            </a:r>
-            <a:endParaRPr dirty="0">
-              <a:latin typeface="+mn-ea"/>
-            </a:endParaRPr>
-          </a:p>
-        </p:txBody>
-      </p:sp>
-      <p:grpSp>
-        <p:nvGrpSpPr>
-          <p:cNvPr id="14" name="그룹 13">
-            <a:extLst>
-              <a:ext uri="{FF2B5EF4-FFF2-40B4-BE49-F238E27FC236}">
-                <a16:creationId xmlns:a16="http://schemas.microsoft.com/office/drawing/2014/main" id="{BF3E74BF-5BAC-1E82-824D-2D33A6720B05}"/>
-              </a:ext>
-            </a:extLst>
-          </p:cNvPr>
-          <p:cNvGrpSpPr/>
-          <p:nvPr/>
-        </p:nvGrpSpPr>
-        <p:grpSpPr>
-          <a:xfrm>
-            <a:off x="9284958" y="4288569"/>
-            <a:ext cx="1783080" cy="1005840"/>
-            <a:chOff x="4237345" y="4954856"/>
-            <a:chExt cx="1783080" cy="1005840"/>
-          </a:xfrm>
-        </p:grpSpPr>
-        <p:sp>
-          <p:nvSpPr>
-            <p:cNvPr id="15" name="Rectangle 7">
-              <a:extLst>
-                <a:ext uri="{FF2B5EF4-FFF2-40B4-BE49-F238E27FC236}">
-                  <a16:creationId xmlns:a16="http://schemas.microsoft.com/office/drawing/2014/main" id="{17F203C3-9C9C-74F3-5F52-1815819BD4D8}"/>
-                </a:ext>
-              </a:extLst>
-            </p:cNvPr>
-            <p:cNvSpPr/>
-            <p:nvPr/>
-          </p:nvSpPr>
-          <p:spPr>
-            <a:xfrm>
-              <a:off x="4237345" y="4954856"/>
-              <a:ext cx="1783080" cy="1005840"/>
-            </a:xfrm>
-            <a:prstGeom prst="rect">
-              <a:avLst/>
-            </a:prstGeom>
-            <a:solidFill>
-              <a:srgbClr val="FFFFFF"/>
-            </a:solidFill>
-            <a:ln w="12700">
-              <a:solidFill>
-                <a:srgbClr val="6B4C9A"/>
-              </a:solidFill>
-            </a:ln>
-            <a:effectLst/>
-          </p:spPr>
-          <p:style>
-            <a:lnRef idx="1">
-              <a:schemeClr val="accent1"/>
-            </a:lnRef>
-            <a:fillRef idx="3">
-              <a:schemeClr val="accent1"/>
-            </a:fillRef>
-            <a:effectRef idx="2">
-              <a:schemeClr val="accent1"/>
-            </a:effectRef>
-            <a:fontRef idx="minor">
-              <a:schemeClr val="lt1"/>
-            </a:fontRef>
-          </p:style>
-          <p:txBody>
-            <a:bodyPr tIns="27432" rtlCol="0" anchor="t"/>
-            <a:lstStyle/>
-            <a:p>
-              <a:pPr algn="ctr">
-                <a:defRPr sz="900" b="1">
-                  <a:solidFill>
-                    <a:srgbClr val="2D2D2D"/>
-                  </a:solidFill>
-                </a:defRPr>
-              </a:pPr>
-              <a:r>
-                <a:rPr>
-                  <a:latin typeface="+mn-ea"/>
-                </a:rPr>
-                <a:t>External</a:t>
-              </a:r>
-            </a:p>
-          </p:txBody>
-        </p:sp>
-        <p:sp>
-          <p:nvSpPr>
-            <p:cNvPr id="16" name="Rectangle 21">
-              <a:extLst>
-                <a:ext uri="{FF2B5EF4-FFF2-40B4-BE49-F238E27FC236}">
-                  <a16:creationId xmlns:a16="http://schemas.microsoft.com/office/drawing/2014/main" id="{06A95DFA-28A9-13BD-A5F2-775529D7BF8F}"/>
-                </a:ext>
-              </a:extLst>
-            </p:cNvPr>
-            <p:cNvSpPr/>
-            <p:nvPr/>
-          </p:nvSpPr>
-          <p:spPr>
-            <a:xfrm>
-              <a:off x="4575673" y="5302328"/>
-              <a:ext cx="1097280" cy="530352"/>
-            </a:xfrm>
-            <a:prstGeom prst="rect">
-              <a:avLst/>
-            </a:prstGeom>
-            <a:solidFill>
-              <a:srgbClr val="6B4C9A"/>
-            </a:solidFill>
-            <a:ln w="12700">
-              <a:solidFill>
-                <a:srgbClr val="6B4C9A"/>
-              </a:solidFill>
-            </a:ln>
-            <a:effectLst/>
-          </p:spPr>
-          <p:style>
-            <a:lnRef idx="1">
-              <a:schemeClr val="accent1"/>
-            </a:lnRef>
-            <a:fillRef idx="3">
-              <a:schemeClr val="accent1"/>
-            </a:fillRef>
-            <a:effectRef idx="2">
-              <a:schemeClr val="accent1"/>
-            </a:effectRef>
-            <a:fontRef idx="minor">
-              <a:schemeClr val="lt1"/>
-            </a:fontRef>
-          </p:style>
-          <p:txBody>
-            <a:bodyPr wrap="square" lIns="45720" tIns="18288" rIns="45720" bIns="18288" rtlCol="0" anchor="ctr"/>
-            <a:lstStyle/>
-            <a:p>
-              <a:pPr algn="ctr">
-                <a:defRPr sz="710" b="1">
-                  <a:solidFill>
-                    <a:srgbClr val="FFFFFF"/>
-                  </a:solidFill>
-                </a:defRPr>
-              </a:pPr>
-              <a:r>
-                <a:rPr dirty="0">
-                  <a:latin typeface="+mn-ea"/>
-                </a:rPr>
-                <a:t>LLM</a:t>
-              </a:r>
-            </a:p>
-            <a:p>
-              <a:pPr algn="ctr">
-                <a:defRPr sz="710" b="0">
-                  <a:solidFill>
-                    <a:srgbClr val="FFFFFF"/>
-                  </a:solidFill>
-                </a:defRPr>
-              </a:pPr>
-              <a:r>
-                <a:rPr dirty="0" err="1">
-                  <a:latin typeface="+mn-ea"/>
-                </a:rPr>
-                <a:t>외부</a:t>
-              </a:r>
-              <a:r>
-                <a:rPr dirty="0">
-                  <a:latin typeface="+mn-ea"/>
-                </a:rPr>
-                <a:t> </a:t>
-              </a:r>
-              <a:r>
-                <a:rPr dirty="0" err="1">
-                  <a:latin typeface="+mn-ea"/>
-                </a:rPr>
-                <a:t>시스템</a:t>
-              </a:r>
-              <a:endParaRPr dirty="0">
-                <a:latin typeface="+mn-ea"/>
-              </a:endParaRPr>
-            </a:p>
-            <a:p>
-              <a:pPr algn="ctr">
-                <a:defRPr sz="710" b="0">
-                  <a:solidFill>
-                    <a:srgbClr val="FFFFFF"/>
-                  </a:solidFill>
-                </a:defRPr>
-              </a:pPr>
-              <a:r>
-                <a:rPr dirty="0" err="1">
-                  <a:latin typeface="+mn-ea"/>
-                </a:rPr>
-                <a:t>자연어</a:t>
-              </a:r>
-              <a:r>
-                <a:rPr dirty="0">
-                  <a:latin typeface="+mn-ea"/>
-                </a:rPr>
-                <a:t> </a:t>
-              </a:r>
-              <a:r>
-                <a:rPr dirty="0" err="1">
-                  <a:latin typeface="+mn-ea"/>
-                </a:rPr>
-                <a:t>답변</a:t>
-              </a:r>
-              <a:r>
-                <a:rPr dirty="0">
-                  <a:latin typeface="+mn-ea"/>
-                </a:rPr>
-                <a:t> </a:t>
-              </a:r>
-              <a:r>
-                <a:rPr dirty="0" err="1">
-                  <a:latin typeface="+mn-ea"/>
-                </a:rPr>
-                <a:t>합성</a:t>
-              </a:r>
-              <a:endParaRPr dirty="0">
-                <a:latin typeface="+mn-ea"/>
-              </a:endParaRPr>
-            </a:p>
-          </p:txBody>
-        </p:sp>
-      </p:grpSp>
-      <p:sp>
-        <p:nvSpPr>
-          <p:cNvPr id="17" name="Rectangle 6">
-            <a:extLst>
-              <a:ext uri="{FF2B5EF4-FFF2-40B4-BE49-F238E27FC236}">
-                <a16:creationId xmlns:a16="http://schemas.microsoft.com/office/drawing/2014/main" id="{52D31143-1E9E-30B1-A737-E055F2D6E6C6}"/>
-              </a:ext>
-            </a:extLst>
-          </p:cNvPr>
-          <p:cNvSpPr/>
-          <p:nvPr/>
-        </p:nvSpPr>
-        <p:spPr>
-          <a:xfrm>
-            <a:off x="3512324" y="4288569"/>
-            <a:ext cx="5616388" cy="1941331"/>
-          </a:xfrm>
-          <a:prstGeom prst="rect">
-            <a:avLst/>
-          </a:prstGeom>
-          <a:solidFill>
-            <a:srgbClr val="FFFFFF"/>
-          </a:solidFill>
-          <a:ln w="12700">
-            <a:solidFill>
-              <a:srgbClr val="7A9EC8"/>
-            </a:solidFill>
-          </a:ln>
-          <a:effectLst/>
-        </p:spPr>
-        <p:style>
-          <a:lnRef idx="1">
-            <a:schemeClr val="accent1"/>
-          </a:lnRef>
-          <a:fillRef idx="3">
-            <a:schemeClr val="accent1"/>
-          </a:fillRef>
-          <a:effectRef idx="2">
-            <a:schemeClr val="accent1"/>
-          </a:effectRef>
-          <a:fontRef idx="minor">
-            <a:schemeClr val="lt1"/>
-          </a:fontRef>
-        </p:style>
-        <p:txBody>
-          <a:bodyPr tIns="27432" rtlCol="0" anchor="t"/>
-          <a:lstStyle/>
-          <a:p>
-            <a:pPr algn="ctr">
-              <a:defRPr sz="900" b="1">
-                <a:solidFill>
-                  <a:srgbClr val="2D2D2D"/>
-                </a:solidFill>
-              </a:defRPr>
-            </a:pPr>
-            <a:r>
-              <a:rPr>
-                <a:latin typeface="+mn-ea"/>
-              </a:rPr>
-              <a:t>Knowledge Base</a:t>
-            </a:r>
-          </a:p>
-        </p:txBody>
-      </p:sp>
-      <p:sp>
-        <p:nvSpPr>
-          <p:cNvPr id="18" name="Can 18">
-            <a:extLst>
-              <a:ext uri="{FF2B5EF4-FFF2-40B4-BE49-F238E27FC236}">
-                <a16:creationId xmlns:a16="http://schemas.microsoft.com/office/drawing/2014/main" id="{4CC94F05-E488-A1B6-29E2-B24125D98E02}"/>
-              </a:ext>
-            </a:extLst>
-          </p:cNvPr>
-          <p:cNvSpPr/>
-          <p:nvPr/>
-        </p:nvSpPr>
-        <p:spPr>
-          <a:xfrm>
-            <a:off x="7478642" y="5540334"/>
-            <a:ext cx="1417320" cy="530352"/>
-          </a:xfrm>
-          <a:prstGeom prst="can">
-            <a:avLst/>
-          </a:prstGeom>
-          <a:solidFill>
-            <a:srgbClr val="7A9EC8"/>
-          </a:solidFill>
-          <a:ln w="12700">
-            <a:solidFill>
-              <a:srgbClr val="7A9EC8"/>
-            </a:solidFill>
-          </a:ln>
-          <a:effectLst/>
-        </p:spPr>
-        <p:style>
-          <a:lnRef idx="1">
-            <a:schemeClr val="accent1"/>
-          </a:lnRef>
-          <a:fillRef idx="3">
-            <a:schemeClr val="accent1"/>
-          </a:fillRef>
-          <a:effectRef idx="2">
-            <a:schemeClr val="accent1"/>
-          </a:effectRef>
-          <a:fontRef idx="minor">
-            <a:schemeClr val="lt1"/>
-          </a:fontRef>
-        </p:style>
-        <p:txBody>
-          <a:bodyPr wrap="square" lIns="45720" tIns="18288" rIns="45720" bIns="18288" rtlCol="0" anchor="ctr"/>
-          <a:lstStyle/>
-          <a:p>
-            <a:pPr algn="ctr">
-              <a:defRPr sz="800" b="0">
-                <a:solidFill>
-                  <a:srgbClr val="FFFFFF"/>
-                </a:solidFill>
-              </a:defRPr>
-            </a:pPr>
-            <a:r>
-              <a:rPr dirty="0" err="1">
-                <a:latin typeface="+mn-ea"/>
-              </a:rPr>
-              <a:t>구조</a:t>
-            </a:r>
-            <a:r>
-              <a:rPr dirty="0">
-                <a:latin typeface="+mn-ea"/>
-              </a:rPr>
-              <a:t> </a:t>
-            </a:r>
-            <a:r>
-              <a:rPr dirty="0" err="1">
-                <a:latin typeface="+mn-ea"/>
-              </a:rPr>
-              <a:t>지식</a:t>
-            </a:r>
-            <a:r>
-              <a:rPr dirty="0">
-                <a:latin typeface="+mn-ea"/>
-              </a:rPr>
-              <a:t> </a:t>
-            </a:r>
-            <a:r>
-              <a:rPr dirty="0" err="1">
-                <a:latin typeface="+mn-ea"/>
-              </a:rPr>
-              <a:t>그래프</a:t>
-            </a:r>
-            <a:endParaRPr dirty="0">
-              <a:latin typeface="+mn-ea"/>
-            </a:endParaRPr>
-          </a:p>
-          <a:p>
-            <a:pPr algn="ctr">
-              <a:defRPr sz="800" b="0">
-                <a:solidFill>
-                  <a:srgbClr val="FFFFFF"/>
-                </a:solidFill>
-              </a:defRPr>
-            </a:pPr>
-            <a:r>
-              <a:rPr dirty="0" err="1">
-                <a:latin typeface="+mn-ea"/>
-              </a:rPr>
-              <a:t>코드</a:t>
-            </a:r>
-            <a:r>
-              <a:rPr dirty="0">
-                <a:latin typeface="+mn-ea"/>
-              </a:rPr>
-              <a:t> </a:t>
-            </a:r>
-            <a:r>
-              <a:rPr dirty="0" err="1">
-                <a:latin typeface="+mn-ea"/>
-              </a:rPr>
-              <a:t>구조·의존·흐름</a:t>
-            </a:r>
-            <a:endParaRPr dirty="0">
-              <a:latin typeface="+mn-ea"/>
-            </a:endParaRPr>
-          </a:p>
-        </p:txBody>
-      </p:sp>
-      <p:sp>
-        <p:nvSpPr>
-          <p:cNvPr id="19" name="Can 19">
-            <a:extLst>
-              <a:ext uri="{FF2B5EF4-FFF2-40B4-BE49-F238E27FC236}">
-                <a16:creationId xmlns:a16="http://schemas.microsoft.com/office/drawing/2014/main" id="{70B053CB-7D5A-BE5F-7874-0F2D086C332D}"/>
-              </a:ext>
-            </a:extLst>
-          </p:cNvPr>
-          <p:cNvSpPr/>
-          <p:nvPr/>
-        </p:nvSpPr>
-        <p:spPr>
-          <a:xfrm>
-            <a:off x="5607896" y="5540334"/>
-            <a:ext cx="1691640" cy="530352"/>
-          </a:xfrm>
-          <a:prstGeom prst="can">
-            <a:avLst/>
-          </a:prstGeom>
-          <a:solidFill>
-            <a:srgbClr val="7A9EC8"/>
-          </a:solidFill>
-          <a:ln w="12700">
-            <a:solidFill>
-              <a:srgbClr val="7A9EC8"/>
-            </a:solidFill>
-          </a:ln>
-          <a:effectLst/>
-        </p:spPr>
-        <p:style>
-          <a:lnRef idx="1">
-            <a:schemeClr val="accent1"/>
-          </a:lnRef>
-          <a:fillRef idx="3">
-            <a:schemeClr val="accent1"/>
-          </a:fillRef>
-          <a:effectRef idx="2">
-            <a:schemeClr val="accent1"/>
-          </a:effectRef>
-          <a:fontRef idx="minor">
-            <a:schemeClr val="lt1"/>
-          </a:fontRef>
-        </p:style>
-        <p:txBody>
-          <a:bodyPr wrap="square" lIns="45720" tIns="18288" rIns="45720" bIns="18288" rtlCol="0" anchor="ctr"/>
-          <a:lstStyle/>
-          <a:p>
-            <a:pPr algn="ctr">
-              <a:defRPr sz="800" b="0">
-                <a:solidFill>
-                  <a:srgbClr val="FFFFFF"/>
-                </a:solidFill>
-              </a:defRPr>
-            </a:pPr>
-            <a:r>
-              <a:rPr dirty="0" err="1">
-                <a:latin typeface="+mn-ea"/>
-              </a:rPr>
-              <a:t>비즈니스</a:t>
-            </a:r>
-            <a:r>
-              <a:rPr dirty="0">
-                <a:latin typeface="+mn-ea"/>
-              </a:rPr>
-              <a:t> </a:t>
-            </a:r>
-            <a:r>
-              <a:rPr dirty="0" err="1">
-                <a:latin typeface="+mn-ea"/>
-              </a:rPr>
-              <a:t>규칙</a:t>
-            </a:r>
-            <a:r>
-              <a:rPr dirty="0">
-                <a:latin typeface="+mn-ea"/>
-              </a:rPr>
-              <a:t> </a:t>
-            </a:r>
-            <a:r>
-              <a:rPr dirty="0" err="1">
-                <a:latin typeface="+mn-ea"/>
-              </a:rPr>
-              <a:t>카탈로그</a:t>
-            </a:r>
-            <a:endParaRPr dirty="0">
-              <a:latin typeface="+mn-ea"/>
-            </a:endParaRPr>
-          </a:p>
-          <a:p>
-            <a:pPr algn="ctr">
-              <a:defRPr sz="800" b="0">
-                <a:solidFill>
-                  <a:srgbClr val="FFFFFF"/>
-                </a:solidFill>
-              </a:defRPr>
-            </a:pPr>
-            <a:r>
-              <a:rPr dirty="0" err="1">
-                <a:latin typeface="+mn-ea"/>
-              </a:rPr>
-              <a:t>규칙·규칙-코드</a:t>
-            </a:r>
-            <a:r>
-              <a:rPr dirty="0">
-                <a:latin typeface="+mn-ea"/>
-              </a:rPr>
-              <a:t> </a:t>
-            </a:r>
-            <a:r>
-              <a:rPr dirty="0" err="1">
-                <a:latin typeface="+mn-ea"/>
-              </a:rPr>
-              <a:t>링크</a:t>
-            </a:r>
-            <a:endParaRPr dirty="0">
-              <a:latin typeface="+mn-ea"/>
-            </a:endParaRPr>
-          </a:p>
-        </p:txBody>
-      </p:sp>
-      <p:sp>
-        <p:nvSpPr>
-          <p:cNvPr id="20" name="Can 20">
-            <a:extLst>
-              <a:ext uri="{FF2B5EF4-FFF2-40B4-BE49-F238E27FC236}">
-                <a16:creationId xmlns:a16="http://schemas.microsoft.com/office/drawing/2014/main" id="{D5CB02BF-A131-DBA4-5AC8-D5D781B9D2F0}"/>
-              </a:ext>
-            </a:extLst>
-          </p:cNvPr>
-          <p:cNvSpPr/>
-          <p:nvPr/>
-        </p:nvSpPr>
-        <p:spPr>
-          <a:xfrm>
-            <a:off x="3691430" y="5540334"/>
-            <a:ext cx="1737360" cy="530352"/>
-          </a:xfrm>
-          <a:prstGeom prst="can">
-            <a:avLst/>
-          </a:prstGeom>
-          <a:solidFill>
-            <a:srgbClr val="7A9EC8"/>
-          </a:solidFill>
-          <a:ln w="12700">
-            <a:solidFill>
-              <a:srgbClr val="7A9EC8"/>
-            </a:solidFill>
-          </a:ln>
-          <a:effectLst/>
-        </p:spPr>
-        <p:style>
-          <a:lnRef idx="1">
-            <a:schemeClr val="accent1"/>
-          </a:lnRef>
-          <a:fillRef idx="3">
-            <a:schemeClr val="accent1"/>
-          </a:fillRef>
-          <a:effectRef idx="2">
-            <a:schemeClr val="accent1"/>
-          </a:effectRef>
-          <a:fontRef idx="minor">
-            <a:schemeClr val="lt1"/>
-          </a:fontRef>
-        </p:style>
-        <p:txBody>
-          <a:bodyPr wrap="square" lIns="45720" tIns="18288" rIns="45720" bIns="18288" rtlCol="0" anchor="ctr"/>
-          <a:lstStyle/>
-          <a:p>
-            <a:pPr algn="ctr">
-              <a:defRPr sz="800" b="0">
-                <a:solidFill>
-                  <a:srgbClr val="FFFFFF"/>
-                </a:solidFill>
-              </a:defRPr>
-            </a:pPr>
-            <a:r>
-              <a:rPr dirty="0" err="1">
-                <a:latin typeface="+mn-ea"/>
-              </a:rPr>
-              <a:t>답변</a:t>
-            </a:r>
-            <a:r>
-              <a:rPr dirty="0">
-                <a:latin typeface="+mn-ea"/>
-              </a:rPr>
-              <a:t> </a:t>
-            </a:r>
-            <a:r>
-              <a:rPr dirty="0" err="1">
-                <a:latin typeface="+mn-ea"/>
-              </a:rPr>
-              <a:t>지식</a:t>
-            </a:r>
-            <a:r>
-              <a:rPr dirty="0">
-                <a:latin typeface="+mn-ea"/>
-              </a:rPr>
-              <a:t> </a:t>
-            </a:r>
-            <a:r>
-              <a:rPr dirty="0" err="1">
-                <a:latin typeface="+mn-ea"/>
-              </a:rPr>
-              <a:t>베이스</a:t>
-            </a:r>
-            <a:endParaRPr dirty="0">
-              <a:latin typeface="+mn-ea"/>
-            </a:endParaRPr>
-          </a:p>
-          <a:p>
-            <a:pPr algn="ctr">
-              <a:defRPr sz="800" b="0">
-                <a:solidFill>
-                  <a:srgbClr val="FFFFFF"/>
-                </a:solidFill>
-              </a:defRPr>
-            </a:pPr>
-            <a:r>
-              <a:rPr dirty="0" err="1">
-                <a:latin typeface="+mn-ea"/>
-              </a:rPr>
-              <a:t>근거</a:t>
-            </a:r>
-            <a:r>
-              <a:rPr dirty="0">
-                <a:latin typeface="+mn-ea"/>
-              </a:rPr>
-              <a:t> </a:t>
-            </a:r>
-            <a:r>
-              <a:rPr dirty="0" err="1">
-                <a:latin typeface="+mn-ea"/>
-              </a:rPr>
-              <a:t>포함</a:t>
-            </a:r>
-            <a:r>
-              <a:rPr dirty="0">
-                <a:latin typeface="+mn-ea"/>
-              </a:rPr>
-              <a:t> </a:t>
-            </a:r>
-            <a:r>
-              <a:rPr dirty="0" err="1">
-                <a:latin typeface="+mn-ea"/>
-              </a:rPr>
-              <a:t>답변</a:t>
-            </a:r>
-            <a:r>
-              <a:rPr dirty="0">
-                <a:latin typeface="+mn-ea"/>
-              </a:rPr>
-              <a:t> </a:t>
-            </a:r>
-            <a:r>
-              <a:rPr dirty="0" err="1">
-                <a:latin typeface="+mn-ea"/>
-              </a:rPr>
-              <a:t>자산·평가</a:t>
-            </a:r>
-            <a:endParaRPr dirty="0">
-              <a:latin typeface="+mn-ea"/>
-            </a:endParaRPr>
-          </a:p>
-        </p:txBody>
-      </p:sp>
-      <p:sp>
-        <p:nvSpPr>
-          <p:cNvPr id="21" name="Rectangle 9">
-            <a:extLst>
-              <a:ext uri="{FF2B5EF4-FFF2-40B4-BE49-F238E27FC236}">
-                <a16:creationId xmlns:a16="http://schemas.microsoft.com/office/drawing/2014/main" id="{3177ACBA-2202-B63E-0F64-AC7DCB2C035F}"/>
-              </a:ext>
-            </a:extLst>
-          </p:cNvPr>
-          <p:cNvSpPr/>
-          <p:nvPr/>
-        </p:nvSpPr>
-        <p:spPr>
-          <a:xfrm>
-            <a:off x="5607896" y="4548298"/>
-            <a:ext cx="1425244" cy="566928"/>
-          </a:xfrm>
-          <a:prstGeom prst="rect">
-            <a:avLst/>
-          </a:prstGeom>
-          <a:solidFill>
-            <a:srgbClr val="438DD5"/>
-          </a:solidFill>
-          <a:ln w="12700">
-            <a:solidFill>
-              <a:srgbClr val="438DD5"/>
-            </a:solidFill>
-          </a:ln>
-          <a:effectLst/>
-        </p:spPr>
-        <p:style>
-          <a:lnRef idx="1">
-            <a:schemeClr val="accent1"/>
-          </a:lnRef>
-          <a:fillRef idx="3">
-            <a:schemeClr val="accent1"/>
-          </a:fillRef>
-          <a:effectRef idx="2">
-            <a:schemeClr val="accent1"/>
-          </a:effectRef>
-          <a:fontRef idx="minor">
-            <a:schemeClr val="lt1"/>
-          </a:fontRef>
-        </p:style>
-        <p:txBody>
-          <a:bodyPr wrap="square" lIns="45720" tIns="18288" rIns="45720" bIns="18288" rtlCol="0" anchor="ctr"/>
-          <a:lstStyle/>
-          <a:p>
-            <a:pPr algn="ctr">
-              <a:defRPr sz="750" b="1">
-                <a:solidFill>
-                  <a:srgbClr val="FFFFFF"/>
-                </a:solidFill>
-              </a:defRPr>
-            </a:pPr>
-            <a:r>
-              <a:rPr lang="en-US" dirty="0">
-                <a:latin typeface="+mn-ea"/>
-              </a:rPr>
-              <a:t>Knowledge Query Facade</a:t>
-            </a:r>
-            <a:endParaRPr dirty="0">
-              <a:latin typeface="+mn-ea"/>
-            </a:endParaRPr>
-          </a:p>
-          <a:p>
-            <a:pPr algn="ctr">
-              <a:defRPr sz="750" b="0">
-                <a:solidFill>
-                  <a:srgbClr val="FFFFFF"/>
-                </a:solidFill>
-              </a:defRPr>
-            </a:pPr>
-            <a:r>
-              <a:rPr lang="ko-KR" altLang="en-US" dirty="0">
-                <a:latin typeface="+mn-ea"/>
-              </a:rPr>
-              <a:t>하이브리드 질의 단일 </a:t>
-            </a:r>
-            <a:r>
-              <a:rPr lang="ko-KR" altLang="en-US" dirty="0" err="1">
-                <a:latin typeface="+mn-ea"/>
-              </a:rPr>
-              <a:t>진입점</a:t>
-            </a:r>
-            <a:endParaRPr dirty="0">
-              <a:latin typeface="+mn-ea"/>
-            </a:endParaRPr>
-          </a:p>
-          <a:p>
-            <a:pPr algn="ctr">
-              <a:defRPr sz="750" b="0">
-                <a:solidFill>
-                  <a:srgbClr val="FFFFFF"/>
-                </a:solidFill>
-              </a:defRPr>
-            </a:pPr>
-            <a:r>
-              <a:rPr lang="ko-KR" altLang="en-US" dirty="0" err="1">
-                <a:latin typeface="+mn-ea"/>
-              </a:rPr>
-              <a:t>캐싱</a:t>
-            </a:r>
-            <a:r>
-              <a:rPr lang="en-US" altLang="ko-KR" dirty="0">
-                <a:latin typeface="+mn-ea"/>
-              </a:rPr>
-              <a:t>,</a:t>
-            </a:r>
-            <a:r>
-              <a:rPr lang="ko-KR" altLang="en-US" dirty="0">
-                <a:latin typeface="+mn-ea"/>
-              </a:rPr>
-              <a:t> 권한 필터</a:t>
-            </a:r>
-            <a:endParaRPr dirty="0">
-              <a:latin typeface="+mn-ea"/>
-            </a:endParaRPr>
-          </a:p>
-        </p:txBody>
-      </p:sp>
-      <p:sp>
-        <p:nvSpPr>
-          <p:cNvPr id="22" name="Rectangle 9">
-            <a:extLst>
-              <a:ext uri="{FF2B5EF4-FFF2-40B4-BE49-F238E27FC236}">
-                <a16:creationId xmlns:a16="http://schemas.microsoft.com/office/drawing/2014/main" id="{C508CC57-A17C-EA79-D2D9-C9E30E780472}"/>
-              </a:ext>
-            </a:extLst>
-          </p:cNvPr>
-          <p:cNvSpPr/>
-          <p:nvPr/>
-        </p:nvSpPr>
-        <p:spPr>
-          <a:xfrm>
-            <a:off x="1289355" y="3455470"/>
-            <a:ext cx="1507270" cy="566928"/>
-          </a:xfrm>
-          <a:prstGeom prst="rect">
-            <a:avLst/>
-          </a:prstGeom>
-          <a:solidFill>
-            <a:srgbClr val="438DD5"/>
-          </a:solidFill>
-          <a:ln w="12700">
-            <a:solidFill>
-              <a:srgbClr val="438DD5"/>
-            </a:solidFill>
-          </a:ln>
-          <a:effectLst/>
-        </p:spPr>
-        <p:style>
-          <a:lnRef idx="1">
-            <a:schemeClr val="accent1"/>
-          </a:lnRef>
-          <a:fillRef idx="3">
-            <a:schemeClr val="accent1"/>
-          </a:fillRef>
-          <a:effectRef idx="2">
-            <a:schemeClr val="accent1"/>
-          </a:effectRef>
-          <a:fontRef idx="minor">
-            <a:schemeClr val="lt1"/>
-          </a:fontRef>
-        </p:style>
-        <p:txBody>
-          <a:bodyPr wrap="square" lIns="45720" tIns="18288" rIns="45720" bIns="18288" rtlCol="0" anchor="ctr"/>
-          <a:lstStyle/>
-          <a:p>
-            <a:pPr algn="ctr">
-              <a:defRPr sz="750" b="1">
-                <a:solidFill>
-                  <a:srgbClr val="FFFFFF"/>
-                </a:solidFill>
-              </a:defRPr>
-            </a:pPr>
-            <a:r>
-              <a:rPr lang="en-US" dirty="0" err="1">
-                <a:latin typeface="+mn-ea"/>
-              </a:rPr>
-              <a:t>Feddback</a:t>
-            </a:r>
-            <a:r>
-              <a:rPr lang="en-US" dirty="0">
-                <a:latin typeface="+mn-ea"/>
-              </a:rPr>
-              <a:t> Gateway</a:t>
-            </a:r>
-            <a:endParaRPr dirty="0">
-              <a:latin typeface="+mn-ea"/>
-            </a:endParaRPr>
-          </a:p>
-          <a:p>
-            <a:pPr algn="ctr">
-              <a:defRPr sz="750" b="0">
-                <a:solidFill>
-                  <a:srgbClr val="FFFFFF"/>
-                </a:solidFill>
-              </a:defRPr>
-            </a:pPr>
-            <a:r>
-              <a:rPr lang="ko-KR" altLang="en-US" dirty="0">
-                <a:latin typeface="+mn-ea"/>
-              </a:rPr>
-              <a:t>답변 평가 자산화 요청 중계</a:t>
-            </a:r>
-            <a:endParaRPr dirty="0">
-              <a:latin typeface="+mn-ea"/>
-            </a:endParaRPr>
-          </a:p>
-        </p:txBody>
-      </p:sp>
-      <p:cxnSp>
-        <p:nvCxnSpPr>
-          <p:cNvPr id="23" name="직선 화살표 연결선 8">
-            <a:extLst>
-              <a:ext uri="{FF2B5EF4-FFF2-40B4-BE49-F238E27FC236}">
-                <a16:creationId xmlns:a16="http://schemas.microsoft.com/office/drawing/2014/main" id="{D5668B19-0889-9D72-FD72-07C713700748}"/>
-              </a:ext>
-            </a:extLst>
-          </p:cNvPr>
-          <p:cNvCxnSpPr>
-            <a:cxnSpLocks/>
-            <a:stCxn id="13" idx="1"/>
-            <a:endCxn id="20" idx="1"/>
-          </p:cNvCxnSpPr>
-          <p:nvPr/>
-        </p:nvCxnSpPr>
-        <p:spPr>
-          <a:xfrm rot="10800000" flipV="1">
-            <a:off x="4560110" y="3768710"/>
-            <a:ext cx="230630" cy="1771624"/>
-          </a:xfrm>
-          <a:prstGeom prst="curvedConnector2">
-            <a:avLst/>
-          </a:prstGeom>
-          <a:ln w="3175">
-            <a:solidFill>
-              <a:schemeClr val="tx1"/>
-            </a:solidFill>
-            <a:tailEnd type="triangle"/>
-          </a:ln>
-          <a:effectLst/>
-        </p:spPr>
-        <p:style>
-          <a:lnRef idx="2">
-            <a:schemeClr val="accent1"/>
-          </a:lnRef>
-          <a:fillRef idx="0">
-            <a:schemeClr val="accent1"/>
-          </a:fillRef>
-          <a:effectRef idx="1">
-            <a:schemeClr val="accent1"/>
-          </a:effectRef>
-          <a:fontRef idx="minor">
-            <a:schemeClr val="tx1"/>
-          </a:fontRef>
-        </p:style>
-      </p:cxnSp>
-      <p:cxnSp>
-        <p:nvCxnSpPr>
-          <p:cNvPr id="24" name="직선 화살표 연결선 8">
-            <a:extLst>
-              <a:ext uri="{FF2B5EF4-FFF2-40B4-BE49-F238E27FC236}">
-                <a16:creationId xmlns:a16="http://schemas.microsoft.com/office/drawing/2014/main" id="{0057AACE-CED3-F90B-065E-357DA4379B70}"/>
-              </a:ext>
-            </a:extLst>
-          </p:cNvPr>
-          <p:cNvCxnSpPr>
-            <a:cxnSpLocks/>
-            <a:stCxn id="22" idx="2"/>
-            <a:endCxn id="13" idx="1"/>
-          </p:cNvCxnSpPr>
-          <p:nvPr/>
-        </p:nvCxnSpPr>
-        <p:spPr>
-          <a:xfrm rot="5400000" flipH="1" flipV="1">
-            <a:off x="3290021" y="2521679"/>
-            <a:ext cx="253688" cy="2747750"/>
-          </a:xfrm>
-          <a:prstGeom prst="curvedConnector4">
-            <a:avLst>
-              <a:gd name="adj1" fmla="val -90111"/>
-              <a:gd name="adj2" fmla="val 88479"/>
-            </a:avLst>
-          </a:prstGeom>
-          <a:ln w="3175">
-            <a:solidFill>
-              <a:schemeClr val="tx1"/>
-            </a:solidFill>
-            <a:tailEnd type="triangle"/>
-          </a:ln>
-          <a:effectLst/>
-        </p:spPr>
-        <p:style>
-          <a:lnRef idx="2">
-            <a:schemeClr val="accent1"/>
-          </a:lnRef>
-          <a:fillRef idx="0">
-            <a:schemeClr val="accent1"/>
-          </a:fillRef>
-          <a:effectRef idx="1">
-            <a:schemeClr val="accent1"/>
-          </a:effectRef>
-          <a:fontRef idx="minor">
-            <a:schemeClr val="tx1"/>
-          </a:fontRef>
-        </p:style>
-      </p:cxnSp>
-      <p:cxnSp>
-        <p:nvCxnSpPr>
-          <p:cNvPr id="25" name="직선 화살표 연결선 8">
-            <a:extLst>
-              <a:ext uri="{FF2B5EF4-FFF2-40B4-BE49-F238E27FC236}">
-                <a16:creationId xmlns:a16="http://schemas.microsoft.com/office/drawing/2014/main" id="{391C1A95-6FA2-8E35-9665-D6AE1DF61B29}"/>
-              </a:ext>
-            </a:extLst>
-          </p:cNvPr>
-          <p:cNvCxnSpPr>
-            <a:cxnSpLocks/>
-            <a:stCxn id="3" idx="1"/>
-            <a:endCxn id="4" idx="1"/>
-          </p:cNvCxnSpPr>
-          <p:nvPr/>
-        </p:nvCxnSpPr>
-        <p:spPr>
-          <a:xfrm rot="10800000" flipV="1">
-            <a:off x="2115011" y="1449065"/>
-            <a:ext cx="12700" cy="1400963"/>
-          </a:xfrm>
-          <a:prstGeom prst="curvedConnector3">
-            <a:avLst>
-              <a:gd name="adj1" fmla="val 1800000"/>
-            </a:avLst>
-          </a:prstGeom>
-          <a:ln w="3175">
-            <a:solidFill>
-              <a:schemeClr val="tx1"/>
-            </a:solidFill>
-            <a:tailEnd type="triangle"/>
-          </a:ln>
-          <a:effectLst/>
-        </p:spPr>
-        <p:style>
-          <a:lnRef idx="2">
-            <a:schemeClr val="accent1"/>
-          </a:lnRef>
-          <a:fillRef idx="0">
-            <a:schemeClr val="accent1"/>
-          </a:fillRef>
-          <a:effectRef idx="1">
-            <a:schemeClr val="accent1"/>
-          </a:effectRef>
-          <a:fontRef idx="minor">
-            <a:schemeClr val="tx1"/>
-          </a:fontRef>
-        </p:style>
-      </p:cxnSp>
-      <p:cxnSp>
-        <p:nvCxnSpPr>
-          <p:cNvPr id="26" name="직선 화살표 연결선 8">
-            <a:extLst>
-              <a:ext uri="{FF2B5EF4-FFF2-40B4-BE49-F238E27FC236}">
-                <a16:creationId xmlns:a16="http://schemas.microsoft.com/office/drawing/2014/main" id="{3A2E837C-8483-958D-AAED-D752156D34A5}"/>
-              </a:ext>
-            </a:extLst>
-          </p:cNvPr>
-          <p:cNvCxnSpPr>
-            <a:cxnSpLocks/>
-            <a:stCxn id="4" idx="0"/>
-            <a:endCxn id="3" idx="3"/>
-          </p:cNvCxnSpPr>
-          <p:nvPr/>
-        </p:nvCxnSpPr>
-        <p:spPr>
-          <a:xfrm rot="5400000" flipH="1" flipV="1">
-            <a:off x="2510806" y="1636481"/>
-            <a:ext cx="1117499" cy="742671"/>
-          </a:xfrm>
-          <a:prstGeom prst="curvedConnector4">
-            <a:avLst>
-              <a:gd name="adj1" fmla="val 22728"/>
-              <a:gd name="adj2" fmla="val 130781"/>
-            </a:avLst>
-          </a:prstGeom>
-          <a:ln w="3175">
-            <a:solidFill>
-              <a:schemeClr val="tx1"/>
-            </a:solidFill>
-            <a:tailEnd type="triangle"/>
-          </a:ln>
-          <a:effectLst/>
-        </p:spPr>
-        <p:style>
-          <a:lnRef idx="2">
-            <a:schemeClr val="accent1"/>
-          </a:lnRef>
-          <a:fillRef idx="0">
-            <a:schemeClr val="accent1"/>
-          </a:fillRef>
-          <a:effectRef idx="1">
-            <a:schemeClr val="accent1"/>
-          </a:effectRef>
-          <a:fontRef idx="minor">
-            <a:schemeClr val="tx1"/>
-          </a:fontRef>
-        </p:style>
-      </p:cxnSp>
-      <p:cxnSp>
-        <p:nvCxnSpPr>
-          <p:cNvPr id="27" name="직선 화살표 연결선 8">
-            <a:extLst>
-              <a:ext uri="{FF2B5EF4-FFF2-40B4-BE49-F238E27FC236}">
-                <a16:creationId xmlns:a16="http://schemas.microsoft.com/office/drawing/2014/main" id="{E3FB966C-9B24-9321-6AAC-5E6301AB33C9}"/>
-              </a:ext>
-            </a:extLst>
-          </p:cNvPr>
-          <p:cNvCxnSpPr>
-            <a:cxnSpLocks/>
-            <a:stCxn id="3" idx="1"/>
-            <a:endCxn id="22" idx="1"/>
-          </p:cNvCxnSpPr>
-          <p:nvPr/>
-        </p:nvCxnSpPr>
-        <p:spPr>
-          <a:xfrm rot="10800000" flipV="1">
-            <a:off x="1289355" y="1449066"/>
-            <a:ext cx="825656" cy="2289868"/>
-          </a:xfrm>
-          <a:prstGeom prst="curvedConnector3">
-            <a:avLst>
-              <a:gd name="adj1" fmla="val 127687"/>
-            </a:avLst>
-          </a:prstGeom>
-          <a:ln w="3175">
-            <a:solidFill>
-              <a:schemeClr val="tx1"/>
-            </a:solidFill>
-            <a:tailEnd type="triangle"/>
-          </a:ln>
-          <a:effectLst/>
-        </p:spPr>
-        <p:style>
-          <a:lnRef idx="2">
-            <a:schemeClr val="accent1"/>
-          </a:lnRef>
-          <a:fillRef idx="0">
-            <a:schemeClr val="accent1"/>
-          </a:fillRef>
-          <a:effectRef idx="1">
-            <a:schemeClr val="accent1"/>
-          </a:effectRef>
-          <a:fontRef idx="minor">
-            <a:schemeClr val="tx1"/>
-          </a:fontRef>
-        </p:style>
-      </p:cxnSp>
-      <p:cxnSp>
-        <p:nvCxnSpPr>
-          <p:cNvPr id="28" name="직선 화살표 연결선 8">
-            <a:extLst>
-              <a:ext uri="{FF2B5EF4-FFF2-40B4-BE49-F238E27FC236}">
-                <a16:creationId xmlns:a16="http://schemas.microsoft.com/office/drawing/2014/main" id="{BCC49FF2-3500-00B4-40EA-F6637F6D03E8}"/>
-              </a:ext>
-            </a:extLst>
-          </p:cNvPr>
-          <p:cNvCxnSpPr>
-            <a:cxnSpLocks/>
-          </p:cNvCxnSpPr>
-          <p:nvPr/>
-        </p:nvCxnSpPr>
-        <p:spPr>
-          <a:xfrm flipV="1">
-            <a:off x="3281428" y="1618739"/>
-            <a:ext cx="3458601" cy="1096108"/>
-          </a:xfrm>
-          <a:prstGeom prst="curvedConnector3">
-            <a:avLst>
-              <a:gd name="adj1" fmla="val 50000"/>
-            </a:avLst>
-          </a:prstGeom>
-          <a:ln w="3175">
-            <a:solidFill>
-              <a:schemeClr val="tx1"/>
-            </a:solidFill>
-            <a:tailEnd type="triangle"/>
-          </a:ln>
-          <a:effectLst/>
-        </p:spPr>
-        <p:style>
-          <a:lnRef idx="2">
-            <a:schemeClr val="accent1"/>
-          </a:lnRef>
-          <a:fillRef idx="0">
-            <a:schemeClr val="accent1"/>
-          </a:fillRef>
-          <a:effectRef idx="1">
-            <a:schemeClr val="accent1"/>
-          </a:effectRef>
-          <a:fontRef idx="minor">
-            <a:schemeClr val="tx1"/>
-          </a:fontRef>
-        </p:style>
-      </p:cxnSp>
-      <p:cxnSp>
-        <p:nvCxnSpPr>
-          <p:cNvPr id="29" name="직선 화살표 연결선 8">
-            <a:extLst>
-              <a:ext uri="{FF2B5EF4-FFF2-40B4-BE49-F238E27FC236}">
-                <a16:creationId xmlns:a16="http://schemas.microsoft.com/office/drawing/2014/main" id="{3B933C4E-91C1-95A2-FE9E-3EB876653358}"/>
-              </a:ext>
-            </a:extLst>
-          </p:cNvPr>
-          <p:cNvCxnSpPr>
-            <a:cxnSpLocks/>
-            <a:stCxn id="9" idx="1"/>
-            <a:endCxn id="4" idx="3"/>
-          </p:cNvCxnSpPr>
-          <p:nvPr/>
-        </p:nvCxnSpPr>
-        <p:spPr>
-          <a:xfrm rot="10800000" flipV="1">
-            <a:off x="3281429" y="1753803"/>
-            <a:ext cx="3458601" cy="1096225"/>
-          </a:xfrm>
-          <a:prstGeom prst="curvedConnector3">
-            <a:avLst>
-              <a:gd name="adj1" fmla="val 50000"/>
-            </a:avLst>
-          </a:prstGeom>
-          <a:ln w="3175">
-            <a:solidFill>
-              <a:schemeClr val="tx1"/>
-            </a:solidFill>
-            <a:tailEnd type="triangle"/>
-          </a:ln>
-          <a:effectLst/>
-        </p:spPr>
-        <p:style>
-          <a:lnRef idx="2">
-            <a:schemeClr val="accent1"/>
-          </a:lnRef>
-          <a:fillRef idx="0">
-            <a:schemeClr val="accent1"/>
-          </a:fillRef>
-          <a:effectRef idx="1">
-            <a:schemeClr val="accent1"/>
-          </a:effectRef>
-          <a:fontRef idx="minor">
-            <a:schemeClr val="tx1"/>
-          </a:fontRef>
-        </p:style>
-      </p:cxnSp>
-      <p:cxnSp>
-        <p:nvCxnSpPr>
-          <p:cNvPr id="30" name="직선 화살표 연결선 8">
-            <a:extLst>
-              <a:ext uri="{FF2B5EF4-FFF2-40B4-BE49-F238E27FC236}">
-                <a16:creationId xmlns:a16="http://schemas.microsoft.com/office/drawing/2014/main" id="{5358E4B4-5260-7C0A-D754-9B3066E097FA}"/>
-              </a:ext>
-            </a:extLst>
-          </p:cNvPr>
-          <p:cNvCxnSpPr>
-            <a:cxnSpLocks/>
-            <a:stCxn id="9" idx="3"/>
-            <a:endCxn id="10" idx="0"/>
-          </p:cNvCxnSpPr>
-          <p:nvPr/>
-        </p:nvCxnSpPr>
-        <p:spPr>
-          <a:xfrm>
-            <a:off x="7906446" y="1753804"/>
-            <a:ext cx="1147650" cy="210705"/>
-          </a:xfrm>
-          <a:prstGeom prst="curvedConnector2">
-            <a:avLst/>
-          </a:prstGeom>
-          <a:ln w="3175">
-            <a:solidFill>
-              <a:schemeClr val="tx1"/>
-            </a:solidFill>
-            <a:tailEnd type="triangle"/>
-          </a:ln>
-          <a:effectLst/>
-        </p:spPr>
-        <p:style>
-          <a:lnRef idx="2">
-            <a:schemeClr val="accent1"/>
-          </a:lnRef>
-          <a:fillRef idx="0">
-            <a:schemeClr val="accent1"/>
-          </a:fillRef>
-          <a:effectRef idx="1">
-            <a:schemeClr val="accent1"/>
-          </a:effectRef>
-          <a:fontRef idx="minor">
-            <a:schemeClr val="tx1"/>
-          </a:fontRef>
-        </p:style>
-      </p:cxnSp>
-      <p:cxnSp>
-        <p:nvCxnSpPr>
-          <p:cNvPr id="31" name="직선 화살표 연결선 8">
-            <a:extLst>
-              <a:ext uri="{FF2B5EF4-FFF2-40B4-BE49-F238E27FC236}">
-                <a16:creationId xmlns:a16="http://schemas.microsoft.com/office/drawing/2014/main" id="{5E1ED93F-1730-9743-75F5-292759CC18D0}"/>
-              </a:ext>
-            </a:extLst>
-          </p:cNvPr>
-          <p:cNvCxnSpPr>
-            <a:cxnSpLocks/>
-            <a:stCxn id="10" idx="2"/>
-            <a:endCxn id="11" idx="0"/>
-          </p:cNvCxnSpPr>
-          <p:nvPr/>
-        </p:nvCxnSpPr>
-        <p:spPr>
-          <a:xfrm rot="5400000">
-            <a:off x="8874243" y="2711290"/>
-            <a:ext cx="359706" cy="12700"/>
-          </a:xfrm>
-          <a:prstGeom prst="curvedConnector3">
-            <a:avLst>
-              <a:gd name="adj1" fmla="val 50000"/>
-            </a:avLst>
-          </a:prstGeom>
-          <a:ln w="3175">
-            <a:solidFill>
-              <a:schemeClr val="tx1"/>
-            </a:solidFill>
-            <a:tailEnd type="triangle"/>
-          </a:ln>
-          <a:effectLst/>
-        </p:spPr>
-        <p:style>
-          <a:lnRef idx="2">
-            <a:schemeClr val="accent1"/>
-          </a:lnRef>
-          <a:fillRef idx="0">
-            <a:schemeClr val="accent1"/>
-          </a:fillRef>
-          <a:effectRef idx="1">
-            <a:schemeClr val="accent1"/>
-          </a:effectRef>
-          <a:fontRef idx="minor">
-            <a:schemeClr val="tx1"/>
-          </a:fontRef>
-        </p:style>
-      </p:cxnSp>
-      <p:cxnSp>
-        <p:nvCxnSpPr>
-          <p:cNvPr id="32" name="직선 화살표 연결선 8">
-            <a:extLst>
-              <a:ext uri="{FF2B5EF4-FFF2-40B4-BE49-F238E27FC236}">
-                <a16:creationId xmlns:a16="http://schemas.microsoft.com/office/drawing/2014/main" id="{73740EB1-B6F5-F825-F9FD-1B0D35B8915E}"/>
-              </a:ext>
-            </a:extLst>
-          </p:cNvPr>
-          <p:cNvCxnSpPr>
-            <a:cxnSpLocks/>
-            <a:stCxn id="11" idx="3"/>
-            <a:endCxn id="16" idx="3"/>
-          </p:cNvCxnSpPr>
-          <p:nvPr/>
-        </p:nvCxnSpPr>
-        <p:spPr>
-          <a:xfrm>
-            <a:off x="9766718" y="3174607"/>
-            <a:ext cx="953848" cy="1726610"/>
-          </a:xfrm>
-          <a:prstGeom prst="curvedConnector3">
-            <a:avLst>
-              <a:gd name="adj1" fmla="val 123966"/>
-            </a:avLst>
-          </a:prstGeom>
-          <a:ln w="3175">
-            <a:solidFill>
-              <a:schemeClr val="tx1"/>
-            </a:solidFill>
-            <a:tailEnd type="triangle"/>
-          </a:ln>
-          <a:effectLst/>
-        </p:spPr>
-        <p:style>
-          <a:lnRef idx="2">
-            <a:schemeClr val="accent1"/>
-          </a:lnRef>
-          <a:fillRef idx="0">
-            <a:schemeClr val="accent1"/>
-          </a:fillRef>
-          <a:effectRef idx="1">
-            <a:schemeClr val="accent1"/>
-          </a:effectRef>
-          <a:fontRef idx="minor">
-            <a:schemeClr val="tx1"/>
-          </a:fontRef>
-        </p:style>
-      </p:cxnSp>
-      <p:cxnSp>
-        <p:nvCxnSpPr>
-          <p:cNvPr id="33" name="직선 화살표 연결선 8">
-            <a:extLst>
-              <a:ext uri="{FF2B5EF4-FFF2-40B4-BE49-F238E27FC236}">
-                <a16:creationId xmlns:a16="http://schemas.microsoft.com/office/drawing/2014/main" id="{17AC8C0D-E62C-7992-8E03-A459776E8AA8}"/>
-              </a:ext>
-            </a:extLst>
-          </p:cNvPr>
-          <p:cNvCxnSpPr>
-            <a:cxnSpLocks/>
-            <a:stCxn id="16" idx="1"/>
-            <a:endCxn id="11" idx="2"/>
-          </p:cNvCxnSpPr>
-          <p:nvPr/>
-        </p:nvCxnSpPr>
-        <p:spPr>
-          <a:xfrm rot="10800000">
-            <a:off x="9054096" y="3458071"/>
-            <a:ext cx="569190" cy="1443146"/>
-          </a:xfrm>
-          <a:prstGeom prst="curvedConnector2">
-            <a:avLst/>
-          </a:prstGeom>
-          <a:ln w="3175">
-            <a:solidFill>
-              <a:schemeClr val="tx1"/>
-            </a:solidFill>
-            <a:tailEnd type="triangle"/>
-          </a:ln>
-          <a:effectLst/>
-        </p:spPr>
-        <p:style>
-          <a:lnRef idx="2">
-            <a:schemeClr val="accent1"/>
-          </a:lnRef>
-          <a:fillRef idx="0">
-            <a:schemeClr val="accent1"/>
-          </a:fillRef>
-          <a:effectRef idx="1">
-            <a:schemeClr val="accent1"/>
-          </a:effectRef>
-          <a:fontRef idx="minor">
-            <a:schemeClr val="tx1"/>
-          </a:fontRef>
-        </p:style>
-      </p:cxnSp>
-      <p:cxnSp>
-        <p:nvCxnSpPr>
-          <p:cNvPr id="34" name="직선 화살표 연결선 8">
-            <a:extLst>
-              <a:ext uri="{FF2B5EF4-FFF2-40B4-BE49-F238E27FC236}">
-                <a16:creationId xmlns:a16="http://schemas.microsoft.com/office/drawing/2014/main" id="{3200DEEA-596B-BBF8-8F0D-7294FCD5A2AE}"/>
-              </a:ext>
-            </a:extLst>
-          </p:cNvPr>
-          <p:cNvCxnSpPr>
-            <a:cxnSpLocks/>
-            <a:stCxn id="11" idx="1"/>
-            <a:endCxn id="12" idx="0"/>
-          </p:cNvCxnSpPr>
-          <p:nvPr/>
-        </p:nvCxnSpPr>
-        <p:spPr>
-          <a:xfrm rot="10800000" flipV="1">
-            <a:off x="7353180" y="3174606"/>
-            <a:ext cx="988294" cy="322657"/>
-          </a:xfrm>
-          <a:prstGeom prst="curvedConnector2">
-            <a:avLst/>
-          </a:prstGeom>
-          <a:ln w="3175">
-            <a:solidFill>
-              <a:schemeClr val="tx1"/>
-            </a:solidFill>
-            <a:tailEnd type="triangle"/>
-          </a:ln>
-          <a:effectLst/>
-        </p:spPr>
-        <p:style>
-          <a:lnRef idx="2">
-            <a:schemeClr val="accent1"/>
-          </a:lnRef>
-          <a:fillRef idx="0">
-            <a:schemeClr val="accent1"/>
-          </a:fillRef>
-          <a:effectRef idx="1">
-            <a:schemeClr val="accent1"/>
-          </a:effectRef>
-          <a:fontRef idx="minor">
-            <a:schemeClr val="tx1"/>
-          </a:fontRef>
-        </p:style>
-      </p:cxnSp>
-      <p:cxnSp>
-        <p:nvCxnSpPr>
-          <p:cNvPr id="35" name="직선 화살표 연결선 8">
-            <a:extLst>
-              <a:ext uri="{FF2B5EF4-FFF2-40B4-BE49-F238E27FC236}">
-                <a16:creationId xmlns:a16="http://schemas.microsoft.com/office/drawing/2014/main" id="{471371B8-7127-60D0-D22F-F0EFAB654DF1}"/>
-              </a:ext>
-            </a:extLst>
-          </p:cNvPr>
-          <p:cNvCxnSpPr>
-            <a:cxnSpLocks/>
-            <a:stCxn id="12" idx="3"/>
-            <a:endCxn id="11" idx="2"/>
-          </p:cNvCxnSpPr>
-          <p:nvPr/>
-        </p:nvCxnSpPr>
-        <p:spPr>
-          <a:xfrm flipV="1">
-            <a:off x="8065802" y="3458071"/>
-            <a:ext cx="988294" cy="322657"/>
-          </a:xfrm>
-          <a:prstGeom prst="curvedConnector2">
-            <a:avLst/>
-          </a:prstGeom>
-          <a:ln w="3175">
-            <a:solidFill>
-              <a:schemeClr val="tx1"/>
-            </a:solidFill>
-            <a:tailEnd type="triangle"/>
-          </a:ln>
-          <a:effectLst/>
-        </p:spPr>
-        <p:style>
-          <a:lnRef idx="2">
-            <a:schemeClr val="accent1"/>
-          </a:lnRef>
-          <a:fillRef idx="0">
-            <a:schemeClr val="accent1"/>
-          </a:fillRef>
-          <a:effectRef idx="1">
-            <a:schemeClr val="accent1"/>
-          </a:effectRef>
-          <a:fontRef idx="minor">
-            <a:schemeClr val="tx1"/>
-          </a:fontRef>
-        </p:style>
-      </p:cxnSp>
-      <p:cxnSp>
-        <p:nvCxnSpPr>
-          <p:cNvPr id="36" name="직선 화살표 연결선 8">
-            <a:extLst>
-              <a:ext uri="{FF2B5EF4-FFF2-40B4-BE49-F238E27FC236}">
-                <a16:creationId xmlns:a16="http://schemas.microsoft.com/office/drawing/2014/main" id="{379F0519-4B9B-60AE-8B06-E2B2F6FF1D75}"/>
-              </a:ext>
-            </a:extLst>
-          </p:cNvPr>
-          <p:cNvCxnSpPr>
-            <a:cxnSpLocks/>
-            <a:stCxn id="11" idx="1"/>
-            <a:endCxn id="13" idx="0"/>
-          </p:cNvCxnSpPr>
-          <p:nvPr/>
-        </p:nvCxnSpPr>
-        <p:spPr>
-          <a:xfrm rot="10800000" flipV="1">
-            <a:off x="5503362" y="3174606"/>
-            <a:ext cx="2838112" cy="310639"/>
-          </a:xfrm>
-          <a:prstGeom prst="curvedConnector2">
-            <a:avLst/>
-          </a:prstGeom>
-          <a:ln w="3175">
-            <a:solidFill>
-              <a:schemeClr val="tx1"/>
-            </a:solidFill>
-            <a:tailEnd type="triangle"/>
-          </a:ln>
-          <a:effectLst/>
-        </p:spPr>
-        <p:style>
-          <a:lnRef idx="2">
-            <a:schemeClr val="accent1"/>
-          </a:lnRef>
-          <a:fillRef idx="0">
-            <a:schemeClr val="accent1"/>
-          </a:fillRef>
-          <a:effectRef idx="1">
-            <a:schemeClr val="accent1"/>
-          </a:effectRef>
-          <a:fontRef idx="minor">
-            <a:schemeClr val="tx1"/>
-          </a:fontRef>
-        </p:style>
-      </p:cxnSp>
-      <p:cxnSp>
-        <p:nvCxnSpPr>
-          <p:cNvPr id="37" name="직선 화살표 연결선 8">
-            <a:extLst>
-              <a:ext uri="{FF2B5EF4-FFF2-40B4-BE49-F238E27FC236}">
-                <a16:creationId xmlns:a16="http://schemas.microsoft.com/office/drawing/2014/main" id="{FED936BB-CDC9-CD95-15BA-2144522E28FE}"/>
-              </a:ext>
-            </a:extLst>
-          </p:cNvPr>
-          <p:cNvCxnSpPr>
-            <a:cxnSpLocks/>
-            <a:stCxn id="9" idx="1"/>
-            <a:endCxn id="13" idx="0"/>
-          </p:cNvCxnSpPr>
-          <p:nvPr/>
-        </p:nvCxnSpPr>
-        <p:spPr>
-          <a:xfrm rot="10800000" flipV="1">
-            <a:off x="5503363" y="1753804"/>
-            <a:ext cx="1236667" cy="1731442"/>
-          </a:xfrm>
-          <a:prstGeom prst="curvedConnector2">
-            <a:avLst/>
-          </a:prstGeom>
-          <a:ln w="3175">
-            <a:solidFill>
-              <a:schemeClr val="tx1"/>
-            </a:solidFill>
-            <a:tailEnd type="triangle"/>
-          </a:ln>
-          <a:effectLst/>
-        </p:spPr>
-        <p:style>
-          <a:lnRef idx="2">
-            <a:schemeClr val="accent1"/>
-          </a:lnRef>
-          <a:fillRef idx="0">
-            <a:schemeClr val="accent1"/>
-          </a:fillRef>
-          <a:effectRef idx="1">
-            <a:schemeClr val="accent1"/>
-          </a:effectRef>
-          <a:fontRef idx="minor">
-            <a:schemeClr val="tx1"/>
-          </a:fontRef>
-        </p:style>
-      </p:cxnSp>
-      <p:cxnSp>
-        <p:nvCxnSpPr>
-          <p:cNvPr id="38" name="직선 화살표 연결선 8">
-            <a:extLst>
-              <a:ext uri="{FF2B5EF4-FFF2-40B4-BE49-F238E27FC236}">
-                <a16:creationId xmlns:a16="http://schemas.microsoft.com/office/drawing/2014/main" id="{393B425F-7301-CA85-990C-99E2CE6F8C26}"/>
-              </a:ext>
-            </a:extLst>
-          </p:cNvPr>
-          <p:cNvCxnSpPr>
-            <a:cxnSpLocks/>
-            <a:stCxn id="21" idx="1"/>
-            <a:endCxn id="20" idx="1"/>
-          </p:cNvCxnSpPr>
-          <p:nvPr/>
-        </p:nvCxnSpPr>
-        <p:spPr>
-          <a:xfrm rot="10800000" flipV="1">
-            <a:off x="4560110" y="4831762"/>
-            <a:ext cx="1047786" cy="708572"/>
-          </a:xfrm>
-          <a:prstGeom prst="curvedConnector2">
-            <a:avLst/>
-          </a:prstGeom>
-          <a:ln w="3175">
-            <a:solidFill>
-              <a:schemeClr val="tx1"/>
-            </a:solidFill>
-            <a:tailEnd type="triangle"/>
-          </a:ln>
-          <a:effectLst/>
-        </p:spPr>
-        <p:style>
-          <a:lnRef idx="2">
-            <a:schemeClr val="accent1"/>
-          </a:lnRef>
-          <a:fillRef idx="0">
-            <a:schemeClr val="accent1"/>
-          </a:fillRef>
-          <a:effectRef idx="1">
-            <a:schemeClr val="accent1"/>
-          </a:effectRef>
-          <a:fontRef idx="minor">
-            <a:schemeClr val="tx1"/>
-          </a:fontRef>
-        </p:style>
-      </p:cxnSp>
-      <p:cxnSp>
-        <p:nvCxnSpPr>
-          <p:cNvPr id="39" name="직선 화살표 연결선 8">
-            <a:extLst>
-              <a:ext uri="{FF2B5EF4-FFF2-40B4-BE49-F238E27FC236}">
-                <a16:creationId xmlns:a16="http://schemas.microsoft.com/office/drawing/2014/main" id="{2D6DF12D-A7D9-05EE-DD31-1455D4510953}"/>
-              </a:ext>
-            </a:extLst>
-          </p:cNvPr>
-          <p:cNvCxnSpPr>
-            <a:cxnSpLocks/>
-            <a:stCxn id="21" idx="2"/>
-            <a:endCxn id="19" idx="1"/>
-          </p:cNvCxnSpPr>
-          <p:nvPr/>
-        </p:nvCxnSpPr>
-        <p:spPr>
-          <a:xfrm rot="16200000" flipH="1">
-            <a:off x="6174563" y="5261181"/>
-            <a:ext cx="425108" cy="133198"/>
-          </a:xfrm>
-          <a:prstGeom prst="curvedConnector3">
-            <a:avLst>
-              <a:gd name="adj1" fmla="val 50000"/>
-            </a:avLst>
-          </a:prstGeom>
-          <a:ln w="3175">
-            <a:solidFill>
-              <a:schemeClr val="tx1"/>
-            </a:solidFill>
-            <a:tailEnd type="triangle"/>
-          </a:ln>
-          <a:effectLst/>
-        </p:spPr>
-        <p:style>
-          <a:lnRef idx="2">
-            <a:schemeClr val="accent1"/>
-          </a:lnRef>
-          <a:fillRef idx="0">
-            <a:schemeClr val="accent1"/>
-          </a:fillRef>
-          <a:effectRef idx="1">
-            <a:schemeClr val="accent1"/>
-          </a:effectRef>
-          <a:fontRef idx="minor">
-            <a:schemeClr val="tx1"/>
-          </a:fontRef>
-        </p:style>
-      </p:cxnSp>
-      <p:cxnSp>
-        <p:nvCxnSpPr>
-          <p:cNvPr id="40" name="직선 화살표 연결선 8">
-            <a:extLst>
-              <a:ext uri="{FF2B5EF4-FFF2-40B4-BE49-F238E27FC236}">
-                <a16:creationId xmlns:a16="http://schemas.microsoft.com/office/drawing/2014/main" id="{3A69B781-BFC2-CF6E-9D44-9711DBB80E77}"/>
-              </a:ext>
-            </a:extLst>
-          </p:cNvPr>
-          <p:cNvCxnSpPr>
-            <a:cxnSpLocks/>
-            <a:stCxn id="21" idx="3"/>
-            <a:endCxn id="18" idx="1"/>
-          </p:cNvCxnSpPr>
-          <p:nvPr/>
-        </p:nvCxnSpPr>
-        <p:spPr>
-          <a:xfrm>
-            <a:off x="7033140" y="4831762"/>
-            <a:ext cx="1154162" cy="708572"/>
-          </a:xfrm>
-          <a:prstGeom prst="curvedConnector2">
-            <a:avLst/>
-          </a:prstGeom>
-          <a:ln w="3175">
-            <a:solidFill>
-              <a:schemeClr val="tx1"/>
-            </a:solidFill>
-            <a:tailEnd type="triangle"/>
-          </a:ln>
-          <a:effectLst/>
-        </p:spPr>
-        <p:style>
-          <a:lnRef idx="2">
-            <a:schemeClr val="accent1"/>
-          </a:lnRef>
-          <a:fillRef idx="0">
-            <a:schemeClr val="accent1"/>
-          </a:fillRef>
-          <a:effectRef idx="1">
-            <a:schemeClr val="accent1"/>
-          </a:effectRef>
-          <a:fontRef idx="minor">
-            <a:schemeClr val="tx1"/>
-          </a:fontRef>
-        </p:style>
-      </p:cxnSp>
-      <p:cxnSp>
-        <p:nvCxnSpPr>
-          <p:cNvPr id="41" name="직선 화살표 연결선 8">
-            <a:extLst>
-              <a:ext uri="{FF2B5EF4-FFF2-40B4-BE49-F238E27FC236}">
-                <a16:creationId xmlns:a16="http://schemas.microsoft.com/office/drawing/2014/main" id="{0C97422E-D3B9-9CAF-179E-65CBE0308213}"/>
-              </a:ext>
-            </a:extLst>
-          </p:cNvPr>
-          <p:cNvCxnSpPr>
-            <a:cxnSpLocks/>
-            <a:stCxn id="12" idx="3"/>
-            <a:endCxn id="21" idx="3"/>
-          </p:cNvCxnSpPr>
-          <p:nvPr/>
-        </p:nvCxnSpPr>
-        <p:spPr>
-          <a:xfrm flipH="1">
-            <a:off x="7033140" y="3780728"/>
-            <a:ext cx="1032662" cy="1051034"/>
-          </a:xfrm>
-          <a:prstGeom prst="curvedConnector3">
-            <a:avLst>
-              <a:gd name="adj1" fmla="val -22137"/>
-            </a:avLst>
-          </a:prstGeom>
-          <a:ln w="3175">
-            <a:solidFill>
-              <a:schemeClr val="tx1"/>
-            </a:solidFill>
-            <a:tailEnd type="triangle"/>
-          </a:ln>
-          <a:effectLst/>
-        </p:spPr>
-        <p:style>
-          <a:lnRef idx="2">
-            <a:schemeClr val="accent1"/>
-          </a:lnRef>
-          <a:fillRef idx="0">
-            <a:schemeClr val="accent1"/>
-          </a:fillRef>
-          <a:effectRef idx="1">
-            <a:schemeClr val="accent1"/>
-          </a:effectRef>
-          <a:fontRef idx="minor">
-            <a:schemeClr val="tx1"/>
-          </a:fontRef>
-        </p:style>
-      </p:cxnSp>
-      <p:cxnSp>
-        <p:nvCxnSpPr>
-          <p:cNvPr id="42" name="직선 화살표 연결선 8">
-            <a:extLst>
-              <a:ext uri="{FF2B5EF4-FFF2-40B4-BE49-F238E27FC236}">
-                <a16:creationId xmlns:a16="http://schemas.microsoft.com/office/drawing/2014/main" id="{585282B2-E187-5210-675B-6E6A022AD8CD}"/>
-              </a:ext>
-            </a:extLst>
-          </p:cNvPr>
-          <p:cNvCxnSpPr>
-            <a:cxnSpLocks/>
-            <a:stCxn id="21" idx="3"/>
-            <a:endCxn id="12" idx="2"/>
-          </p:cNvCxnSpPr>
-          <p:nvPr/>
-        </p:nvCxnSpPr>
-        <p:spPr>
-          <a:xfrm flipV="1">
-            <a:off x="7033140" y="4064192"/>
-            <a:ext cx="320040" cy="767570"/>
-          </a:xfrm>
-          <a:prstGeom prst="curvedConnector2">
-            <a:avLst/>
-          </a:prstGeom>
-          <a:ln w="3175">
-            <a:solidFill>
-              <a:schemeClr val="tx1"/>
-            </a:solidFill>
-            <a:tailEnd type="triangle"/>
-          </a:ln>
-          <a:effectLst/>
-        </p:spPr>
-        <p:style>
-          <a:lnRef idx="2">
-            <a:schemeClr val="accent1"/>
-          </a:lnRef>
-          <a:fillRef idx="0">
-            <a:schemeClr val="accent1"/>
-          </a:fillRef>
-          <a:effectRef idx="1">
-            <a:schemeClr val="accent1"/>
-          </a:effectRef>
-          <a:fontRef idx="minor">
-            <a:schemeClr val="tx1"/>
-          </a:fontRef>
-        </p:style>
-      </p:cxnSp>
-      <p:sp>
-        <p:nvSpPr>
-          <p:cNvPr id="43" name="Key Feature">
-            <a:extLst>
-              <a:ext uri="{FF2B5EF4-FFF2-40B4-BE49-F238E27FC236}">
-                <a16:creationId xmlns:a16="http://schemas.microsoft.com/office/drawing/2014/main" id="{7DA3FC60-128C-74F1-E3E4-9F5D7531AF83}"/>
-              </a:ext>
-            </a:extLst>
-          </p:cNvPr>
-          <p:cNvSpPr/>
-          <p:nvPr/>
-        </p:nvSpPr>
-        <p:spPr>
-          <a:xfrm>
-            <a:off x="444499" y="285750"/>
-            <a:ext cx="4112163" cy="311150"/>
-          </a:xfrm>
-          <a:prstGeom prst="rect">
-            <a:avLst/>
-          </a:prstGeom>
-          <a:noFill/>
-          <a:ln/>
-        </p:spPr>
-        <p:txBody>
-          <a:bodyPr wrap="square" lIns="0" tIns="0" rIns="0" bIns="0" rtlCol="0" anchor="t"/>
-          <a:lstStyle/>
-          <a:p>
-            <a:pPr>
-              <a:lnSpc>
-                <a:spcPct val="108333"/>
-              </a:lnSpc>
-            </a:pPr>
-            <a:r>
-              <a:rPr lang="ko-KR" altLang="en-US" sz="1900" dirty="0">
-                <a:latin typeface="Pretendard SemiBold" panose="02000703000000020004" pitchFamily="50" charset="-127"/>
-                <a:ea typeface="Pretendard SemiBold" panose="02000703000000020004" pitchFamily="50" charset="-127"/>
-                <a:cs typeface="Pretendard SemiBold" panose="02000703000000020004" pitchFamily="50" charset="-127"/>
-              </a:rPr>
-              <a:t>대화형 질의 응답</a:t>
-            </a:r>
-            <a:endParaRPr lang="en-US" altLang="ko-Kore-KR" sz="1900" dirty="0">
-              <a:latin typeface="Pretendard SemiBold" panose="02000703000000020004" pitchFamily="50" charset="-127"/>
-              <a:ea typeface="Pretendard SemiBold" panose="02000703000000020004" pitchFamily="50" charset="-127"/>
-              <a:cs typeface="Pretendard SemiBold" panose="02000703000000020004" pitchFamily="50" charset="-127"/>
-            </a:endParaRPr>
-          </a:p>
-        </p:txBody>
-      </p:sp>
-    </p:spTree>
-    <p:extLst>
-      <p:ext uri="{BB962C8B-B14F-4D97-AF65-F5344CB8AC3E}">
-        <p14:creationId xmlns:p14="http://schemas.microsoft.com/office/powerpoint/2010/main" val="1614876520"/>
-      </p:ext>
-    </p:extLst>
-  </p:cSld>
-  <p:clrMapOvr>
-    <a:masterClrMapping/>
-  </p:clrMapOvr>
-</p:sld>
-</file>
-
-<file path=ppt/slides/slide3.xml><?xml version="1.0" encoding="utf-8"?>
-<p:sld xmlns:a="http://schemas.openxmlformats.org/drawingml/2006/main" xmlns:r="http://schemas.openxmlformats.org/officeDocument/2006/relationships" xmlns:p="http://schemas.openxmlformats.org/presentationml/2006/main">
-  <p:cSld>
-    <p:spTree>
-      <p:nvGrpSpPr>
-        <p:cNvPr id="1" name=""/>
-        <p:cNvGrpSpPr/>
-        <p:nvPr/>
-      </p:nvGrpSpPr>
-      <p:grpSpPr>
-        <a:xfrm>
-          <a:off x="0" y="0"/>
-          <a:ext cx="0" cy="0"/>
-          <a:chOff x="0" y="0"/>
-          <a:chExt cx="0" cy="0"/>
-        </a:xfrm>
-      </p:grpSpPr>
-      <p:sp>
-        <p:nvSpPr>
           <p:cNvPr id="17" name="Rectangle 4">
             <a:extLst>
               <a:ext uri="{FF2B5EF4-FFF2-40B4-BE49-F238E27FC236}">
@@ -5975,7 +1793,7 @@
         </p:nvSpPr>
         <p:spPr>
           <a:xfrm>
-            <a:off x="10304828" y="2357024"/>
+            <a:off x="10169361" y="2357024"/>
             <a:ext cx="1712866" cy="2036992"/>
           </a:xfrm>
           <a:prstGeom prst="rect">
@@ -6042,7 +1860,7 @@
         </p:nvSpPr>
         <p:spPr>
           <a:xfrm>
-            <a:off x="3962108" y="1445488"/>
+            <a:off x="3826641" y="1445488"/>
             <a:ext cx="6274092" cy="3967024"/>
           </a:xfrm>
           <a:prstGeom prst="rect">
@@ -6109,7 +1927,7 @@
         </p:nvSpPr>
         <p:spPr>
           <a:xfrm>
-            <a:off x="355859" y="3092056"/>
+            <a:off x="220392" y="3092056"/>
             <a:ext cx="1325880" cy="566928"/>
           </a:xfrm>
           <a:prstGeom prst="roundRect">
@@ -6194,7 +2012,7 @@
         </p:nvSpPr>
         <p:spPr>
           <a:xfrm>
-            <a:off x="355859" y="3800716"/>
+            <a:off x="220392" y="3800716"/>
             <a:ext cx="1325880" cy="566928"/>
           </a:xfrm>
           <a:prstGeom prst="roundRect">
@@ -6297,7 +2115,7 @@
         </p:nvSpPr>
         <p:spPr>
           <a:xfrm>
-            <a:off x="2068288" y="2595561"/>
+            <a:off x="1932821" y="2595561"/>
             <a:ext cx="1507270" cy="566928"/>
           </a:xfrm>
           <a:prstGeom prst="rect">
@@ -6406,7 +2224,7 @@
         </p:nvSpPr>
         <p:spPr>
           <a:xfrm>
-            <a:off x="4119565" y="3092056"/>
+            <a:off x="3984098" y="3092056"/>
             <a:ext cx="1507270" cy="566928"/>
           </a:xfrm>
           <a:prstGeom prst="rect">
@@ -6527,7 +2345,7 @@
         </p:nvSpPr>
         <p:spPr>
           <a:xfrm>
-            <a:off x="2064133" y="4322889"/>
+            <a:off x="1928666" y="4322889"/>
             <a:ext cx="1507270" cy="1005840"/>
           </a:xfrm>
           <a:prstGeom prst="rect">
@@ -6591,7 +2409,7 @@
         </p:nvSpPr>
         <p:spPr>
           <a:xfrm>
-            <a:off x="2269128" y="4670361"/>
+            <a:off x="2133661" y="4670361"/>
             <a:ext cx="1097280" cy="530352"/>
           </a:xfrm>
           <a:prstGeom prst="rect">
@@ -6767,7 +2585,7 @@
         </p:nvSpPr>
         <p:spPr>
           <a:xfrm>
-            <a:off x="6757943" y="1792960"/>
+            <a:off x="6622476" y="1792960"/>
             <a:ext cx="1679404" cy="566928"/>
           </a:xfrm>
           <a:prstGeom prst="rect">
@@ -6882,7 +2700,7 @@
         </p:nvSpPr>
         <p:spPr>
           <a:xfrm>
-            <a:off x="6757942" y="2486100"/>
+            <a:off x="6622475" y="2486100"/>
             <a:ext cx="1679405" cy="566928"/>
           </a:xfrm>
           <a:prstGeom prst="rect">
@@ -6997,7 +2815,7 @@
         </p:nvSpPr>
         <p:spPr>
           <a:xfrm>
-            <a:off x="6757942" y="3179240"/>
+            <a:off x="6622475" y="3179240"/>
             <a:ext cx="1679405" cy="566928"/>
           </a:xfrm>
           <a:prstGeom prst="rect">
@@ -7124,7 +2942,7 @@
         </p:nvSpPr>
         <p:spPr>
           <a:xfrm>
-            <a:off x="6757942" y="3872380"/>
+            <a:off x="6622475" y="3872380"/>
             <a:ext cx="1679405" cy="566928"/>
           </a:xfrm>
           <a:prstGeom prst="rect">
@@ -7227,7 +3045,7 @@
         </p:nvSpPr>
         <p:spPr>
           <a:xfrm>
-            <a:off x="6364379" y="4565520"/>
+            <a:off x="6228912" y="4565520"/>
             <a:ext cx="1679405" cy="566928"/>
           </a:xfrm>
           <a:prstGeom prst="rect">
@@ -7366,7 +3184,7 @@
         </p:nvSpPr>
         <p:spPr>
           <a:xfrm>
-            <a:off x="9008709" y="4715210"/>
+            <a:off x="8873242" y="4715210"/>
             <a:ext cx="1137540" cy="566928"/>
           </a:xfrm>
           <a:prstGeom prst="rect">
@@ -7469,7 +3287,7 @@
         </p:nvSpPr>
         <p:spPr>
           <a:xfrm>
-            <a:off x="10452601" y="2811116"/>
+            <a:off x="10317134" y="2811116"/>
             <a:ext cx="1417320" cy="617883"/>
           </a:xfrm>
           <a:prstGeom prst="can">
@@ -7590,7 +3408,7 @@
         </p:nvSpPr>
         <p:spPr>
           <a:xfrm>
-            <a:off x="10452601" y="3602566"/>
+            <a:off x="10317134" y="3602566"/>
             <a:ext cx="1417320" cy="617882"/>
           </a:xfrm>
           <a:prstGeom prst="can">
@@ -7715,7 +3533,7 @@
         </p:nvCxnSpPr>
         <p:spPr>
           <a:xfrm flipV="1">
-            <a:off x="5626835" y="2076424"/>
+            <a:off x="5491368" y="2076424"/>
             <a:ext cx="1131108" cy="1299096"/>
           </a:xfrm>
           <a:prstGeom prst="bentConnector3">
@@ -7765,7 +3583,7 @@
         </p:nvCxnSpPr>
         <p:spPr>
           <a:xfrm flipV="1">
-            <a:off x="5626835" y="2769564"/>
+            <a:off x="5491368" y="2769564"/>
             <a:ext cx="1131107" cy="605956"/>
           </a:xfrm>
           <a:prstGeom prst="bentConnector3">
@@ -7815,7 +3633,7 @@
         </p:nvCxnSpPr>
         <p:spPr>
           <a:xfrm>
-            <a:off x="5626835" y="3375520"/>
+            <a:off x="5491368" y="3375520"/>
             <a:ext cx="1131107" cy="87184"/>
           </a:xfrm>
           <a:prstGeom prst="bentConnector3">
@@ -7865,7 +3683,7 @@
         </p:nvCxnSpPr>
         <p:spPr>
           <a:xfrm>
-            <a:off x="5626835" y="3375520"/>
+            <a:off x="5491368" y="3375520"/>
             <a:ext cx="1131107" cy="780324"/>
           </a:xfrm>
           <a:prstGeom prst="bentConnector3">
@@ -7913,7 +3731,7 @@
         </p:nvCxnSpPr>
         <p:spPr>
           <a:xfrm>
-            <a:off x="5030657" y="3656431"/>
+            <a:off x="4895190" y="3656431"/>
             <a:ext cx="1326764" cy="1038340"/>
           </a:xfrm>
           <a:prstGeom prst="bentConnector3">
@@ -7962,7 +3780,7 @@
         </p:nvCxnSpPr>
         <p:spPr>
           <a:xfrm rot="10800000">
-            <a:off x="4873200" y="3658985"/>
+            <a:off x="4737733" y="3658985"/>
             <a:ext cx="4135508" cy="1540495"/>
           </a:xfrm>
           <a:prstGeom prst="bentConnector2">
@@ -8010,7 +3828,7 @@
         </p:nvCxnSpPr>
         <p:spPr>
           <a:xfrm rot="16200000" flipV="1">
-            <a:off x="3364229" y="1583085"/>
+            <a:off x="3228762" y="1583085"/>
             <a:ext cx="213031" cy="2804912"/>
           </a:xfrm>
           <a:prstGeom prst="bentConnector4">
@@ -8061,7 +3879,7 @@
         </p:nvCxnSpPr>
         <p:spPr>
           <a:xfrm>
-            <a:off x="3575558" y="2879025"/>
+            <a:off x="3440091" y="2879025"/>
             <a:ext cx="544007" cy="496495"/>
           </a:xfrm>
           <a:prstGeom prst="bentConnector3">
@@ -8111,7 +3929,7 @@
         </p:nvCxnSpPr>
         <p:spPr>
           <a:xfrm flipV="1">
-            <a:off x="1681739" y="3375520"/>
+            <a:off x="1546272" y="3375520"/>
             <a:ext cx="2437826" cy="708660"/>
           </a:xfrm>
           <a:prstGeom prst="bentConnector3">
@@ -8160,7 +3978,7 @@
         </p:nvCxnSpPr>
         <p:spPr>
           <a:xfrm>
-            <a:off x="3366408" y="4935537"/>
+            <a:off x="3230941" y="4935537"/>
             <a:ext cx="2991014" cy="0"/>
           </a:xfrm>
           <a:prstGeom prst="straightConnector1">
@@ -8202,19 +4020,17 @@
           <p:cNvCxnSpPr>
             <a:cxnSpLocks/>
             <a:stCxn id="2" idx="3"/>
-            <a:endCxn id="4" idx="1"/>
+            <a:endCxn id="4" idx="2"/>
           </p:cNvCxnSpPr>
           <p:nvPr/>
         </p:nvCxnSpPr>
         <p:spPr>
           <a:xfrm flipV="1">
-            <a:off x="1681739" y="2879025"/>
-            <a:ext cx="386549" cy="496495"/>
-          </a:xfrm>
-          <a:prstGeom prst="bentConnector3">
-            <a:avLst>
-              <a:gd name="adj1" fmla="val 40429"/>
-            </a:avLst>
+            <a:off x="1546272" y="3162489"/>
+            <a:ext cx="1140184" cy="213031"/>
+          </a:xfrm>
+          <a:prstGeom prst="bentConnector2">
+            <a:avLst/>
           </a:prstGeom>
           <a:ln w="3175">
             <a:solidFill>
@@ -8258,7 +4074,7 @@
         </p:nvCxnSpPr>
         <p:spPr>
           <a:xfrm rot="5400000" flipH="1">
-            <a:off x="4638149" y="2566516"/>
+            <a:off x="4502682" y="2566516"/>
             <a:ext cx="196911" cy="4934954"/>
           </a:xfrm>
           <a:prstGeom prst="bentConnector4">
@@ -8307,7 +4123,7 @@
         </p:nvCxnSpPr>
         <p:spPr>
           <a:xfrm>
-            <a:off x="8043784" y="5044168"/>
+            <a:off x="7908317" y="5044168"/>
             <a:ext cx="964924" cy="0"/>
           </a:xfrm>
           <a:prstGeom prst="straightConnector1">
@@ -8355,7 +4171,7 @@
         </p:nvCxnSpPr>
         <p:spPr>
           <a:xfrm>
-            <a:off x="8437347" y="2076424"/>
+            <a:off x="8301880" y="2076424"/>
             <a:ext cx="2015254" cy="1043634"/>
           </a:xfrm>
           <a:prstGeom prst="bentConnector3">
@@ -8405,7 +4221,7 @@
         </p:nvCxnSpPr>
         <p:spPr>
           <a:xfrm>
-            <a:off x="8437347" y="2769564"/>
+            <a:off x="8301880" y="2769564"/>
             <a:ext cx="2015254" cy="350494"/>
           </a:xfrm>
           <a:prstGeom prst="bentConnector3">
@@ -8454,7 +4270,7 @@
         </p:nvCxnSpPr>
         <p:spPr>
           <a:xfrm flipV="1">
-            <a:off x="8428938" y="3120058"/>
+            <a:off x="8293471" y="3120058"/>
             <a:ext cx="2023663" cy="905357"/>
           </a:xfrm>
           <a:prstGeom prst="bentConnector3">
@@ -8503,7 +4319,7 @@
         </p:nvCxnSpPr>
         <p:spPr>
           <a:xfrm flipV="1">
-            <a:off x="8428938" y="3911507"/>
+            <a:off x="8293471" y="3911507"/>
             <a:ext cx="2023663" cy="396398"/>
           </a:xfrm>
           <a:prstGeom prst="bentConnector3">
@@ -8552,7 +4368,7 @@
         </p:nvCxnSpPr>
         <p:spPr>
           <a:xfrm flipV="1">
-            <a:off x="8043784" y="3911507"/>
+            <a:off x="7908317" y="3911507"/>
             <a:ext cx="2408817" cy="748815"/>
           </a:xfrm>
           <a:prstGeom prst="bentConnector3">
@@ -8598,7 +4414,7 @@
         </p:nvSpPr>
         <p:spPr>
           <a:xfrm>
-            <a:off x="8420602" y="1870562"/>
+            <a:off x="8285135" y="1870562"/>
             <a:ext cx="1015665" cy="215444"/>
           </a:xfrm>
           <a:prstGeom prst="rect">
@@ -8612,6 +4428,7 @@
           </a:bodyPr>
           <a:lstStyle/>
           <a:p>
+            <a:pPr algn="ctr"/>
             <a:r>
               <a:rPr kumimoji="1" lang="ko-KR" altLang="en-US" sz="800" dirty="0"/>
               <a:t>의존 그래프 조회</a:t>
@@ -8633,7 +4450,7 @@
         </p:nvSpPr>
         <p:spPr>
           <a:xfrm>
-            <a:off x="8437346" y="2436980"/>
+            <a:off x="8301879" y="2436980"/>
             <a:ext cx="946310" cy="338554"/>
           </a:xfrm>
           <a:prstGeom prst="rect">
@@ -8647,6 +4464,7 @@
           </a:bodyPr>
           <a:lstStyle/>
           <a:p>
+            <a:pPr algn="ctr"/>
             <a:r>
               <a:rPr kumimoji="1" lang="ko-KR" altLang="en-US" sz="800" dirty="0"/>
               <a:t>경계</a:t>
@@ -8691,7 +4509,7 @@
         </p:nvSpPr>
         <p:spPr>
           <a:xfrm>
-            <a:off x="8428938" y="3798987"/>
+            <a:off x="8293471" y="3798987"/>
             <a:ext cx="980291" cy="215444"/>
           </a:xfrm>
           <a:prstGeom prst="rect">
@@ -8705,6 +4523,7 @@
           </a:bodyPr>
           <a:lstStyle/>
           <a:p>
+            <a:pPr algn="ctr"/>
             <a:r>
               <a:rPr kumimoji="1" lang="ko-KR" altLang="en-US" sz="800" dirty="0"/>
               <a:t>데이터 흐름 조회</a:t>
@@ -8726,7 +4545,7 @@
         </p:nvSpPr>
         <p:spPr>
           <a:xfrm>
-            <a:off x="8413966" y="4084936"/>
+            <a:off x="8322932" y="4092445"/>
             <a:ext cx="1384220" cy="215444"/>
           </a:xfrm>
           <a:prstGeom prst="rect">
@@ -8740,6 +4559,7 @@
           </a:bodyPr>
           <a:lstStyle/>
           <a:p>
+            <a:pPr algn="ctr"/>
             <a:r>
               <a:rPr kumimoji="1" lang="ko-KR" altLang="en-US" sz="800" dirty="0"/>
               <a:t>규칙</a:t>
@@ -8769,7 +4589,7 @@
         </p:nvSpPr>
         <p:spPr>
           <a:xfrm>
-            <a:off x="8413966" y="4427665"/>
+            <a:off x="8206309" y="4426263"/>
             <a:ext cx="1605694" cy="215444"/>
           </a:xfrm>
           <a:prstGeom prst="rect">
@@ -8783,6 +4603,7 @@
           </a:bodyPr>
           <a:lstStyle/>
           <a:p>
+            <a:pPr algn="ctr"/>
             <a:r>
               <a:rPr kumimoji="1" lang="ko-KR" altLang="en-US" sz="800" dirty="0"/>
               <a:t>카탈로그 컨텍스트 조회</a:t>
@@ -8804,7 +4625,7 @@
         </p:nvSpPr>
         <p:spPr>
           <a:xfrm>
-            <a:off x="8082918" y="4705614"/>
+            <a:off x="7856211" y="4714487"/>
             <a:ext cx="1070172" cy="338554"/>
           </a:xfrm>
           <a:prstGeom prst="rect">
@@ -8818,6 +4639,7 @@
           </a:bodyPr>
           <a:lstStyle/>
           <a:p>
+            <a:pPr algn="ctr"/>
             <a:r>
               <a:rPr kumimoji="1" lang="ko-KR" altLang="en-US" sz="800" dirty="0"/>
               <a:t>분석</a:t>
@@ -8854,7 +4676,7 @@
         </p:nvSpPr>
         <p:spPr>
           <a:xfrm>
-            <a:off x="4941408" y="5210812"/>
+            <a:off x="4805941" y="5210812"/>
             <a:ext cx="2209533" cy="215444"/>
           </a:xfrm>
           <a:prstGeom prst="rect">
@@ -8868,6 +4690,7 @@
           </a:bodyPr>
           <a:lstStyle/>
           <a:p>
+            <a:pPr algn="ctr"/>
             <a:r>
               <a:rPr kumimoji="1" lang="ko-KR" altLang="en-US" sz="800" dirty="0"/>
               <a:t>완성된 </a:t>
@@ -8901,7 +4724,7 @@
         </p:nvSpPr>
         <p:spPr>
           <a:xfrm>
-            <a:off x="2605878" y="5545408"/>
+            <a:off x="3641110" y="5558250"/>
             <a:ext cx="1183862" cy="215444"/>
           </a:xfrm>
           <a:prstGeom prst="rect">
@@ -8915,6 +4738,7 @@
           </a:bodyPr>
           <a:lstStyle/>
           <a:p>
+            <a:pPr algn="ctr"/>
             <a:r>
               <a:rPr kumimoji="1" lang="ko-KR" altLang="en-US" sz="800" dirty="0"/>
               <a:t>자연어 합성 요청</a:t>
@@ -8936,7 +4760,7 @@
         </p:nvSpPr>
         <p:spPr>
           <a:xfrm>
-            <a:off x="1969331" y="3872093"/>
+            <a:off x="1833864" y="3872093"/>
             <a:ext cx="1391810" cy="215444"/>
           </a:xfrm>
           <a:prstGeom prst="rect">
@@ -8950,6 +4774,7 @@
           </a:bodyPr>
           <a:lstStyle/>
           <a:p>
+            <a:pPr algn="ctr"/>
             <a:r>
               <a:rPr kumimoji="1" lang="ko-KR" altLang="en-US" sz="800" dirty="0"/>
               <a:t>로컬 변경 내역 전달</a:t>
@@ -8971,7 +4796,7 @@
         </p:nvSpPr>
         <p:spPr>
           <a:xfrm>
-            <a:off x="2304388" y="2116858"/>
+            <a:off x="2168921" y="2116858"/>
             <a:ext cx="1619087" cy="215444"/>
           </a:xfrm>
           <a:prstGeom prst="rect">
@@ -8985,6 +4810,7 @@
           </a:bodyPr>
           <a:lstStyle/>
           <a:p>
+            <a:pPr algn="ctr"/>
             <a:r>
               <a:rPr kumimoji="1" lang="ko-KR" altLang="en-US" sz="800" dirty="0"/>
               <a:t>영향</a:t>
@@ -9014,7 +4840,7 @@
         </p:nvSpPr>
         <p:spPr>
           <a:xfrm>
-            <a:off x="3937491" y="4738625"/>
+            <a:off x="3802024" y="4738625"/>
             <a:ext cx="1022948" cy="215444"/>
           </a:xfrm>
           <a:prstGeom prst="rect">
@@ -9028,6 +4854,7 @@
           </a:bodyPr>
           <a:lstStyle/>
           <a:p>
+            <a:pPr algn="ctr"/>
             <a:r>
               <a:rPr kumimoji="1" lang="ko-KR" altLang="en-US" sz="800" dirty="0"/>
               <a:t>인사이트 응답</a:t>
@@ -9049,7 +4876,7 @@
         </p:nvSpPr>
         <p:spPr>
           <a:xfrm>
-            <a:off x="5055625" y="4361287"/>
+            <a:off x="4920158" y="4361287"/>
             <a:ext cx="1633689" cy="338554"/>
           </a:xfrm>
           <a:prstGeom prst="rect">
@@ -9063,6 +4890,7 @@
           </a:bodyPr>
           <a:lstStyle/>
           <a:p>
+            <a:pPr algn="ctr"/>
             <a:r>
               <a:rPr kumimoji="1" lang="ko-KR" altLang="en-US" sz="800" dirty="0"/>
               <a:t>분석 결과 </a:t>
@@ -9099,7 +4927,7 @@
         </p:nvSpPr>
         <p:spPr>
           <a:xfrm>
-            <a:off x="5922990" y="1758271"/>
+            <a:off x="5787523" y="1758271"/>
             <a:ext cx="705967" cy="338554"/>
           </a:xfrm>
           <a:prstGeom prst="rect">
@@ -9150,7 +4978,7 @@
         </p:nvSpPr>
         <p:spPr>
           <a:xfrm>
-            <a:off x="5905398" y="2443395"/>
+            <a:off x="5769931" y="2443395"/>
             <a:ext cx="741153" cy="338554"/>
           </a:xfrm>
           <a:prstGeom prst="rect">
@@ -9201,7 +5029,7 @@
         </p:nvSpPr>
         <p:spPr>
           <a:xfrm>
-            <a:off x="5905398" y="3114992"/>
+            <a:off x="5769931" y="3114992"/>
             <a:ext cx="741153" cy="338554"/>
           </a:xfrm>
           <a:prstGeom prst="rect">
@@ -9252,7 +5080,7 @@
         </p:nvSpPr>
         <p:spPr>
           <a:xfrm>
-            <a:off x="5901948" y="3807150"/>
+            <a:off x="5766481" y="3807150"/>
             <a:ext cx="741153" cy="338554"/>
           </a:xfrm>
           <a:prstGeom prst="rect">
@@ -9285,6 +5113,78 @@
             <a:r>
               <a:rPr kumimoji="1" lang="ko-KR" altLang="en-US" sz="800" dirty="0"/>
               <a:t>결과</a:t>
+            </a:r>
+          </a:p>
+        </p:txBody>
+      </p:sp>
+      <p:sp>
+        <p:nvSpPr>
+          <p:cNvPr id="25" name="TextBox 24">
+            <a:extLst>
+              <a:ext uri="{FF2B5EF4-FFF2-40B4-BE49-F238E27FC236}">
+                <a16:creationId xmlns:a16="http://schemas.microsoft.com/office/drawing/2014/main" id="{A048DDAD-B807-C688-3CE9-502648FD1379}"/>
+              </a:ext>
+            </a:extLst>
+          </p:cNvPr>
+          <p:cNvSpPr txBox="1"/>
+          <p:nvPr/>
+        </p:nvSpPr>
+        <p:spPr>
+          <a:xfrm>
+            <a:off x="3374810" y="2664788"/>
+            <a:ext cx="931492" cy="215444"/>
+          </a:xfrm>
+          <a:prstGeom prst="rect">
+            <a:avLst/>
+          </a:prstGeom>
+          <a:noFill/>
+        </p:spPr>
+        <p:txBody>
+          <a:bodyPr wrap="square" rtlCol="0">
+            <a:spAutoFit/>
+          </a:bodyPr>
+          <a:lstStyle/>
+          <a:p>
+            <a:pPr algn="ctr"/>
+            <a:r>
+              <a:rPr kumimoji="1" lang="ko-KR" altLang="en-US" sz="800" dirty="0"/>
+              <a:t>분석 요청 전달</a:t>
+            </a:r>
+          </a:p>
+        </p:txBody>
+      </p:sp>
+      <p:sp>
+        <p:nvSpPr>
+          <p:cNvPr id="27" name="TextBox 26">
+            <a:extLst>
+              <a:ext uri="{FF2B5EF4-FFF2-40B4-BE49-F238E27FC236}">
+                <a16:creationId xmlns:a16="http://schemas.microsoft.com/office/drawing/2014/main" id="{D53AA3F3-4DB0-D5BC-FAF0-3F34D238663B}"/>
+              </a:ext>
+            </a:extLst>
+          </p:cNvPr>
+          <p:cNvSpPr txBox="1"/>
+          <p:nvPr/>
+        </p:nvSpPr>
+        <p:spPr>
+          <a:xfrm>
+            <a:off x="1555350" y="3395428"/>
+            <a:ext cx="1140184" cy="215444"/>
+          </a:xfrm>
+          <a:prstGeom prst="rect">
+            <a:avLst/>
+          </a:prstGeom>
+          <a:noFill/>
+        </p:spPr>
+        <p:txBody>
+          <a:bodyPr wrap="square" rtlCol="0">
+            <a:spAutoFit/>
+          </a:bodyPr>
+          <a:lstStyle/>
+          <a:p>
+            <a:pPr algn="ctr"/>
+            <a:r>
+              <a:rPr kumimoji="1" lang="ko-KR" altLang="en-US" sz="800" dirty="0"/>
+              <a:t>변경 영향 분석 요청</a:t>
             </a:r>
           </a:p>
         </p:txBody>

--- a/feature-slice/05-impact-risk-analysis/impact-risk-analysis.pptx
+++ b/feature-slice/05-impact-risk-analysis/impact-risk-analysis.pptx
@@ -203,7 +203,7 @@
           <a:p>
             <a:fld id="{1CFE36D4-B224-4D49-A73E-0BF1A210728E}" type="datetimeFigureOut">
               <a:rPr lang="ko-KR" altLang="en-US" smtClean="0"/>
-              <a:t>2026. 4. 13.</a:t>
+              <a:t>2026. 4. 16.</a:t>
             </a:fld>
             <a:endParaRPr lang="ko-KR" altLang="en-US"/>
           </a:p>
@@ -368,7 +368,7 @@
           <a:p>
             <a:fld id="{79F7304B-F283-4E41-A8FA-EB923FFBA2A0}" type="datetimeFigureOut">
               <a:rPr lang="ko-KR" altLang="en-US" smtClean="0"/>
-              <a:t>2026. 4. 13.</a:t>
+              <a:t>2026. 4. 16.</a:t>
             </a:fld>
             <a:endParaRPr lang="ko-KR" altLang="en-US"/>
           </a:p>
@@ -1459,7 +1459,7 @@
             <a:fld id="{A08F8EB2-BEDB-4375-BAD0-E61FA200F7A6}" type="datetimeFigureOut">
               <a:rPr lang="ko-KR" altLang="en-US" smtClean="0"/>
               <a:pPr/>
-              <a:t>2026. 4. 13.</a:t>
+              <a:t>2026. 4. 16.</a:t>
             </a:fld>
             <a:endParaRPr lang="ko-KR" altLang="en-US"/>
           </a:p>
@@ -1793,7 +1793,7 @@
         </p:nvSpPr>
         <p:spPr>
           <a:xfrm>
-            <a:off x="10169361" y="2357024"/>
+            <a:off x="10169361" y="1798219"/>
             <a:ext cx="1712866" cy="2036992"/>
           </a:xfrm>
           <a:prstGeom prst="rect">
@@ -1860,7 +1860,7 @@
         </p:nvSpPr>
         <p:spPr>
           <a:xfrm>
-            <a:off x="3826641" y="1445488"/>
+            <a:off x="3826641" y="886683"/>
             <a:ext cx="6274092" cy="3967024"/>
           </a:xfrm>
           <a:prstGeom prst="rect">
@@ -1927,7 +1927,7 @@
         </p:nvSpPr>
         <p:spPr>
           <a:xfrm>
-            <a:off x="220392" y="3092056"/>
+            <a:off x="220392" y="2533251"/>
             <a:ext cx="1325880" cy="566928"/>
           </a:xfrm>
           <a:prstGeom prst="roundRect">
@@ -2012,7 +2012,7 @@
         </p:nvSpPr>
         <p:spPr>
           <a:xfrm>
-            <a:off x="220392" y="3800716"/>
+            <a:off x="220392" y="3241911"/>
             <a:ext cx="1325880" cy="566928"/>
           </a:xfrm>
           <a:prstGeom prst="roundRect">
@@ -2115,7 +2115,7 @@
         </p:nvSpPr>
         <p:spPr>
           <a:xfrm>
-            <a:off x="1932821" y="2595561"/>
+            <a:off x="1932821" y="2036756"/>
             <a:ext cx="1507270" cy="566928"/>
           </a:xfrm>
           <a:prstGeom prst="rect">
@@ -2224,7 +2224,7 @@
         </p:nvSpPr>
         <p:spPr>
           <a:xfrm>
-            <a:off x="3984098" y="3092056"/>
+            <a:off x="3984098" y="2533251"/>
             <a:ext cx="1507270" cy="566928"/>
           </a:xfrm>
           <a:prstGeom prst="rect">
@@ -2345,7 +2345,7 @@
         </p:nvSpPr>
         <p:spPr>
           <a:xfrm>
-            <a:off x="1928666" y="4322889"/>
+            <a:off x="1928666" y="3764084"/>
             <a:ext cx="1507270" cy="1005840"/>
           </a:xfrm>
           <a:prstGeom prst="rect">
@@ -2409,7 +2409,7 @@
         </p:nvSpPr>
         <p:spPr>
           <a:xfrm>
-            <a:off x="2133661" y="4670361"/>
+            <a:off x="2133661" y="4111556"/>
             <a:ext cx="1097280" cy="530352"/>
           </a:xfrm>
           <a:prstGeom prst="rect">
@@ -2585,7 +2585,7 @@
         </p:nvSpPr>
         <p:spPr>
           <a:xfrm>
-            <a:off x="6622476" y="1792960"/>
+            <a:off x="6622476" y="1234155"/>
             <a:ext cx="1679404" cy="566928"/>
           </a:xfrm>
           <a:prstGeom prst="rect">
@@ -2700,7 +2700,7 @@
         </p:nvSpPr>
         <p:spPr>
           <a:xfrm>
-            <a:off x="6622475" y="2486100"/>
+            <a:off x="6622475" y="1927295"/>
             <a:ext cx="1679405" cy="566928"/>
           </a:xfrm>
           <a:prstGeom prst="rect">
@@ -2815,7 +2815,7 @@
         </p:nvSpPr>
         <p:spPr>
           <a:xfrm>
-            <a:off x="6622475" y="3179240"/>
+            <a:off x="6622475" y="2620435"/>
             <a:ext cx="1679405" cy="566928"/>
           </a:xfrm>
           <a:prstGeom prst="rect">
@@ -2942,7 +2942,7 @@
         </p:nvSpPr>
         <p:spPr>
           <a:xfrm>
-            <a:off x="6622475" y="3872380"/>
+            <a:off x="6622475" y="3313575"/>
             <a:ext cx="1679405" cy="566928"/>
           </a:xfrm>
           <a:prstGeom prst="rect">
@@ -3045,7 +3045,7 @@
         </p:nvSpPr>
         <p:spPr>
           <a:xfrm>
-            <a:off x="6228912" y="4565520"/>
+            <a:off x="6228912" y="4006715"/>
             <a:ext cx="1679405" cy="566928"/>
           </a:xfrm>
           <a:prstGeom prst="rect">
@@ -3184,7 +3184,7 @@
         </p:nvSpPr>
         <p:spPr>
           <a:xfrm>
-            <a:off x="8873242" y="4715210"/>
+            <a:off x="8873242" y="4156405"/>
             <a:ext cx="1137540" cy="566928"/>
           </a:xfrm>
           <a:prstGeom prst="rect">
@@ -3287,7 +3287,7 @@
         </p:nvSpPr>
         <p:spPr>
           <a:xfrm>
-            <a:off x="10317134" y="2811116"/>
+            <a:off x="10317134" y="2252311"/>
             <a:ext cx="1417320" cy="617883"/>
           </a:xfrm>
           <a:prstGeom prst="can">
@@ -3408,7 +3408,7 @@
         </p:nvSpPr>
         <p:spPr>
           <a:xfrm>
-            <a:off x="10317134" y="3602566"/>
+            <a:off x="10317134" y="3043761"/>
             <a:ext cx="1417320" cy="617882"/>
           </a:xfrm>
           <a:prstGeom prst="can">
@@ -3533,7 +3533,7 @@
         </p:nvCxnSpPr>
         <p:spPr>
           <a:xfrm flipV="1">
-            <a:off x="5491368" y="2076424"/>
+            <a:off x="5491368" y="1517619"/>
             <a:ext cx="1131108" cy="1299096"/>
           </a:xfrm>
           <a:prstGeom prst="bentConnector3">
@@ -3583,7 +3583,7 @@
         </p:nvCxnSpPr>
         <p:spPr>
           <a:xfrm flipV="1">
-            <a:off x="5491368" y="2769564"/>
+            <a:off x="5491368" y="2210759"/>
             <a:ext cx="1131107" cy="605956"/>
           </a:xfrm>
           <a:prstGeom prst="bentConnector3">
@@ -3633,7 +3633,7 @@
         </p:nvCxnSpPr>
         <p:spPr>
           <a:xfrm>
-            <a:off x="5491368" y="3375520"/>
+            <a:off x="5491368" y="2816715"/>
             <a:ext cx="1131107" cy="87184"/>
           </a:xfrm>
           <a:prstGeom prst="bentConnector3">
@@ -3683,7 +3683,7 @@
         </p:nvCxnSpPr>
         <p:spPr>
           <a:xfrm>
-            <a:off x="5491368" y="3375520"/>
+            <a:off x="5491368" y="2816715"/>
             <a:ext cx="1131107" cy="780324"/>
           </a:xfrm>
           <a:prstGeom prst="bentConnector3">
@@ -3731,7 +3731,7 @@
         </p:nvCxnSpPr>
         <p:spPr>
           <a:xfrm>
-            <a:off x="4895190" y="3656431"/>
+            <a:off x="4895190" y="3097626"/>
             <a:ext cx="1326764" cy="1038340"/>
           </a:xfrm>
           <a:prstGeom prst="bentConnector3">
@@ -3780,7 +3780,7 @@
         </p:nvCxnSpPr>
         <p:spPr>
           <a:xfrm rot="10800000">
-            <a:off x="4737733" y="3658985"/>
+            <a:off x="4737733" y="3100180"/>
             <a:ext cx="4135508" cy="1540495"/>
           </a:xfrm>
           <a:prstGeom prst="bentConnector2">
@@ -3828,7 +3828,7 @@
         </p:nvCxnSpPr>
         <p:spPr>
           <a:xfrm rot="16200000" flipV="1">
-            <a:off x="3228762" y="1583085"/>
+            <a:off x="3228762" y="1024280"/>
             <a:ext cx="213031" cy="2804912"/>
           </a:xfrm>
           <a:prstGeom prst="bentConnector4">
@@ -3879,7 +3879,7 @@
         </p:nvCxnSpPr>
         <p:spPr>
           <a:xfrm>
-            <a:off x="3440091" y="2879025"/>
+            <a:off x="3440091" y="2320220"/>
             <a:ext cx="544007" cy="496495"/>
           </a:xfrm>
           <a:prstGeom prst="bentConnector3">
@@ -3929,7 +3929,7 @@
         </p:nvCxnSpPr>
         <p:spPr>
           <a:xfrm flipV="1">
-            <a:off x="1546272" y="3375520"/>
+            <a:off x="1546272" y="2816715"/>
             <a:ext cx="2437826" cy="708660"/>
           </a:xfrm>
           <a:prstGeom prst="bentConnector3">
@@ -3978,7 +3978,7 @@
         </p:nvCxnSpPr>
         <p:spPr>
           <a:xfrm>
-            <a:off x="3230941" y="4935537"/>
+            <a:off x="3230941" y="4376732"/>
             <a:ext cx="2991014" cy="0"/>
           </a:xfrm>
           <a:prstGeom prst="straightConnector1">
@@ -4026,7 +4026,7 @@
         </p:nvCxnSpPr>
         <p:spPr>
           <a:xfrm flipV="1">
-            <a:off x="1546272" y="3162489"/>
+            <a:off x="1546272" y="2603684"/>
             <a:ext cx="1140184" cy="213031"/>
           </a:xfrm>
           <a:prstGeom prst="bentConnector2">
@@ -4074,7 +4074,7 @@
         </p:nvCxnSpPr>
         <p:spPr>
           <a:xfrm rot="5400000" flipH="1">
-            <a:off x="4502682" y="2566516"/>
+            <a:off x="4502682" y="2007711"/>
             <a:ext cx="196911" cy="4934954"/>
           </a:xfrm>
           <a:prstGeom prst="bentConnector4">
@@ -4123,7 +4123,7 @@
         </p:nvCxnSpPr>
         <p:spPr>
           <a:xfrm>
-            <a:off x="7908317" y="5044168"/>
+            <a:off x="7908317" y="4485363"/>
             <a:ext cx="964924" cy="0"/>
           </a:xfrm>
           <a:prstGeom prst="straightConnector1">
@@ -4171,7 +4171,7 @@
         </p:nvCxnSpPr>
         <p:spPr>
           <a:xfrm>
-            <a:off x="8301880" y="2076424"/>
+            <a:off x="8301880" y="1517619"/>
             <a:ext cx="2015254" cy="1043634"/>
           </a:xfrm>
           <a:prstGeom prst="bentConnector3">
@@ -4221,7 +4221,7 @@
         </p:nvCxnSpPr>
         <p:spPr>
           <a:xfrm>
-            <a:off x="8301880" y="2769564"/>
+            <a:off x="8301880" y="2210759"/>
             <a:ext cx="2015254" cy="350494"/>
           </a:xfrm>
           <a:prstGeom prst="bentConnector3">
@@ -4270,7 +4270,7 @@
         </p:nvCxnSpPr>
         <p:spPr>
           <a:xfrm flipV="1">
-            <a:off x="8293471" y="3120058"/>
+            <a:off x="8293471" y="2561253"/>
             <a:ext cx="2023663" cy="905357"/>
           </a:xfrm>
           <a:prstGeom prst="bentConnector3">
@@ -4319,7 +4319,7 @@
         </p:nvCxnSpPr>
         <p:spPr>
           <a:xfrm flipV="1">
-            <a:off x="8293471" y="3911507"/>
+            <a:off x="8293471" y="3352702"/>
             <a:ext cx="2023663" cy="396398"/>
           </a:xfrm>
           <a:prstGeom prst="bentConnector3">
@@ -4368,7 +4368,7 @@
         </p:nvCxnSpPr>
         <p:spPr>
           <a:xfrm flipV="1">
-            <a:off x="7908317" y="3911507"/>
+            <a:off x="7908317" y="3352702"/>
             <a:ext cx="2408817" cy="748815"/>
           </a:xfrm>
           <a:prstGeom prst="bentConnector3">
@@ -4414,7 +4414,7 @@
         </p:nvSpPr>
         <p:spPr>
           <a:xfrm>
-            <a:off x="8285135" y="1870562"/>
+            <a:off x="8285135" y="1311757"/>
             <a:ext cx="1015665" cy="215444"/>
           </a:xfrm>
           <a:prstGeom prst="rect">
@@ -4450,7 +4450,7 @@
         </p:nvSpPr>
         <p:spPr>
           <a:xfrm>
-            <a:off x="8301879" y="2436980"/>
+            <a:off x="8301879" y="1878175"/>
             <a:ext cx="946310" cy="338554"/>
           </a:xfrm>
           <a:prstGeom prst="rect">
@@ -4509,7 +4509,7 @@
         </p:nvSpPr>
         <p:spPr>
           <a:xfrm>
-            <a:off x="8293471" y="3798987"/>
+            <a:off x="8293471" y="3240182"/>
             <a:ext cx="980291" cy="215444"/>
           </a:xfrm>
           <a:prstGeom prst="rect">
@@ -4545,7 +4545,7 @@
         </p:nvSpPr>
         <p:spPr>
           <a:xfrm>
-            <a:off x="8322932" y="4092445"/>
+            <a:off x="8322932" y="3533640"/>
             <a:ext cx="1384220" cy="215444"/>
           </a:xfrm>
           <a:prstGeom prst="rect">
@@ -4589,7 +4589,7 @@
         </p:nvSpPr>
         <p:spPr>
           <a:xfrm>
-            <a:off x="8206309" y="4426263"/>
+            <a:off x="8206309" y="3867458"/>
             <a:ext cx="1605694" cy="215444"/>
           </a:xfrm>
           <a:prstGeom prst="rect">
@@ -4625,7 +4625,7 @@
         </p:nvSpPr>
         <p:spPr>
           <a:xfrm>
-            <a:off x="7856211" y="4714487"/>
+            <a:off x="7856211" y="4155682"/>
             <a:ext cx="1070172" cy="338554"/>
           </a:xfrm>
           <a:prstGeom prst="rect">
@@ -4676,7 +4676,7 @@
         </p:nvSpPr>
         <p:spPr>
           <a:xfrm>
-            <a:off x="4805941" y="5210812"/>
+            <a:off x="4805941" y="4652007"/>
             <a:ext cx="2209533" cy="215444"/>
           </a:xfrm>
           <a:prstGeom prst="rect">
@@ -4724,7 +4724,7 @@
         </p:nvSpPr>
         <p:spPr>
           <a:xfrm>
-            <a:off x="3641110" y="5558250"/>
+            <a:off x="3641110" y="4999445"/>
             <a:ext cx="1183862" cy="215444"/>
           </a:xfrm>
           <a:prstGeom prst="rect">
@@ -4760,7 +4760,7 @@
         </p:nvSpPr>
         <p:spPr>
           <a:xfrm>
-            <a:off x="1833864" y="3872093"/>
+            <a:off x="1833864" y="3313288"/>
             <a:ext cx="1391810" cy="215444"/>
           </a:xfrm>
           <a:prstGeom prst="rect">
@@ -4796,7 +4796,7 @@
         </p:nvSpPr>
         <p:spPr>
           <a:xfrm>
-            <a:off x="2168921" y="2116858"/>
+            <a:off x="2168921" y="1558053"/>
             <a:ext cx="1619087" cy="215444"/>
           </a:xfrm>
           <a:prstGeom prst="rect">
@@ -4840,7 +4840,7 @@
         </p:nvSpPr>
         <p:spPr>
           <a:xfrm>
-            <a:off x="3802024" y="4738625"/>
+            <a:off x="3802024" y="4179820"/>
             <a:ext cx="1022948" cy="215444"/>
           </a:xfrm>
           <a:prstGeom prst="rect">
@@ -4876,7 +4876,7 @@
         </p:nvSpPr>
         <p:spPr>
           <a:xfrm>
-            <a:off x="4920158" y="4361287"/>
+            <a:off x="4920158" y="3802482"/>
             <a:ext cx="1633689" cy="338554"/>
           </a:xfrm>
           <a:prstGeom prst="rect">
@@ -4927,7 +4927,7 @@
         </p:nvSpPr>
         <p:spPr>
           <a:xfrm>
-            <a:off x="5787523" y="1758271"/>
+            <a:off x="5787523" y="1199466"/>
             <a:ext cx="705967" cy="338554"/>
           </a:xfrm>
           <a:prstGeom prst="rect">
@@ -4978,7 +4978,7 @@
         </p:nvSpPr>
         <p:spPr>
           <a:xfrm>
-            <a:off x="5769931" y="2443395"/>
+            <a:off x="5769931" y="1884590"/>
             <a:ext cx="741153" cy="338554"/>
           </a:xfrm>
           <a:prstGeom prst="rect">
@@ -5029,7 +5029,7 @@
         </p:nvSpPr>
         <p:spPr>
           <a:xfrm>
-            <a:off x="5769931" y="3114992"/>
+            <a:off x="5769931" y="2556187"/>
             <a:ext cx="741153" cy="338554"/>
           </a:xfrm>
           <a:prstGeom prst="rect">
@@ -5080,7 +5080,7 @@
         </p:nvSpPr>
         <p:spPr>
           <a:xfrm>
-            <a:off x="5766481" y="3807150"/>
+            <a:off x="5766481" y="3248345"/>
             <a:ext cx="741153" cy="338554"/>
           </a:xfrm>
           <a:prstGeom prst="rect">
@@ -5131,7 +5131,7 @@
         </p:nvSpPr>
         <p:spPr>
           <a:xfrm>
-            <a:off x="3374810" y="2664788"/>
+            <a:off x="3374810" y="2105983"/>
             <a:ext cx="931492" cy="215444"/>
           </a:xfrm>
           <a:prstGeom prst="rect">
@@ -5167,7 +5167,7 @@
         </p:nvSpPr>
         <p:spPr>
           <a:xfrm>
-            <a:off x="1555350" y="3395428"/>
+            <a:off x="1555350" y="2836623"/>
             <a:ext cx="1140184" cy="215444"/>
           </a:xfrm>
           <a:prstGeom prst="rect">
@@ -5186,6 +5186,138 @@
               <a:rPr kumimoji="1" lang="ko-KR" altLang="en-US" sz="800" dirty="0"/>
               <a:t>변경 영향 분석 요청</a:t>
             </a:r>
+          </a:p>
+        </p:txBody>
+      </p:sp>
+      <p:sp>
+        <p:nvSpPr>
+          <p:cNvPr id="18" name="직사각형 17">
+            <a:extLst>
+              <a:ext uri="{FF2B5EF4-FFF2-40B4-BE49-F238E27FC236}">
+                <a16:creationId xmlns:a16="http://schemas.microsoft.com/office/drawing/2014/main" id="{CD01F672-EC06-827F-F4AA-9A34948A266A}"/>
+              </a:ext>
+            </a:extLst>
+          </p:cNvPr>
+          <p:cNvSpPr/>
+          <p:nvPr/>
+        </p:nvSpPr>
+        <p:spPr>
+          <a:xfrm>
+            <a:off x="1343815" y="5492032"/>
+            <a:ext cx="9426211" cy="523220"/>
+          </a:xfrm>
+          <a:prstGeom prst="rect">
+            <a:avLst/>
+          </a:prstGeom>
+        </p:spPr>
+        <p:txBody>
+          <a:bodyPr wrap="square">
+            <a:spAutoFit/>
+          </a:bodyPr>
+          <a:lstStyle/>
+          <a:p>
+            <a:pPr algn="ctr"/>
+            <a:r>
+              <a:rPr lang="en-US" altLang="ko-KR" sz="1400" b="1" dirty="0"/>
+              <a:t>Diff(PR, </a:t>
+            </a:r>
+            <a:r>
+              <a:rPr lang="ko-KR" altLang="en-US" sz="1400" b="1" dirty="0" err="1"/>
+              <a:t>브랜치</a:t>
+            </a:r>
+            <a:r>
+              <a:rPr lang="en-US" altLang="ko-KR" sz="1400" b="1" dirty="0"/>
+              <a:t>,</a:t>
+            </a:r>
+            <a:r>
+              <a:rPr lang="ko-KR" altLang="en-US" sz="1400" b="1" dirty="0"/>
+              <a:t> </a:t>
+            </a:r>
+            <a:r>
+              <a:rPr lang="ko-KR" altLang="en-US" sz="1400" b="1" dirty="0" err="1"/>
+              <a:t>커밋</a:t>
+            </a:r>
+            <a:r>
+              <a:rPr lang="en-US" altLang="ko-KR" sz="1400" b="1" dirty="0"/>
+              <a:t>)</a:t>
+            </a:r>
+            <a:r>
+              <a:rPr lang="ko-KR" altLang="en-US" sz="1400" b="1" dirty="0"/>
+              <a:t> 또는 객체</a:t>
+            </a:r>
+            <a:r>
+              <a:rPr lang="en-US" altLang="ko-KR" sz="1400" b="1" dirty="0"/>
+              <a:t>(</a:t>
+            </a:r>
+            <a:r>
+              <a:rPr lang="ko-KR" altLang="en-US" sz="1400" b="1" dirty="0"/>
+              <a:t>서비스</a:t>
+            </a:r>
+            <a:r>
+              <a:rPr lang="en-US" altLang="ko-KR" sz="1400" b="1" dirty="0"/>
+              <a:t>,</a:t>
+            </a:r>
+            <a:r>
+              <a:rPr lang="ko-KR" altLang="en-US" sz="1400" b="1" dirty="0"/>
+              <a:t> </a:t>
+            </a:r>
+            <a:r>
+              <a:rPr lang="en-US" altLang="ko-KR" sz="1400" b="1" dirty="0"/>
+              <a:t>API, DB)</a:t>
+            </a:r>
+            <a:r>
+              <a:rPr lang="ko-KR" altLang="en-US" sz="1400" b="1" dirty="0"/>
+              <a:t> 기준 의존성</a:t>
+            </a:r>
+            <a:r>
+              <a:rPr lang="en-US" altLang="ko-KR" sz="1400" b="1" dirty="0"/>
+              <a:t>,</a:t>
+            </a:r>
+            <a:r>
+              <a:rPr lang="ko-KR" altLang="en-US" sz="1400" b="1" dirty="0"/>
+              <a:t> 비즈니스 규칙</a:t>
+            </a:r>
+            <a:r>
+              <a:rPr lang="en-US" altLang="ko-KR" sz="1400" b="1" dirty="0"/>
+              <a:t>,</a:t>
+            </a:r>
+            <a:r>
+              <a:rPr lang="ko-KR" altLang="en-US" sz="1400" b="1" dirty="0"/>
+              <a:t> 시스템 경계</a:t>
+            </a:r>
+            <a:r>
+              <a:rPr lang="en-US" altLang="ko-KR" sz="1400" b="1" dirty="0"/>
+              <a:t>,</a:t>
+            </a:r>
+            <a:r>
+              <a:rPr lang="ko-KR" altLang="en-US" sz="1400" b="1" dirty="0"/>
+              <a:t> 테스트 영향도 분석</a:t>
+            </a:r>
+            <a:endParaRPr lang="en-US" altLang="ko-KR" sz="1400" b="1" dirty="0"/>
+          </a:p>
+          <a:p>
+            <a:pPr algn="ctr"/>
+            <a:r>
+              <a:rPr lang="ko-KR" altLang="en-US" sz="1400" b="1" dirty="0"/>
+              <a:t>정량적인 리스크</a:t>
+            </a:r>
+            <a:r>
+              <a:rPr lang="en-US" altLang="ko-KR" sz="1400" b="1" dirty="0"/>
+              <a:t>,</a:t>
+            </a:r>
+            <a:r>
+              <a:rPr lang="ko-KR" altLang="en-US" sz="1400" b="1" dirty="0"/>
+              <a:t> 자연어로 된 리스크 설명</a:t>
+            </a:r>
+            <a:r>
+              <a:rPr lang="en-US" altLang="ko-KR" sz="1400" b="1" dirty="0"/>
+              <a:t>,</a:t>
+            </a:r>
+            <a:r>
+              <a:rPr lang="ko-KR" altLang="en-US" sz="1400" b="1" dirty="0"/>
+              <a:t> 비즈니스 임팩트 해석 제공</a:t>
+            </a:r>
+            <a:endParaRPr lang="en-US" altLang="ko-KR" sz="1400" b="1" dirty="0"/>
           </a:p>
         </p:txBody>
       </p:sp>
